--- a/PUM1/Wyk/Wyklad6.pptx
+++ b/PUM1/Wyk/Wyklad6.pptx
@@ -5,10 +5,10 @@
     <p:sldMasterId id="2147483696" r:id="rId1"/>
   </p:sldMasterIdLst>
   <p:notesMasterIdLst>
-    <p:notesMasterId r:id="rId54"/>
+    <p:notesMasterId r:id="rId55"/>
   </p:notesMasterIdLst>
   <p:handoutMasterIdLst>
-    <p:handoutMasterId r:id="rId55"/>
+    <p:handoutMasterId r:id="rId56"/>
   </p:handoutMasterIdLst>
   <p:sldIdLst>
     <p:sldId id="346" r:id="rId2"/>
@@ -39,30 +39,31 @@
     <p:sldId id="520" r:id="rId27"/>
     <p:sldId id="521" r:id="rId28"/>
     <p:sldId id="522" r:id="rId29"/>
-    <p:sldId id="523" r:id="rId30"/>
-    <p:sldId id="524" r:id="rId31"/>
-    <p:sldId id="525" r:id="rId32"/>
-    <p:sldId id="526" r:id="rId33"/>
-    <p:sldId id="553" r:id="rId34"/>
-    <p:sldId id="554" r:id="rId35"/>
-    <p:sldId id="527" r:id="rId36"/>
-    <p:sldId id="528" r:id="rId37"/>
-    <p:sldId id="529" r:id="rId38"/>
-    <p:sldId id="530" r:id="rId39"/>
-    <p:sldId id="531" r:id="rId40"/>
-    <p:sldId id="532" r:id="rId41"/>
-    <p:sldId id="533" r:id="rId42"/>
-    <p:sldId id="534" r:id="rId43"/>
-    <p:sldId id="535" r:id="rId44"/>
-    <p:sldId id="536" r:id="rId45"/>
-    <p:sldId id="542" r:id="rId46"/>
-    <p:sldId id="537" r:id="rId47"/>
-    <p:sldId id="540" r:id="rId48"/>
-    <p:sldId id="541" r:id="rId49"/>
-    <p:sldId id="538" r:id="rId50"/>
-    <p:sldId id="543" r:id="rId51"/>
-    <p:sldId id="544" r:id="rId52"/>
-    <p:sldId id="545" r:id="rId53"/>
+    <p:sldId id="555" r:id="rId30"/>
+    <p:sldId id="523" r:id="rId31"/>
+    <p:sldId id="524" r:id="rId32"/>
+    <p:sldId id="525" r:id="rId33"/>
+    <p:sldId id="526" r:id="rId34"/>
+    <p:sldId id="553" r:id="rId35"/>
+    <p:sldId id="554" r:id="rId36"/>
+    <p:sldId id="527" r:id="rId37"/>
+    <p:sldId id="528" r:id="rId38"/>
+    <p:sldId id="529" r:id="rId39"/>
+    <p:sldId id="530" r:id="rId40"/>
+    <p:sldId id="531" r:id="rId41"/>
+    <p:sldId id="532" r:id="rId42"/>
+    <p:sldId id="533" r:id="rId43"/>
+    <p:sldId id="534" r:id="rId44"/>
+    <p:sldId id="535" r:id="rId45"/>
+    <p:sldId id="536" r:id="rId46"/>
+    <p:sldId id="542" r:id="rId47"/>
+    <p:sldId id="537" r:id="rId48"/>
+    <p:sldId id="540" r:id="rId49"/>
+    <p:sldId id="541" r:id="rId50"/>
+    <p:sldId id="538" r:id="rId51"/>
+    <p:sldId id="543" r:id="rId52"/>
+    <p:sldId id="544" r:id="rId53"/>
+    <p:sldId id="545" r:id="rId54"/>
   </p:sldIdLst>
   <p:sldSz cx="9144000" cy="6858000" type="screen4x3"/>
   <p:notesSz cx="6858000" cy="9144000"/>
@@ -323,7 +324,7 @@
           <a:p>
             <a:fld id="{5113504E-0C99-2340-A5F6-DD6E1A87C372}" type="datetimeFigureOut">
               <a:rPr lang="pl-PL" smtClean="0"/>
-              <a:t>10.01.2025</a:t>
+              <a:t>8.04.2026</a:t>
             </a:fld>
             <a:endParaRPr lang="pl-PL"/>
           </a:p>
@@ -489,7 +490,7 @@
           <a:p>
             <a:fld id="{F78C933E-44E9-2D43-91B0-0D2BEEFA7EB9}" type="datetimeFigureOut">
               <a:rPr lang="pl-PL" smtClean="0"/>
-              <a:t>10.01.2025</a:t>
+              <a:t>8.04.2026</a:t>
             </a:fld>
             <a:endParaRPr lang="pl-PL"/>
           </a:p>
@@ -3045,7 +3046,7 @@
         <p:cNvPr id="1" name="">
           <a:extLst>
             <a:ext uri="{FF2B5EF4-FFF2-40B4-BE49-F238E27FC236}">
-              <a16:creationId xmlns:a16="http://schemas.microsoft.com/office/drawing/2014/main" id="{BB87009D-C82C-533A-9A75-F6214169FCE7}"/>
+              <a16:creationId xmlns:a16="http://schemas.microsoft.com/office/drawing/2014/main" id="{6858DEAF-32A1-E308-0AE0-47CB7749D426}"/>
             </a:ext>
           </a:extLst>
         </p:cNvPr>
@@ -3065,7 +3066,7 @@
           <p:cNvPr id="2" name="Slide Image Placeholder 1">
             <a:extLst>
               <a:ext uri="{FF2B5EF4-FFF2-40B4-BE49-F238E27FC236}">
-                <a16:creationId xmlns:a16="http://schemas.microsoft.com/office/drawing/2014/main" id="{8EDF7777-600E-E9DF-78C3-7F0E68477871}"/>
+                <a16:creationId xmlns:a16="http://schemas.microsoft.com/office/drawing/2014/main" id="{95883100-3541-CE90-9B91-F9FD106AA69D}"/>
               </a:ext>
             </a:extLst>
           </p:cNvPr>
@@ -3083,7 +3084,7 @@
           <p:cNvPr id="3" name="Notes Placeholder 2">
             <a:extLst>
               <a:ext uri="{FF2B5EF4-FFF2-40B4-BE49-F238E27FC236}">
-                <a16:creationId xmlns:a16="http://schemas.microsoft.com/office/drawing/2014/main" id="{331E5366-C9FC-7A2E-D309-76B3CAD842DF}"/>
+                <a16:creationId xmlns:a16="http://schemas.microsoft.com/office/drawing/2014/main" id="{30717F47-733B-30D8-158B-C09DDF40ACD4}"/>
               </a:ext>
             </a:extLst>
           </p:cNvPr>
@@ -3111,7 +3112,7 @@
           <p:cNvPr id="4" name="Slide Number Placeholder 3">
             <a:extLst>
               <a:ext uri="{FF2B5EF4-FFF2-40B4-BE49-F238E27FC236}">
-                <a16:creationId xmlns:a16="http://schemas.microsoft.com/office/drawing/2014/main" id="{66E49637-281F-E415-7CB5-804C4652A9FC}"/>
+                <a16:creationId xmlns:a16="http://schemas.microsoft.com/office/drawing/2014/main" id="{DAEE560F-E66A-7C82-0005-F827A4DCFA66}"/>
               </a:ext>
             </a:extLst>
           </p:cNvPr>
@@ -3138,7 +3139,7 @@
     </p:spTree>
     <p:extLst>
       <p:ext uri="{BB962C8B-B14F-4D97-AF65-F5344CB8AC3E}">
-        <p14:creationId xmlns:p14="http://schemas.microsoft.com/office/powerpoint/2010/main" val="2043456358"/>
+        <p14:creationId xmlns:p14="http://schemas.microsoft.com/office/powerpoint/2010/main" val="2930676257"/>
       </p:ext>
     </p:extLst>
   </p:cSld>
@@ -3267,6 +3268,117 @@
         <p:cNvPr id="1" name="">
           <a:extLst>
             <a:ext uri="{FF2B5EF4-FFF2-40B4-BE49-F238E27FC236}">
+              <a16:creationId xmlns:a16="http://schemas.microsoft.com/office/drawing/2014/main" id="{BB87009D-C82C-533A-9A75-F6214169FCE7}"/>
+            </a:ext>
+          </a:extLst>
+        </p:cNvPr>
+        <p:cNvGrpSpPr/>
+        <p:nvPr/>
+      </p:nvGrpSpPr>
+      <p:grpSpPr>
+        <a:xfrm>
+          <a:off x="0" y="0"/>
+          <a:ext cx="0" cy="0"/>
+          <a:chOff x="0" y="0"/>
+          <a:chExt cx="0" cy="0"/>
+        </a:xfrm>
+      </p:grpSpPr>
+      <p:sp>
+        <p:nvSpPr>
+          <p:cNvPr id="2" name="Slide Image Placeholder 1">
+            <a:extLst>
+              <a:ext uri="{FF2B5EF4-FFF2-40B4-BE49-F238E27FC236}">
+                <a16:creationId xmlns:a16="http://schemas.microsoft.com/office/drawing/2014/main" id="{8EDF7777-600E-E9DF-78C3-7F0E68477871}"/>
+              </a:ext>
+            </a:extLst>
+          </p:cNvPr>
+          <p:cNvSpPr>
+            <a:spLocks noGrp="1" noRot="1" noChangeAspect="1"/>
+          </p:cNvSpPr>
+          <p:nvPr>
+            <p:ph type="sldImg"/>
+          </p:nvPr>
+        </p:nvSpPr>
+        <p:spPr/>
+      </p:sp>
+      <p:sp>
+        <p:nvSpPr>
+          <p:cNvPr id="3" name="Notes Placeholder 2">
+            <a:extLst>
+              <a:ext uri="{FF2B5EF4-FFF2-40B4-BE49-F238E27FC236}">
+                <a16:creationId xmlns:a16="http://schemas.microsoft.com/office/drawing/2014/main" id="{331E5366-C9FC-7A2E-D309-76B3CAD842DF}"/>
+              </a:ext>
+            </a:extLst>
+          </p:cNvPr>
+          <p:cNvSpPr>
+            <a:spLocks noGrp="1"/>
+          </p:cNvSpPr>
+          <p:nvPr>
+            <p:ph type="body" idx="1"/>
+          </p:nvPr>
+        </p:nvSpPr>
+        <p:spPr/>
+        <p:txBody>
+          <a:bodyPr/>
+          <a:lstStyle/>
+          <a:p>
+            <a:pPr rtl="0"/>
+            <a:endParaRPr lang="pl-PL" dirty="0">
+              <a:effectLst/>
+            </a:endParaRPr>
+          </a:p>
+        </p:txBody>
+      </p:sp>
+      <p:sp>
+        <p:nvSpPr>
+          <p:cNvPr id="4" name="Slide Number Placeholder 3">
+            <a:extLst>
+              <a:ext uri="{FF2B5EF4-FFF2-40B4-BE49-F238E27FC236}">
+                <a16:creationId xmlns:a16="http://schemas.microsoft.com/office/drawing/2014/main" id="{66E49637-281F-E415-7CB5-804C4652A9FC}"/>
+              </a:ext>
+            </a:extLst>
+          </p:cNvPr>
+          <p:cNvSpPr>
+            <a:spLocks noGrp="1"/>
+          </p:cNvSpPr>
+          <p:nvPr>
+            <p:ph type="sldNum" sz="quarter" idx="10"/>
+          </p:nvPr>
+        </p:nvSpPr>
+        <p:spPr/>
+        <p:txBody>
+          <a:bodyPr/>
+          <a:lstStyle/>
+          <a:p>
+            <a:fld id="{79CE77F9-1A7F-B148-A0AA-5828300D10BC}" type="slidenum">
+              <a:rPr lang="pl-PL" smtClean="0"/>
+              <a:t>30</a:t>
+            </a:fld>
+            <a:endParaRPr lang="pl-PL"/>
+          </a:p>
+        </p:txBody>
+      </p:sp>
+    </p:spTree>
+    <p:extLst>
+      <p:ext uri="{BB962C8B-B14F-4D97-AF65-F5344CB8AC3E}">
+        <p14:creationId xmlns:p14="http://schemas.microsoft.com/office/powerpoint/2010/main" val="2043456358"/>
+      </p:ext>
+    </p:extLst>
+  </p:cSld>
+  <p:clrMapOvr>
+    <a:masterClrMapping/>
+  </p:clrMapOvr>
+</p:notes>
+</file>
+
+<file path=ppt/notesSlides/notesSlide31.xml><?xml version="1.0" encoding="utf-8"?>
+<p:notes xmlns:a="http://schemas.openxmlformats.org/drawingml/2006/main" xmlns:r="http://schemas.openxmlformats.org/officeDocument/2006/relationships" xmlns:p="http://schemas.openxmlformats.org/presentationml/2006/main">
+  <p:cSld>
+    <p:spTree>
+      <p:nvGrpSpPr>
+        <p:cNvPr id="1" name="">
+          <a:extLst>
+            <a:ext uri="{FF2B5EF4-FFF2-40B4-BE49-F238E27FC236}">
               <a16:creationId xmlns:a16="http://schemas.microsoft.com/office/drawing/2014/main" id="{1BFDC0DD-7D09-4EC1-5570-07BA2846C6E3}"/>
             </a:ext>
           </a:extLst>
@@ -3351,7 +3463,7 @@
           <a:p>
             <a:fld id="{79CE77F9-1A7F-B148-A0AA-5828300D10BC}" type="slidenum">
               <a:rPr lang="pl-PL" smtClean="0"/>
-              <a:t>30</a:t>
+              <a:t>31</a:t>
             </a:fld>
             <a:endParaRPr lang="pl-PL"/>
           </a:p>
@@ -3370,7 +3482,7 @@
 </p:notes>
 </file>
 
-<file path=ppt/notesSlides/notesSlide31.xml><?xml version="1.0" encoding="utf-8"?>
+<file path=ppt/notesSlides/notesSlide32.xml><?xml version="1.0" encoding="utf-8"?>
 <p:notes xmlns:a="http://schemas.openxmlformats.org/drawingml/2006/main" xmlns:r="http://schemas.openxmlformats.org/officeDocument/2006/relationships" xmlns:p="http://schemas.openxmlformats.org/presentationml/2006/main">
   <p:cSld>
     <p:spTree>
@@ -3462,7 +3574,7 @@
           <a:p>
             <a:fld id="{79CE77F9-1A7F-B148-A0AA-5828300D10BC}" type="slidenum">
               <a:rPr lang="pl-PL" smtClean="0"/>
-              <a:t>31</a:t>
+              <a:t>32</a:t>
             </a:fld>
             <a:endParaRPr lang="pl-PL"/>
           </a:p>
@@ -3481,7 +3593,7 @@
 </p:notes>
 </file>
 
-<file path=ppt/notesSlides/notesSlide32.xml><?xml version="1.0" encoding="utf-8"?>
+<file path=ppt/notesSlides/notesSlide33.xml><?xml version="1.0" encoding="utf-8"?>
 <p:notes xmlns:a="http://schemas.openxmlformats.org/drawingml/2006/main" xmlns:r="http://schemas.openxmlformats.org/officeDocument/2006/relationships" xmlns:p="http://schemas.openxmlformats.org/presentationml/2006/main">
   <p:cSld>
     <p:spTree>
@@ -3573,7 +3685,7 @@
           <a:p>
             <a:fld id="{79CE77F9-1A7F-B148-A0AA-5828300D10BC}" type="slidenum">
               <a:rPr lang="pl-PL" smtClean="0"/>
-              <a:t>32</a:t>
+              <a:t>33</a:t>
             </a:fld>
             <a:endParaRPr lang="pl-PL"/>
           </a:p>
@@ -3592,7 +3704,7 @@
 </p:notes>
 </file>
 
-<file path=ppt/notesSlides/notesSlide33.xml><?xml version="1.0" encoding="utf-8"?>
+<file path=ppt/notesSlides/notesSlide34.xml><?xml version="1.0" encoding="utf-8"?>
 <p:notes xmlns:a="http://schemas.openxmlformats.org/drawingml/2006/main" xmlns:r="http://schemas.openxmlformats.org/officeDocument/2006/relationships" xmlns:p="http://schemas.openxmlformats.org/presentationml/2006/main">
   <p:cSld>
     <p:spTree>
@@ -3684,7 +3796,7 @@
           <a:p>
             <a:fld id="{79CE77F9-1A7F-B148-A0AA-5828300D10BC}" type="slidenum">
               <a:rPr lang="pl-PL" smtClean="0"/>
-              <a:t>33</a:t>
+              <a:t>34</a:t>
             </a:fld>
             <a:endParaRPr lang="pl-PL"/>
           </a:p>
@@ -3703,7 +3815,7 @@
 </p:notes>
 </file>
 
-<file path=ppt/notesSlides/notesSlide34.xml><?xml version="1.0" encoding="utf-8"?>
+<file path=ppt/notesSlides/notesSlide35.xml><?xml version="1.0" encoding="utf-8"?>
 <p:notes xmlns:a="http://schemas.openxmlformats.org/drawingml/2006/main" xmlns:r="http://schemas.openxmlformats.org/officeDocument/2006/relationships" xmlns:p="http://schemas.openxmlformats.org/presentationml/2006/main">
   <p:cSld>
     <p:spTree>
@@ -3795,7 +3907,7 @@
           <a:p>
             <a:fld id="{79CE77F9-1A7F-B148-A0AA-5828300D10BC}" type="slidenum">
               <a:rPr lang="pl-PL" smtClean="0"/>
-              <a:t>34</a:t>
+              <a:t>35</a:t>
             </a:fld>
             <a:endParaRPr lang="pl-PL"/>
           </a:p>
@@ -3814,7 +3926,7 @@
 </p:notes>
 </file>
 
-<file path=ppt/notesSlides/notesSlide35.xml><?xml version="1.0" encoding="utf-8"?>
+<file path=ppt/notesSlides/notesSlide36.xml><?xml version="1.0" encoding="utf-8"?>
 <p:notes xmlns:a="http://schemas.openxmlformats.org/drawingml/2006/main" xmlns:r="http://schemas.openxmlformats.org/officeDocument/2006/relationships" xmlns:p="http://schemas.openxmlformats.org/presentationml/2006/main">
   <p:cSld>
     <p:spTree>
@@ -3906,7 +4018,7 @@
           <a:p>
             <a:fld id="{79CE77F9-1A7F-B148-A0AA-5828300D10BC}" type="slidenum">
               <a:rPr lang="pl-PL" smtClean="0"/>
-              <a:t>35</a:t>
+              <a:t>36</a:t>
             </a:fld>
             <a:endParaRPr lang="pl-PL"/>
           </a:p>
@@ -3925,7 +4037,7 @@
 </p:notes>
 </file>
 
-<file path=ppt/notesSlides/notesSlide36.xml><?xml version="1.0" encoding="utf-8"?>
+<file path=ppt/notesSlides/notesSlide37.xml><?xml version="1.0" encoding="utf-8"?>
 <p:notes xmlns:a="http://schemas.openxmlformats.org/drawingml/2006/main" xmlns:r="http://schemas.openxmlformats.org/officeDocument/2006/relationships" xmlns:p="http://schemas.openxmlformats.org/presentationml/2006/main">
   <p:cSld>
     <p:spTree>
@@ -4017,7 +4129,7 @@
           <a:p>
             <a:fld id="{79CE77F9-1A7F-B148-A0AA-5828300D10BC}" type="slidenum">
               <a:rPr lang="pl-PL" smtClean="0"/>
-              <a:t>36</a:t>
+              <a:t>37</a:t>
             </a:fld>
             <a:endParaRPr lang="pl-PL"/>
           </a:p>
@@ -4036,7 +4148,7 @@
 </p:notes>
 </file>
 
-<file path=ppt/notesSlides/notesSlide37.xml><?xml version="1.0" encoding="utf-8"?>
+<file path=ppt/notesSlides/notesSlide38.xml><?xml version="1.0" encoding="utf-8"?>
 <p:notes xmlns:a="http://schemas.openxmlformats.org/drawingml/2006/main" xmlns:r="http://schemas.openxmlformats.org/officeDocument/2006/relationships" xmlns:p="http://schemas.openxmlformats.org/presentationml/2006/main">
   <p:cSld>
     <p:spTree>
@@ -4128,7 +4240,7 @@
           <a:p>
             <a:fld id="{79CE77F9-1A7F-B148-A0AA-5828300D10BC}" type="slidenum">
               <a:rPr lang="pl-PL" smtClean="0"/>
-              <a:t>37</a:t>
+              <a:t>38</a:t>
             </a:fld>
             <a:endParaRPr lang="pl-PL"/>
           </a:p>
@@ -4147,7 +4259,7 @@
 </p:notes>
 </file>
 
-<file path=ppt/notesSlides/notesSlide38.xml><?xml version="1.0" encoding="utf-8"?>
+<file path=ppt/notesSlides/notesSlide39.xml><?xml version="1.0" encoding="utf-8"?>
 <p:notes xmlns:a="http://schemas.openxmlformats.org/drawingml/2006/main" xmlns:r="http://schemas.openxmlformats.org/officeDocument/2006/relationships" xmlns:p="http://schemas.openxmlformats.org/presentationml/2006/main">
   <p:cSld>
     <p:spTree>
@@ -4239,7 +4351,7 @@
           <a:p>
             <a:fld id="{79CE77F9-1A7F-B148-A0AA-5828300D10BC}" type="slidenum">
               <a:rPr lang="pl-PL" smtClean="0"/>
-              <a:t>38</a:t>
+              <a:t>39</a:t>
             </a:fld>
             <a:endParaRPr lang="pl-PL"/>
           </a:p>
@@ -4249,117 +4361,6 @@
     <p:extLst>
       <p:ext uri="{BB962C8B-B14F-4D97-AF65-F5344CB8AC3E}">
         <p14:creationId xmlns:p14="http://schemas.microsoft.com/office/powerpoint/2010/main" val="3264328133"/>
-      </p:ext>
-    </p:extLst>
-  </p:cSld>
-  <p:clrMapOvr>
-    <a:masterClrMapping/>
-  </p:clrMapOvr>
-</p:notes>
-</file>
-
-<file path=ppt/notesSlides/notesSlide39.xml><?xml version="1.0" encoding="utf-8"?>
-<p:notes xmlns:a="http://schemas.openxmlformats.org/drawingml/2006/main" xmlns:r="http://schemas.openxmlformats.org/officeDocument/2006/relationships" xmlns:p="http://schemas.openxmlformats.org/presentationml/2006/main">
-  <p:cSld>
-    <p:spTree>
-      <p:nvGrpSpPr>
-        <p:cNvPr id="1" name="">
-          <a:extLst>
-            <a:ext uri="{FF2B5EF4-FFF2-40B4-BE49-F238E27FC236}">
-              <a16:creationId xmlns:a16="http://schemas.microsoft.com/office/drawing/2014/main" id="{5D17C07E-5A33-1F5D-CF87-8A92A038940F}"/>
-            </a:ext>
-          </a:extLst>
-        </p:cNvPr>
-        <p:cNvGrpSpPr/>
-        <p:nvPr/>
-      </p:nvGrpSpPr>
-      <p:grpSpPr>
-        <a:xfrm>
-          <a:off x="0" y="0"/>
-          <a:ext cx="0" cy="0"/>
-          <a:chOff x="0" y="0"/>
-          <a:chExt cx="0" cy="0"/>
-        </a:xfrm>
-      </p:grpSpPr>
-      <p:sp>
-        <p:nvSpPr>
-          <p:cNvPr id="2" name="Slide Image Placeholder 1">
-            <a:extLst>
-              <a:ext uri="{FF2B5EF4-FFF2-40B4-BE49-F238E27FC236}">
-                <a16:creationId xmlns:a16="http://schemas.microsoft.com/office/drawing/2014/main" id="{D1E10579-67AB-6639-27C3-950E8E10845D}"/>
-              </a:ext>
-            </a:extLst>
-          </p:cNvPr>
-          <p:cNvSpPr>
-            <a:spLocks noGrp="1" noRot="1" noChangeAspect="1"/>
-          </p:cNvSpPr>
-          <p:nvPr>
-            <p:ph type="sldImg"/>
-          </p:nvPr>
-        </p:nvSpPr>
-        <p:spPr/>
-      </p:sp>
-      <p:sp>
-        <p:nvSpPr>
-          <p:cNvPr id="3" name="Notes Placeholder 2">
-            <a:extLst>
-              <a:ext uri="{FF2B5EF4-FFF2-40B4-BE49-F238E27FC236}">
-                <a16:creationId xmlns:a16="http://schemas.microsoft.com/office/drawing/2014/main" id="{1C3CB52B-EEC3-18BA-0D55-FBC4AE332BF5}"/>
-              </a:ext>
-            </a:extLst>
-          </p:cNvPr>
-          <p:cNvSpPr>
-            <a:spLocks noGrp="1"/>
-          </p:cNvSpPr>
-          <p:nvPr>
-            <p:ph type="body" idx="1"/>
-          </p:nvPr>
-        </p:nvSpPr>
-        <p:spPr/>
-        <p:txBody>
-          <a:bodyPr/>
-          <a:lstStyle/>
-          <a:p>
-            <a:pPr rtl="0"/>
-            <a:endParaRPr lang="pl-PL" dirty="0">
-              <a:effectLst/>
-            </a:endParaRPr>
-          </a:p>
-        </p:txBody>
-      </p:sp>
-      <p:sp>
-        <p:nvSpPr>
-          <p:cNvPr id="4" name="Slide Number Placeholder 3">
-            <a:extLst>
-              <a:ext uri="{FF2B5EF4-FFF2-40B4-BE49-F238E27FC236}">
-                <a16:creationId xmlns:a16="http://schemas.microsoft.com/office/drawing/2014/main" id="{D022EA1A-CAAD-A3E2-A583-D9DEE2FAB703}"/>
-              </a:ext>
-            </a:extLst>
-          </p:cNvPr>
-          <p:cNvSpPr>
-            <a:spLocks noGrp="1"/>
-          </p:cNvSpPr>
-          <p:nvPr>
-            <p:ph type="sldNum" sz="quarter" idx="10"/>
-          </p:nvPr>
-        </p:nvSpPr>
-        <p:spPr/>
-        <p:txBody>
-          <a:bodyPr/>
-          <a:lstStyle/>
-          <a:p>
-            <a:fld id="{79CE77F9-1A7F-B148-A0AA-5828300D10BC}" type="slidenum">
-              <a:rPr lang="pl-PL" smtClean="0"/>
-              <a:t>39</a:t>
-            </a:fld>
-            <a:endParaRPr lang="pl-PL"/>
-          </a:p>
-        </p:txBody>
-      </p:sp>
-    </p:spTree>
-    <p:extLst>
-      <p:ext uri="{BB962C8B-B14F-4D97-AF65-F5344CB8AC3E}">
-        <p14:creationId xmlns:p14="http://schemas.microsoft.com/office/powerpoint/2010/main" val="24190816"/>
       </p:ext>
     </p:extLst>
   </p:cSld>
@@ -4488,6 +4489,117 @@
         <p:cNvPr id="1" name="">
           <a:extLst>
             <a:ext uri="{FF2B5EF4-FFF2-40B4-BE49-F238E27FC236}">
+              <a16:creationId xmlns:a16="http://schemas.microsoft.com/office/drawing/2014/main" id="{5D17C07E-5A33-1F5D-CF87-8A92A038940F}"/>
+            </a:ext>
+          </a:extLst>
+        </p:cNvPr>
+        <p:cNvGrpSpPr/>
+        <p:nvPr/>
+      </p:nvGrpSpPr>
+      <p:grpSpPr>
+        <a:xfrm>
+          <a:off x="0" y="0"/>
+          <a:ext cx="0" cy="0"/>
+          <a:chOff x="0" y="0"/>
+          <a:chExt cx="0" cy="0"/>
+        </a:xfrm>
+      </p:grpSpPr>
+      <p:sp>
+        <p:nvSpPr>
+          <p:cNvPr id="2" name="Slide Image Placeholder 1">
+            <a:extLst>
+              <a:ext uri="{FF2B5EF4-FFF2-40B4-BE49-F238E27FC236}">
+                <a16:creationId xmlns:a16="http://schemas.microsoft.com/office/drawing/2014/main" id="{D1E10579-67AB-6639-27C3-950E8E10845D}"/>
+              </a:ext>
+            </a:extLst>
+          </p:cNvPr>
+          <p:cNvSpPr>
+            <a:spLocks noGrp="1" noRot="1" noChangeAspect="1"/>
+          </p:cNvSpPr>
+          <p:nvPr>
+            <p:ph type="sldImg"/>
+          </p:nvPr>
+        </p:nvSpPr>
+        <p:spPr/>
+      </p:sp>
+      <p:sp>
+        <p:nvSpPr>
+          <p:cNvPr id="3" name="Notes Placeholder 2">
+            <a:extLst>
+              <a:ext uri="{FF2B5EF4-FFF2-40B4-BE49-F238E27FC236}">
+                <a16:creationId xmlns:a16="http://schemas.microsoft.com/office/drawing/2014/main" id="{1C3CB52B-EEC3-18BA-0D55-FBC4AE332BF5}"/>
+              </a:ext>
+            </a:extLst>
+          </p:cNvPr>
+          <p:cNvSpPr>
+            <a:spLocks noGrp="1"/>
+          </p:cNvSpPr>
+          <p:nvPr>
+            <p:ph type="body" idx="1"/>
+          </p:nvPr>
+        </p:nvSpPr>
+        <p:spPr/>
+        <p:txBody>
+          <a:bodyPr/>
+          <a:lstStyle/>
+          <a:p>
+            <a:pPr rtl="0"/>
+            <a:endParaRPr lang="pl-PL" dirty="0">
+              <a:effectLst/>
+            </a:endParaRPr>
+          </a:p>
+        </p:txBody>
+      </p:sp>
+      <p:sp>
+        <p:nvSpPr>
+          <p:cNvPr id="4" name="Slide Number Placeholder 3">
+            <a:extLst>
+              <a:ext uri="{FF2B5EF4-FFF2-40B4-BE49-F238E27FC236}">
+                <a16:creationId xmlns:a16="http://schemas.microsoft.com/office/drawing/2014/main" id="{D022EA1A-CAAD-A3E2-A583-D9DEE2FAB703}"/>
+              </a:ext>
+            </a:extLst>
+          </p:cNvPr>
+          <p:cNvSpPr>
+            <a:spLocks noGrp="1"/>
+          </p:cNvSpPr>
+          <p:nvPr>
+            <p:ph type="sldNum" sz="quarter" idx="10"/>
+          </p:nvPr>
+        </p:nvSpPr>
+        <p:spPr/>
+        <p:txBody>
+          <a:bodyPr/>
+          <a:lstStyle/>
+          <a:p>
+            <a:fld id="{79CE77F9-1A7F-B148-A0AA-5828300D10BC}" type="slidenum">
+              <a:rPr lang="pl-PL" smtClean="0"/>
+              <a:t>40</a:t>
+            </a:fld>
+            <a:endParaRPr lang="pl-PL"/>
+          </a:p>
+        </p:txBody>
+      </p:sp>
+    </p:spTree>
+    <p:extLst>
+      <p:ext uri="{BB962C8B-B14F-4D97-AF65-F5344CB8AC3E}">
+        <p14:creationId xmlns:p14="http://schemas.microsoft.com/office/powerpoint/2010/main" val="24190816"/>
+      </p:ext>
+    </p:extLst>
+  </p:cSld>
+  <p:clrMapOvr>
+    <a:masterClrMapping/>
+  </p:clrMapOvr>
+</p:notes>
+</file>
+
+<file path=ppt/notesSlides/notesSlide41.xml><?xml version="1.0" encoding="utf-8"?>
+<p:notes xmlns:a="http://schemas.openxmlformats.org/drawingml/2006/main" xmlns:r="http://schemas.openxmlformats.org/officeDocument/2006/relationships" xmlns:p="http://schemas.openxmlformats.org/presentationml/2006/main">
+  <p:cSld>
+    <p:spTree>
+      <p:nvGrpSpPr>
+        <p:cNvPr id="1" name="">
+          <a:extLst>
+            <a:ext uri="{FF2B5EF4-FFF2-40B4-BE49-F238E27FC236}">
               <a16:creationId xmlns:a16="http://schemas.microsoft.com/office/drawing/2014/main" id="{60F209C7-3E3D-BA39-A80C-601A06D11F39}"/>
             </a:ext>
           </a:extLst>
@@ -4572,7 +4684,7 @@
           <a:p>
             <a:fld id="{79CE77F9-1A7F-B148-A0AA-5828300D10BC}" type="slidenum">
               <a:rPr lang="pl-PL" smtClean="0"/>
-              <a:t>40</a:t>
+              <a:t>41</a:t>
             </a:fld>
             <a:endParaRPr lang="pl-PL"/>
           </a:p>
@@ -4591,7 +4703,7 @@
 </p:notes>
 </file>
 
-<file path=ppt/notesSlides/notesSlide41.xml><?xml version="1.0" encoding="utf-8"?>
+<file path=ppt/notesSlides/notesSlide42.xml><?xml version="1.0" encoding="utf-8"?>
 <p:notes xmlns:a="http://schemas.openxmlformats.org/drawingml/2006/main" xmlns:r="http://schemas.openxmlformats.org/officeDocument/2006/relationships" xmlns:p="http://schemas.openxmlformats.org/presentationml/2006/main">
   <p:cSld>
     <p:spTree>
@@ -4683,7 +4795,7 @@
           <a:p>
             <a:fld id="{79CE77F9-1A7F-B148-A0AA-5828300D10BC}" type="slidenum">
               <a:rPr lang="pl-PL" smtClean="0"/>
-              <a:t>41</a:t>
+              <a:t>42</a:t>
             </a:fld>
             <a:endParaRPr lang="pl-PL"/>
           </a:p>
@@ -4702,7 +4814,7 @@
 </p:notes>
 </file>
 
-<file path=ppt/notesSlides/notesSlide42.xml><?xml version="1.0" encoding="utf-8"?>
+<file path=ppt/notesSlides/notesSlide43.xml><?xml version="1.0" encoding="utf-8"?>
 <p:notes xmlns:a="http://schemas.openxmlformats.org/drawingml/2006/main" xmlns:r="http://schemas.openxmlformats.org/officeDocument/2006/relationships" xmlns:p="http://schemas.openxmlformats.org/presentationml/2006/main">
   <p:cSld>
     <p:spTree>
@@ -4794,7 +4906,7 @@
           <a:p>
             <a:fld id="{79CE77F9-1A7F-B148-A0AA-5828300D10BC}" type="slidenum">
               <a:rPr lang="pl-PL" smtClean="0"/>
-              <a:t>42</a:t>
+              <a:t>43</a:t>
             </a:fld>
             <a:endParaRPr lang="pl-PL"/>
           </a:p>
@@ -4813,7 +4925,7 @@
 </p:notes>
 </file>
 
-<file path=ppt/notesSlides/notesSlide43.xml><?xml version="1.0" encoding="utf-8"?>
+<file path=ppt/notesSlides/notesSlide44.xml><?xml version="1.0" encoding="utf-8"?>
 <p:notes xmlns:a="http://schemas.openxmlformats.org/drawingml/2006/main" xmlns:r="http://schemas.openxmlformats.org/officeDocument/2006/relationships" xmlns:p="http://schemas.openxmlformats.org/presentationml/2006/main">
   <p:cSld>
     <p:spTree>
@@ -4905,7 +5017,7 @@
           <a:p>
             <a:fld id="{79CE77F9-1A7F-B148-A0AA-5828300D10BC}" type="slidenum">
               <a:rPr lang="pl-PL" smtClean="0"/>
-              <a:t>43</a:t>
+              <a:t>44</a:t>
             </a:fld>
             <a:endParaRPr lang="pl-PL"/>
           </a:p>
@@ -4924,7 +5036,7 @@
 </p:notes>
 </file>
 
-<file path=ppt/notesSlides/notesSlide44.xml><?xml version="1.0" encoding="utf-8"?>
+<file path=ppt/notesSlides/notesSlide45.xml><?xml version="1.0" encoding="utf-8"?>
 <p:notes xmlns:a="http://schemas.openxmlformats.org/drawingml/2006/main" xmlns:r="http://schemas.openxmlformats.org/officeDocument/2006/relationships" xmlns:p="http://schemas.openxmlformats.org/presentationml/2006/main">
   <p:cSld>
     <p:spTree>
@@ -5016,7 +5128,7 @@
           <a:p>
             <a:fld id="{79CE77F9-1A7F-B148-A0AA-5828300D10BC}" type="slidenum">
               <a:rPr lang="pl-PL" smtClean="0"/>
-              <a:t>44</a:t>
+              <a:t>45</a:t>
             </a:fld>
             <a:endParaRPr lang="pl-PL"/>
           </a:p>
@@ -5035,7 +5147,7 @@
 </p:notes>
 </file>
 
-<file path=ppt/notesSlides/notesSlide45.xml><?xml version="1.0" encoding="utf-8"?>
+<file path=ppt/notesSlides/notesSlide46.xml><?xml version="1.0" encoding="utf-8"?>
 <p:notes xmlns:a="http://schemas.openxmlformats.org/drawingml/2006/main" xmlns:r="http://schemas.openxmlformats.org/officeDocument/2006/relationships" xmlns:p="http://schemas.openxmlformats.org/presentationml/2006/main">
   <p:cSld>
     <p:spTree>
@@ -5127,7 +5239,7 @@
           <a:p>
             <a:fld id="{79CE77F9-1A7F-B148-A0AA-5828300D10BC}" type="slidenum">
               <a:rPr lang="pl-PL" smtClean="0"/>
-              <a:t>45</a:t>
+              <a:t>46</a:t>
             </a:fld>
             <a:endParaRPr lang="pl-PL"/>
           </a:p>
@@ -5146,7 +5258,7 @@
 </p:notes>
 </file>
 
-<file path=ppt/notesSlides/notesSlide46.xml><?xml version="1.0" encoding="utf-8"?>
+<file path=ppt/notesSlides/notesSlide47.xml><?xml version="1.0" encoding="utf-8"?>
 <p:notes xmlns:a="http://schemas.openxmlformats.org/drawingml/2006/main" xmlns:r="http://schemas.openxmlformats.org/officeDocument/2006/relationships" xmlns:p="http://schemas.openxmlformats.org/presentationml/2006/main">
   <p:cSld>
     <p:spTree>
@@ -5238,7 +5350,7 @@
           <a:p>
             <a:fld id="{79CE77F9-1A7F-B148-A0AA-5828300D10BC}" type="slidenum">
               <a:rPr lang="pl-PL" smtClean="0"/>
-              <a:t>46</a:t>
+              <a:t>47</a:t>
             </a:fld>
             <a:endParaRPr lang="pl-PL"/>
           </a:p>
@@ -5257,7 +5369,7 @@
 </p:notes>
 </file>
 
-<file path=ppt/notesSlides/notesSlide47.xml><?xml version="1.0" encoding="utf-8"?>
+<file path=ppt/notesSlides/notesSlide48.xml><?xml version="1.0" encoding="utf-8"?>
 <p:notes xmlns:a="http://schemas.openxmlformats.org/drawingml/2006/main" xmlns:r="http://schemas.openxmlformats.org/officeDocument/2006/relationships" xmlns:p="http://schemas.openxmlformats.org/presentationml/2006/main">
   <p:cSld>
     <p:spTree>
@@ -5349,7 +5461,7 @@
           <a:p>
             <a:fld id="{79CE77F9-1A7F-B148-A0AA-5828300D10BC}" type="slidenum">
               <a:rPr lang="pl-PL" smtClean="0"/>
-              <a:t>47</a:t>
+              <a:t>48</a:t>
             </a:fld>
             <a:endParaRPr lang="pl-PL"/>
           </a:p>
@@ -5368,7 +5480,7 @@
 </p:notes>
 </file>
 
-<file path=ppt/notesSlides/notesSlide48.xml><?xml version="1.0" encoding="utf-8"?>
+<file path=ppt/notesSlides/notesSlide49.xml><?xml version="1.0" encoding="utf-8"?>
 <p:notes xmlns:a="http://schemas.openxmlformats.org/drawingml/2006/main" xmlns:r="http://schemas.openxmlformats.org/officeDocument/2006/relationships" xmlns:p="http://schemas.openxmlformats.org/presentationml/2006/main">
   <p:cSld>
     <p:spTree>
@@ -5460,7 +5572,7 @@
           <a:p>
             <a:fld id="{79CE77F9-1A7F-B148-A0AA-5828300D10BC}" type="slidenum">
               <a:rPr lang="pl-PL" smtClean="0"/>
-              <a:t>48</a:t>
+              <a:t>49</a:t>
             </a:fld>
             <a:endParaRPr lang="pl-PL"/>
           </a:p>
@@ -5470,117 +5582,6 @@
     <p:extLst>
       <p:ext uri="{BB962C8B-B14F-4D97-AF65-F5344CB8AC3E}">
         <p14:creationId xmlns:p14="http://schemas.microsoft.com/office/powerpoint/2010/main" val="4231533309"/>
-      </p:ext>
-    </p:extLst>
-  </p:cSld>
-  <p:clrMapOvr>
-    <a:masterClrMapping/>
-  </p:clrMapOvr>
-</p:notes>
-</file>
-
-<file path=ppt/notesSlides/notesSlide49.xml><?xml version="1.0" encoding="utf-8"?>
-<p:notes xmlns:a="http://schemas.openxmlformats.org/drawingml/2006/main" xmlns:r="http://schemas.openxmlformats.org/officeDocument/2006/relationships" xmlns:p="http://schemas.openxmlformats.org/presentationml/2006/main">
-  <p:cSld>
-    <p:spTree>
-      <p:nvGrpSpPr>
-        <p:cNvPr id="1" name="">
-          <a:extLst>
-            <a:ext uri="{FF2B5EF4-FFF2-40B4-BE49-F238E27FC236}">
-              <a16:creationId xmlns:a16="http://schemas.microsoft.com/office/drawing/2014/main" id="{CC0F177D-5500-06C1-4D55-4863AD1BE9F9}"/>
-            </a:ext>
-          </a:extLst>
-        </p:cNvPr>
-        <p:cNvGrpSpPr/>
-        <p:nvPr/>
-      </p:nvGrpSpPr>
-      <p:grpSpPr>
-        <a:xfrm>
-          <a:off x="0" y="0"/>
-          <a:ext cx="0" cy="0"/>
-          <a:chOff x="0" y="0"/>
-          <a:chExt cx="0" cy="0"/>
-        </a:xfrm>
-      </p:grpSpPr>
-      <p:sp>
-        <p:nvSpPr>
-          <p:cNvPr id="2" name="Slide Image Placeholder 1">
-            <a:extLst>
-              <a:ext uri="{FF2B5EF4-FFF2-40B4-BE49-F238E27FC236}">
-                <a16:creationId xmlns:a16="http://schemas.microsoft.com/office/drawing/2014/main" id="{5904EE10-CF01-5D12-C5E8-2B07B6FCC301}"/>
-              </a:ext>
-            </a:extLst>
-          </p:cNvPr>
-          <p:cNvSpPr>
-            <a:spLocks noGrp="1" noRot="1" noChangeAspect="1"/>
-          </p:cNvSpPr>
-          <p:nvPr>
-            <p:ph type="sldImg"/>
-          </p:nvPr>
-        </p:nvSpPr>
-        <p:spPr/>
-      </p:sp>
-      <p:sp>
-        <p:nvSpPr>
-          <p:cNvPr id="3" name="Notes Placeholder 2">
-            <a:extLst>
-              <a:ext uri="{FF2B5EF4-FFF2-40B4-BE49-F238E27FC236}">
-                <a16:creationId xmlns:a16="http://schemas.microsoft.com/office/drawing/2014/main" id="{6AE31599-BC31-5C91-4EB9-20EE90F1DD8A}"/>
-              </a:ext>
-            </a:extLst>
-          </p:cNvPr>
-          <p:cNvSpPr>
-            <a:spLocks noGrp="1"/>
-          </p:cNvSpPr>
-          <p:nvPr>
-            <p:ph type="body" idx="1"/>
-          </p:nvPr>
-        </p:nvSpPr>
-        <p:spPr/>
-        <p:txBody>
-          <a:bodyPr/>
-          <a:lstStyle/>
-          <a:p>
-            <a:pPr rtl="0"/>
-            <a:endParaRPr lang="pl-PL" dirty="0">
-              <a:effectLst/>
-            </a:endParaRPr>
-          </a:p>
-        </p:txBody>
-      </p:sp>
-      <p:sp>
-        <p:nvSpPr>
-          <p:cNvPr id="4" name="Slide Number Placeholder 3">
-            <a:extLst>
-              <a:ext uri="{FF2B5EF4-FFF2-40B4-BE49-F238E27FC236}">
-                <a16:creationId xmlns:a16="http://schemas.microsoft.com/office/drawing/2014/main" id="{A342B310-B0E2-1E0A-5A89-8827DE7C62AC}"/>
-              </a:ext>
-            </a:extLst>
-          </p:cNvPr>
-          <p:cNvSpPr>
-            <a:spLocks noGrp="1"/>
-          </p:cNvSpPr>
-          <p:nvPr>
-            <p:ph type="sldNum" sz="quarter" idx="10"/>
-          </p:nvPr>
-        </p:nvSpPr>
-        <p:spPr/>
-        <p:txBody>
-          <a:bodyPr/>
-          <a:lstStyle/>
-          <a:p>
-            <a:fld id="{79CE77F9-1A7F-B148-A0AA-5828300D10BC}" type="slidenum">
-              <a:rPr lang="pl-PL" smtClean="0"/>
-              <a:t>49</a:t>
-            </a:fld>
-            <a:endParaRPr lang="pl-PL"/>
-          </a:p>
-        </p:txBody>
-      </p:sp>
-    </p:spTree>
-    <p:extLst>
-      <p:ext uri="{BB962C8B-B14F-4D97-AF65-F5344CB8AC3E}">
-        <p14:creationId xmlns:p14="http://schemas.microsoft.com/office/powerpoint/2010/main" val="1634383432"/>
       </p:ext>
     </p:extLst>
   </p:cSld>
@@ -5709,6 +5710,117 @@
         <p:cNvPr id="1" name="">
           <a:extLst>
             <a:ext uri="{FF2B5EF4-FFF2-40B4-BE49-F238E27FC236}">
+              <a16:creationId xmlns:a16="http://schemas.microsoft.com/office/drawing/2014/main" id="{CC0F177D-5500-06C1-4D55-4863AD1BE9F9}"/>
+            </a:ext>
+          </a:extLst>
+        </p:cNvPr>
+        <p:cNvGrpSpPr/>
+        <p:nvPr/>
+      </p:nvGrpSpPr>
+      <p:grpSpPr>
+        <a:xfrm>
+          <a:off x="0" y="0"/>
+          <a:ext cx="0" cy="0"/>
+          <a:chOff x="0" y="0"/>
+          <a:chExt cx="0" cy="0"/>
+        </a:xfrm>
+      </p:grpSpPr>
+      <p:sp>
+        <p:nvSpPr>
+          <p:cNvPr id="2" name="Slide Image Placeholder 1">
+            <a:extLst>
+              <a:ext uri="{FF2B5EF4-FFF2-40B4-BE49-F238E27FC236}">
+                <a16:creationId xmlns:a16="http://schemas.microsoft.com/office/drawing/2014/main" id="{5904EE10-CF01-5D12-C5E8-2B07B6FCC301}"/>
+              </a:ext>
+            </a:extLst>
+          </p:cNvPr>
+          <p:cNvSpPr>
+            <a:spLocks noGrp="1" noRot="1" noChangeAspect="1"/>
+          </p:cNvSpPr>
+          <p:nvPr>
+            <p:ph type="sldImg"/>
+          </p:nvPr>
+        </p:nvSpPr>
+        <p:spPr/>
+      </p:sp>
+      <p:sp>
+        <p:nvSpPr>
+          <p:cNvPr id="3" name="Notes Placeholder 2">
+            <a:extLst>
+              <a:ext uri="{FF2B5EF4-FFF2-40B4-BE49-F238E27FC236}">
+                <a16:creationId xmlns:a16="http://schemas.microsoft.com/office/drawing/2014/main" id="{6AE31599-BC31-5C91-4EB9-20EE90F1DD8A}"/>
+              </a:ext>
+            </a:extLst>
+          </p:cNvPr>
+          <p:cNvSpPr>
+            <a:spLocks noGrp="1"/>
+          </p:cNvSpPr>
+          <p:nvPr>
+            <p:ph type="body" idx="1"/>
+          </p:nvPr>
+        </p:nvSpPr>
+        <p:spPr/>
+        <p:txBody>
+          <a:bodyPr/>
+          <a:lstStyle/>
+          <a:p>
+            <a:pPr rtl="0"/>
+            <a:endParaRPr lang="pl-PL" dirty="0">
+              <a:effectLst/>
+            </a:endParaRPr>
+          </a:p>
+        </p:txBody>
+      </p:sp>
+      <p:sp>
+        <p:nvSpPr>
+          <p:cNvPr id="4" name="Slide Number Placeholder 3">
+            <a:extLst>
+              <a:ext uri="{FF2B5EF4-FFF2-40B4-BE49-F238E27FC236}">
+                <a16:creationId xmlns:a16="http://schemas.microsoft.com/office/drawing/2014/main" id="{A342B310-B0E2-1E0A-5A89-8827DE7C62AC}"/>
+              </a:ext>
+            </a:extLst>
+          </p:cNvPr>
+          <p:cNvSpPr>
+            <a:spLocks noGrp="1"/>
+          </p:cNvSpPr>
+          <p:nvPr>
+            <p:ph type="sldNum" sz="quarter" idx="10"/>
+          </p:nvPr>
+        </p:nvSpPr>
+        <p:spPr/>
+        <p:txBody>
+          <a:bodyPr/>
+          <a:lstStyle/>
+          <a:p>
+            <a:fld id="{79CE77F9-1A7F-B148-A0AA-5828300D10BC}" type="slidenum">
+              <a:rPr lang="pl-PL" smtClean="0"/>
+              <a:t>50</a:t>
+            </a:fld>
+            <a:endParaRPr lang="pl-PL"/>
+          </a:p>
+        </p:txBody>
+      </p:sp>
+    </p:spTree>
+    <p:extLst>
+      <p:ext uri="{BB962C8B-B14F-4D97-AF65-F5344CB8AC3E}">
+        <p14:creationId xmlns:p14="http://schemas.microsoft.com/office/powerpoint/2010/main" val="1634383432"/>
+      </p:ext>
+    </p:extLst>
+  </p:cSld>
+  <p:clrMapOvr>
+    <a:masterClrMapping/>
+  </p:clrMapOvr>
+</p:notes>
+</file>
+
+<file path=ppt/notesSlides/notesSlide51.xml><?xml version="1.0" encoding="utf-8"?>
+<p:notes xmlns:a="http://schemas.openxmlformats.org/drawingml/2006/main" xmlns:r="http://schemas.openxmlformats.org/officeDocument/2006/relationships" xmlns:p="http://schemas.openxmlformats.org/presentationml/2006/main">
+  <p:cSld>
+    <p:spTree>
+      <p:nvGrpSpPr>
+        <p:cNvPr id="1" name="">
+          <a:extLst>
+            <a:ext uri="{FF2B5EF4-FFF2-40B4-BE49-F238E27FC236}">
               <a16:creationId xmlns:a16="http://schemas.microsoft.com/office/drawing/2014/main" id="{C2F7F0D5-8C89-830A-96E8-19ED5805D7BE}"/>
             </a:ext>
           </a:extLst>
@@ -5793,7 +5905,7 @@
           <a:p>
             <a:fld id="{79CE77F9-1A7F-B148-A0AA-5828300D10BC}" type="slidenum">
               <a:rPr lang="pl-PL" smtClean="0"/>
-              <a:t>50</a:t>
+              <a:t>51</a:t>
             </a:fld>
             <a:endParaRPr lang="pl-PL"/>
           </a:p>
@@ -5812,7 +5924,7 @@
 </p:notes>
 </file>
 
-<file path=ppt/notesSlides/notesSlide51.xml><?xml version="1.0" encoding="utf-8"?>
+<file path=ppt/notesSlides/notesSlide52.xml><?xml version="1.0" encoding="utf-8"?>
 <p:notes xmlns:a="http://schemas.openxmlformats.org/drawingml/2006/main" xmlns:r="http://schemas.openxmlformats.org/officeDocument/2006/relationships" xmlns:p="http://schemas.openxmlformats.org/presentationml/2006/main">
   <p:cSld>
     <p:spTree>
@@ -5904,7 +6016,7 @@
           <a:p>
             <a:fld id="{79CE77F9-1A7F-B148-A0AA-5828300D10BC}" type="slidenum">
               <a:rPr lang="pl-PL" smtClean="0"/>
-              <a:t>51</a:t>
+              <a:t>52</a:t>
             </a:fld>
             <a:endParaRPr lang="pl-PL"/>
           </a:p>
@@ -5923,7 +6035,7 @@
 </p:notes>
 </file>
 
-<file path=ppt/notesSlides/notesSlide52.xml><?xml version="1.0" encoding="utf-8"?>
+<file path=ppt/notesSlides/notesSlide53.xml><?xml version="1.0" encoding="utf-8"?>
 <p:notes xmlns:a="http://schemas.openxmlformats.org/drawingml/2006/main" xmlns:r="http://schemas.openxmlformats.org/officeDocument/2006/relationships" xmlns:p="http://schemas.openxmlformats.org/presentationml/2006/main">
   <p:cSld>
     <p:spTree>
@@ -6015,7 +6127,7 @@
           <a:p>
             <a:fld id="{79CE77F9-1A7F-B148-A0AA-5828300D10BC}" type="slidenum">
               <a:rPr lang="pl-PL" smtClean="0"/>
-              <a:t>52</a:t>
+              <a:t>53</a:t>
             </a:fld>
             <a:endParaRPr lang="pl-PL"/>
           </a:p>
@@ -6657,7 +6769,7 @@
           <a:p>
             <a:fld id="{91017B01-0C30-B241-B19F-621BE4770608}" type="datetimeFigureOut">
               <a:rPr lang="pl-PL" smtClean="0"/>
-              <a:t>10.01.2025</a:t>
+              <a:t>8.04.2026</a:t>
             </a:fld>
             <a:endParaRPr lang="pl-PL"/>
           </a:p>
@@ -6826,7 +6938,7 @@
           <a:p>
             <a:fld id="{91017B01-0C30-B241-B19F-621BE4770608}" type="datetimeFigureOut">
               <a:rPr lang="pl-PL" smtClean="0"/>
-              <a:t>10.01.2025</a:t>
+              <a:t>8.04.2026</a:t>
             </a:fld>
             <a:endParaRPr lang="pl-PL"/>
           </a:p>
@@ -7005,7 +7117,7 @@
           <a:p>
             <a:fld id="{91017B01-0C30-B241-B19F-621BE4770608}" type="datetimeFigureOut">
               <a:rPr lang="pl-PL" smtClean="0"/>
-              <a:t>10.01.2025</a:t>
+              <a:t>8.04.2026</a:t>
             </a:fld>
             <a:endParaRPr lang="pl-PL"/>
           </a:p>
@@ -7174,7 +7286,7 @@
           <a:p>
             <a:fld id="{91017B01-0C30-B241-B19F-621BE4770608}" type="datetimeFigureOut">
               <a:rPr lang="pl-PL" smtClean="0"/>
-              <a:t>10.01.2025</a:t>
+              <a:t>8.04.2026</a:t>
             </a:fld>
             <a:endParaRPr lang="pl-PL"/>
           </a:p>
@@ -7420,7 +7532,7 @@
           <a:p>
             <a:fld id="{91017B01-0C30-B241-B19F-621BE4770608}" type="datetimeFigureOut">
               <a:rPr lang="pl-PL" smtClean="0"/>
-              <a:t>10.01.2025</a:t>
+              <a:t>8.04.2026</a:t>
             </a:fld>
             <a:endParaRPr lang="pl-PL"/>
           </a:p>
@@ -7706,7 +7818,7 @@
           <a:p>
             <a:fld id="{91017B01-0C30-B241-B19F-621BE4770608}" type="datetimeFigureOut">
               <a:rPr lang="pl-PL" smtClean="0"/>
-              <a:t>10.01.2025</a:t>
+              <a:t>8.04.2026</a:t>
             </a:fld>
             <a:endParaRPr lang="pl-PL"/>
           </a:p>
@@ -8126,7 +8238,7 @@
           <a:p>
             <a:fld id="{91017B01-0C30-B241-B19F-621BE4770608}" type="datetimeFigureOut">
               <a:rPr lang="pl-PL" smtClean="0"/>
-              <a:t>10.01.2025</a:t>
+              <a:t>8.04.2026</a:t>
             </a:fld>
             <a:endParaRPr lang="pl-PL"/>
           </a:p>
@@ -8244,7 +8356,7 @@
           <a:p>
             <a:fld id="{91017B01-0C30-B241-B19F-621BE4770608}" type="datetimeFigureOut">
               <a:rPr lang="pl-PL" smtClean="0"/>
-              <a:t>10.01.2025</a:t>
+              <a:t>8.04.2026</a:t>
             </a:fld>
             <a:endParaRPr lang="pl-PL"/>
           </a:p>
@@ -8340,7 +8452,7 @@
           <a:p>
             <a:fld id="{91017B01-0C30-B241-B19F-621BE4770608}" type="datetimeFigureOut">
               <a:rPr lang="pl-PL" smtClean="0"/>
-              <a:t>10.01.2025</a:t>
+              <a:t>8.04.2026</a:t>
             </a:fld>
             <a:endParaRPr lang="pl-PL"/>
           </a:p>
@@ -8617,7 +8729,7 @@
           <a:p>
             <a:fld id="{91017B01-0C30-B241-B19F-621BE4770608}" type="datetimeFigureOut">
               <a:rPr lang="pl-PL" smtClean="0"/>
-              <a:t>10.01.2025</a:t>
+              <a:t>8.04.2026</a:t>
             </a:fld>
             <a:endParaRPr lang="pl-PL"/>
           </a:p>
@@ -8873,7 +8985,7 @@
           <a:p>
             <a:fld id="{91017B01-0C30-B241-B19F-621BE4770608}" type="datetimeFigureOut">
               <a:rPr lang="pl-PL" smtClean="0"/>
-              <a:t>10.01.2025</a:t>
+              <a:t>8.04.2026</a:t>
             </a:fld>
             <a:endParaRPr lang="pl-PL"/>
           </a:p>
@@ -9085,7 +9197,7 @@
           <a:p>
             <a:fld id="{91017B01-0C30-B241-B19F-621BE4770608}" type="datetimeFigureOut">
               <a:rPr lang="pl-PL" smtClean="0"/>
-              <a:t>10.01.2025</a:t>
+              <a:t>8.04.2026</a:t>
             </a:fld>
             <a:endParaRPr lang="pl-PL"/>
           </a:p>
@@ -19495,128 +19607,49 @@
           </a:prstGeom>
         </p:spPr>
       </p:pic>
-      <p:cxnSp>
-        <p:nvCxnSpPr>
-          <p:cNvPr id="24" name="Łącznik prosty ze strzałką 23">
-            <a:extLst>
-              <a:ext uri="{FF2B5EF4-FFF2-40B4-BE49-F238E27FC236}">
-                <a16:creationId xmlns:a16="http://schemas.microsoft.com/office/drawing/2014/main" id="{0F8517FE-9F8F-FF5F-FA6B-1AE4190DEFC1}"/>
-              </a:ext>
-            </a:extLst>
-          </p:cNvPr>
-          <p:cNvCxnSpPr>
-            <a:cxnSpLocks/>
-            <a:stCxn id="26" idx="2"/>
-          </p:cNvCxnSpPr>
-          <p:nvPr/>
-        </p:nvCxnSpPr>
-        <p:spPr>
-          <a:xfrm>
-            <a:off x="2818140" y="2435795"/>
-            <a:ext cx="1438643" cy="387665"/>
-          </a:xfrm>
-          <a:prstGeom prst="straightConnector1">
-            <a:avLst/>
-          </a:prstGeom>
-          <a:ln w="63500" cap="rnd">
-            <a:prstDash val="solid"/>
-            <a:tailEnd type="triangle"/>
+      <p:sp>
+        <p:nvSpPr>
+          <p:cNvPr id="4" name="Prostokąt 3">
+            <a:extLst>
+              <a:ext uri="{FF2B5EF4-FFF2-40B4-BE49-F238E27FC236}">
+                <a16:creationId xmlns:a16="http://schemas.microsoft.com/office/drawing/2014/main" id="{89586298-93CB-5D81-81E2-F54109BF409C}"/>
+              </a:ext>
+            </a:extLst>
+          </p:cNvPr>
+          <p:cNvSpPr/>
+          <p:nvPr/>
+        </p:nvSpPr>
+        <p:spPr>
+          <a:xfrm>
+            <a:off x="3851920" y="2996952"/>
+            <a:ext cx="5040560" cy="1080120"/>
+          </a:xfrm>
+          <a:prstGeom prst="rect">
+            <a:avLst/>
+          </a:prstGeom>
+          <a:solidFill>
+            <a:schemeClr val="bg1"/>
+          </a:solidFill>
+          <a:ln>
+            <a:solidFill>
+              <a:schemeClr val="bg1"/>
+            </a:solidFill>
           </a:ln>
         </p:spPr>
         <p:style>
           <a:lnRef idx="2">
-            <a:schemeClr val="accent1"/>
+            <a:schemeClr val="dk1"/>
           </a:lnRef>
-          <a:fillRef idx="0">
-            <a:schemeClr val="accent1"/>
+          <a:fillRef idx="1">
+            <a:schemeClr val="lt1"/>
           </a:fillRef>
-          <a:effectRef idx="1">
-            <a:schemeClr val="accent1"/>
+          <a:effectRef idx="0">
+            <a:schemeClr val="dk1"/>
           </a:effectRef>
           <a:fontRef idx="minor">
-            <a:schemeClr val="tx1"/>
+            <a:schemeClr val="dk1"/>
           </a:fontRef>
         </p:style>
-      </p:cxnSp>
-      <p:sp>
-        <p:nvSpPr>
-          <p:cNvPr id="25" name="pole tekstowe 24">
-            <a:extLst>
-              <a:ext uri="{FF2B5EF4-FFF2-40B4-BE49-F238E27FC236}">
-                <a16:creationId xmlns:a16="http://schemas.microsoft.com/office/drawing/2014/main" id="{CD4E2C87-B4A1-0201-495F-105D024C4E36}"/>
-              </a:ext>
-            </a:extLst>
-          </p:cNvPr>
-          <p:cNvSpPr txBox="1"/>
-          <p:nvPr/>
-        </p:nvSpPr>
-        <p:spPr>
-          <a:xfrm>
-            <a:off x="1689740" y="2073817"/>
-            <a:ext cx="3158328" cy="338554"/>
-          </a:xfrm>
-          <a:prstGeom prst="rect">
-            <a:avLst/>
-          </a:prstGeom>
-          <a:noFill/>
-        </p:spPr>
-        <p:txBody>
-          <a:bodyPr wrap="square" rtlCol="0">
-            <a:spAutoFit/>
-          </a:bodyPr>
-          <a:lstStyle/>
-          <a:p>
-            <a:pPr algn="just"/>
-            <a:r>
-              <a:rPr lang="pl-PL" sz="1600" b="1" dirty="0">
-                <a:solidFill>
-                  <a:schemeClr val="accent4">
-                    <a:lumMod val="50000"/>
-                  </a:schemeClr>
-                </a:solidFill>
-              </a:rPr>
-              <a:t>Interfejs znacznikowy</a:t>
-            </a:r>
-          </a:p>
-        </p:txBody>
-      </p:sp>
-      <p:sp>
-        <p:nvSpPr>
-          <p:cNvPr id="26" name="Prostokąt: zaokrąglone rogi 25">
-            <a:extLst>
-              <a:ext uri="{FF2B5EF4-FFF2-40B4-BE49-F238E27FC236}">
-                <a16:creationId xmlns:a16="http://schemas.microsoft.com/office/drawing/2014/main" id="{31805363-7992-6F6E-CF50-B8C149CC724D}"/>
-              </a:ext>
-            </a:extLst>
-          </p:cNvPr>
-          <p:cNvSpPr/>
-          <p:nvPr/>
-        </p:nvSpPr>
-        <p:spPr>
-          <a:xfrm>
-            <a:off x="1712352" y="2087122"/>
-            <a:ext cx="2211575" cy="348673"/>
-          </a:xfrm>
-          <a:prstGeom prst="roundRect">
-            <a:avLst/>
-          </a:prstGeom>
-          <a:noFill/>
-          <a:ln w="63500"/>
-        </p:spPr>
-        <p:style>
-          <a:lnRef idx="1">
-            <a:schemeClr val="accent1"/>
-          </a:lnRef>
-          <a:fillRef idx="3">
-            <a:schemeClr val="accent1"/>
-          </a:fillRef>
-          <a:effectRef idx="2">
-            <a:schemeClr val="accent1"/>
-          </a:effectRef>
-          <a:fontRef idx="minor">
-            <a:schemeClr val="lt1"/>
-          </a:fontRef>
-        </p:style>
         <p:txBody>
           <a:bodyPr rtlCol="0" anchor="ctr"/>
           <a:lstStyle/>
@@ -19626,352 +19659,6 @@
           </a:p>
         </p:txBody>
       </p:sp>
-      <p:cxnSp>
-        <p:nvCxnSpPr>
-          <p:cNvPr id="29" name="Łącznik prosty ze strzałką 28">
-            <a:extLst>
-              <a:ext uri="{FF2B5EF4-FFF2-40B4-BE49-F238E27FC236}">
-                <a16:creationId xmlns:a16="http://schemas.microsoft.com/office/drawing/2014/main" id="{A6070213-181E-023C-7F47-6B28051BC981}"/>
-              </a:ext>
-            </a:extLst>
-          </p:cNvPr>
-          <p:cNvCxnSpPr>
-            <a:cxnSpLocks/>
-            <a:stCxn id="31" idx="3"/>
-          </p:cNvCxnSpPr>
-          <p:nvPr/>
-        </p:nvCxnSpPr>
-        <p:spPr>
-          <a:xfrm flipV="1">
-            <a:off x="3471207" y="3140968"/>
-            <a:ext cx="785576" cy="97405"/>
-          </a:xfrm>
-          <a:prstGeom prst="straightConnector1">
-            <a:avLst/>
-          </a:prstGeom>
-          <a:ln w="63500" cap="rnd">
-            <a:prstDash val="solid"/>
-            <a:tailEnd type="triangle"/>
-          </a:ln>
-        </p:spPr>
-        <p:style>
-          <a:lnRef idx="2">
-            <a:schemeClr val="accent1"/>
-          </a:lnRef>
-          <a:fillRef idx="0">
-            <a:schemeClr val="accent1"/>
-          </a:fillRef>
-          <a:effectRef idx="1">
-            <a:schemeClr val="accent1"/>
-          </a:effectRef>
-          <a:fontRef idx="minor">
-            <a:schemeClr val="tx1"/>
-          </a:fontRef>
-        </p:style>
-      </p:cxnSp>
-      <p:sp>
-        <p:nvSpPr>
-          <p:cNvPr id="30" name="pole tekstowe 29">
-            <a:extLst>
-              <a:ext uri="{FF2B5EF4-FFF2-40B4-BE49-F238E27FC236}">
-                <a16:creationId xmlns:a16="http://schemas.microsoft.com/office/drawing/2014/main" id="{834FF2EC-60A2-10DB-8673-7D7B349AED75}"/>
-              </a:ext>
-            </a:extLst>
-          </p:cNvPr>
-          <p:cNvSpPr txBox="1"/>
-          <p:nvPr/>
-        </p:nvSpPr>
-        <p:spPr>
-          <a:xfrm>
-            <a:off x="1287103" y="2935662"/>
-            <a:ext cx="2211575" cy="584775"/>
-          </a:xfrm>
-          <a:prstGeom prst="rect">
-            <a:avLst/>
-          </a:prstGeom>
-          <a:noFill/>
-        </p:spPr>
-        <p:txBody>
-          <a:bodyPr wrap="square" rtlCol="0">
-            <a:spAutoFit/>
-          </a:bodyPr>
-          <a:lstStyle/>
-          <a:p>
-            <a:pPr algn="just"/>
-            <a:r>
-              <a:rPr lang="pl-PL" sz="1600" dirty="0">
-                <a:solidFill>
-                  <a:schemeClr val="accent4">
-                    <a:lumMod val="50000"/>
-                  </a:schemeClr>
-                </a:solidFill>
-              </a:rPr>
-              <a:t>Klasa implementująca interfejs</a:t>
-            </a:r>
-          </a:p>
-        </p:txBody>
-      </p:sp>
-      <p:cxnSp>
-        <p:nvCxnSpPr>
-          <p:cNvPr id="33" name="Łącznik prosty ze strzałką 32">
-            <a:extLst>
-              <a:ext uri="{FF2B5EF4-FFF2-40B4-BE49-F238E27FC236}">
-                <a16:creationId xmlns:a16="http://schemas.microsoft.com/office/drawing/2014/main" id="{4C9EA138-D090-28CF-850E-2A791C485573}"/>
-              </a:ext>
-            </a:extLst>
-          </p:cNvPr>
-          <p:cNvCxnSpPr>
-            <a:cxnSpLocks/>
-            <a:stCxn id="31" idx="3"/>
-          </p:cNvCxnSpPr>
-          <p:nvPr/>
-        </p:nvCxnSpPr>
-        <p:spPr>
-          <a:xfrm>
-            <a:off x="3471207" y="3238373"/>
-            <a:ext cx="785576" cy="142338"/>
-          </a:xfrm>
-          <a:prstGeom prst="straightConnector1">
-            <a:avLst/>
-          </a:prstGeom>
-          <a:ln w="63500" cap="rnd">
-            <a:prstDash val="solid"/>
-            <a:tailEnd type="triangle"/>
-          </a:ln>
-        </p:spPr>
-        <p:style>
-          <a:lnRef idx="2">
-            <a:schemeClr val="accent1"/>
-          </a:lnRef>
-          <a:fillRef idx="0">
-            <a:schemeClr val="accent1"/>
-          </a:fillRef>
-          <a:effectRef idx="1">
-            <a:schemeClr val="accent1"/>
-          </a:effectRef>
-          <a:fontRef idx="minor">
-            <a:schemeClr val="tx1"/>
-          </a:fontRef>
-        </p:style>
-      </p:cxnSp>
-      <p:sp>
-        <p:nvSpPr>
-          <p:cNvPr id="31" name="Prostokąt: zaokrąglone rogi 30">
-            <a:extLst>
-              <a:ext uri="{FF2B5EF4-FFF2-40B4-BE49-F238E27FC236}">
-                <a16:creationId xmlns:a16="http://schemas.microsoft.com/office/drawing/2014/main" id="{0BA33604-08E0-7E74-6A03-6301F80B24C2}"/>
-              </a:ext>
-            </a:extLst>
-          </p:cNvPr>
-          <p:cNvSpPr/>
-          <p:nvPr/>
-        </p:nvSpPr>
-        <p:spPr>
-          <a:xfrm>
-            <a:off x="1259632" y="2945985"/>
-            <a:ext cx="2211575" cy="584775"/>
-          </a:xfrm>
-          <a:prstGeom prst="roundRect">
-            <a:avLst/>
-          </a:prstGeom>
-          <a:noFill/>
-          <a:ln w="63500"/>
-        </p:spPr>
-        <p:style>
-          <a:lnRef idx="1">
-            <a:schemeClr val="accent1"/>
-          </a:lnRef>
-          <a:fillRef idx="3">
-            <a:schemeClr val="accent1"/>
-          </a:fillRef>
-          <a:effectRef idx="2">
-            <a:schemeClr val="accent1"/>
-          </a:effectRef>
-          <a:fontRef idx="minor">
-            <a:schemeClr val="lt1"/>
-          </a:fontRef>
-        </p:style>
-        <p:txBody>
-          <a:bodyPr rtlCol="0" anchor="ctr"/>
-          <a:lstStyle/>
-          <a:p>
-            <a:pPr algn="ctr"/>
-            <a:endParaRPr lang="pl-PL"/>
-          </a:p>
-        </p:txBody>
-      </p:sp>
-      <p:sp>
-        <p:nvSpPr>
-          <p:cNvPr id="39" name="pole tekstowe 38">
-            <a:extLst>
-              <a:ext uri="{FF2B5EF4-FFF2-40B4-BE49-F238E27FC236}">
-                <a16:creationId xmlns:a16="http://schemas.microsoft.com/office/drawing/2014/main" id="{93F072B1-A413-DD18-D47E-110ED9750335}"/>
-              </a:ext>
-            </a:extLst>
-          </p:cNvPr>
-          <p:cNvSpPr txBox="1"/>
-          <p:nvPr/>
-        </p:nvSpPr>
-        <p:spPr>
-          <a:xfrm>
-            <a:off x="6638104" y="1933333"/>
-            <a:ext cx="2211575" cy="584775"/>
-          </a:xfrm>
-          <a:prstGeom prst="rect">
-            <a:avLst/>
-          </a:prstGeom>
-          <a:noFill/>
-        </p:spPr>
-        <p:txBody>
-          <a:bodyPr wrap="square" rtlCol="0">
-            <a:spAutoFit/>
-          </a:bodyPr>
-          <a:lstStyle/>
-          <a:p>
-            <a:pPr algn="just"/>
-            <a:r>
-              <a:rPr lang="pl-PL" sz="1600" dirty="0">
-                <a:solidFill>
-                  <a:schemeClr val="accent4">
-                    <a:lumMod val="50000"/>
-                  </a:schemeClr>
-                </a:solidFill>
-              </a:rPr>
-              <a:t>Implementowany interfejs</a:t>
-            </a:r>
-          </a:p>
-        </p:txBody>
-      </p:sp>
-      <p:sp>
-        <p:nvSpPr>
-          <p:cNvPr id="40" name="Prostokąt: zaokrąglone rogi 39">
-            <a:extLst>
-              <a:ext uri="{FF2B5EF4-FFF2-40B4-BE49-F238E27FC236}">
-                <a16:creationId xmlns:a16="http://schemas.microsoft.com/office/drawing/2014/main" id="{511523F9-AF51-607A-B49A-F4F6BE398CF7}"/>
-              </a:ext>
-            </a:extLst>
-          </p:cNvPr>
-          <p:cNvSpPr/>
-          <p:nvPr/>
-        </p:nvSpPr>
-        <p:spPr>
-          <a:xfrm>
-            <a:off x="6508957" y="1933962"/>
-            <a:ext cx="2211575" cy="584775"/>
-          </a:xfrm>
-          <a:prstGeom prst="roundRect">
-            <a:avLst/>
-          </a:prstGeom>
-          <a:noFill/>
-          <a:ln w="63500"/>
-        </p:spPr>
-        <p:style>
-          <a:lnRef idx="1">
-            <a:schemeClr val="accent1"/>
-          </a:lnRef>
-          <a:fillRef idx="3">
-            <a:schemeClr val="accent1"/>
-          </a:fillRef>
-          <a:effectRef idx="2">
-            <a:schemeClr val="accent1"/>
-          </a:effectRef>
-          <a:fontRef idx="minor">
-            <a:schemeClr val="lt1"/>
-          </a:fontRef>
-        </p:style>
-        <p:txBody>
-          <a:bodyPr rtlCol="0" anchor="ctr"/>
-          <a:lstStyle/>
-          <a:p>
-            <a:pPr algn="ctr"/>
-            <a:endParaRPr lang="pl-PL"/>
-          </a:p>
-        </p:txBody>
-      </p:sp>
-      <p:cxnSp>
-        <p:nvCxnSpPr>
-          <p:cNvPr id="41" name="Łącznik prosty ze strzałką 40">
-            <a:extLst>
-              <a:ext uri="{FF2B5EF4-FFF2-40B4-BE49-F238E27FC236}">
-                <a16:creationId xmlns:a16="http://schemas.microsoft.com/office/drawing/2014/main" id="{30A6FAA4-1047-0F2A-D674-0400FE13F011}"/>
-              </a:ext>
-            </a:extLst>
-          </p:cNvPr>
-          <p:cNvCxnSpPr>
-            <a:cxnSpLocks/>
-          </p:cNvCxnSpPr>
-          <p:nvPr/>
-        </p:nvCxnSpPr>
-        <p:spPr>
-          <a:xfrm flipH="1">
-            <a:off x="6721258" y="2550830"/>
-            <a:ext cx="893486" cy="429180"/>
-          </a:xfrm>
-          <a:prstGeom prst="straightConnector1">
-            <a:avLst/>
-          </a:prstGeom>
-          <a:ln w="63500" cap="rnd">
-            <a:prstDash val="solid"/>
-            <a:tailEnd type="triangle"/>
-          </a:ln>
-        </p:spPr>
-        <p:style>
-          <a:lnRef idx="2">
-            <a:schemeClr val="accent1"/>
-          </a:lnRef>
-          <a:fillRef idx="0">
-            <a:schemeClr val="accent1"/>
-          </a:fillRef>
-          <a:effectRef idx="1">
-            <a:schemeClr val="accent1"/>
-          </a:effectRef>
-          <a:fontRef idx="minor">
-            <a:schemeClr val="tx1"/>
-          </a:fontRef>
-        </p:style>
-      </p:cxnSp>
-      <p:cxnSp>
-        <p:nvCxnSpPr>
-          <p:cNvPr id="42" name="Łącznik prosty ze strzałką 41">
-            <a:extLst>
-              <a:ext uri="{FF2B5EF4-FFF2-40B4-BE49-F238E27FC236}">
-                <a16:creationId xmlns:a16="http://schemas.microsoft.com/office/drawing/2014/main" id="{D1A4D5C0-64C8-172E-41FE-5A48A73E4554}"/>
-              </a:ext>
-            </a:extLst>
-          </p:cNvPr>
-          <p:cNvCxnSpPr>
-            <a:cxnSpLocks/>
-          </p:cNvCxnSpPr>
-          <p:nvPr/>
-        </p:nvCxnSpPr>
-        <p:spPr>
-          <a:xfrm>
-            <a:off x="8190634" y="2550830"/>
-            <a:ext cx="413814" cy="677219"/>
-          </a:xfrm>
-          <a:prstGeom prst="straightConnector1">
-            <a:avLst/>
-          </a:prstGeom>
-          <a:ln w="63500" cap="rnd">
-            <a:prstDash val="solid"/>
-            <a:tailEnd type="triangle"/>
-          </a:ln>
-        </p:spPr>
-        <p:style>
-          <a:lnRef idx="2">
-            <a:schemeClr val="accent1"/>
-          </a:lnRef>
-          <a:fillRef idx="0">
-            <a:schemeClr val="accent1"/>
-          </a:fillRef>
-          <a:effectRef idx="1">
-            <a:schemeClr val="accent1"/>
-          </a:effectRef>
-          <a:fontRef idx="minor">
-            <a:schemeClr val="tx1"/>
-          </a:fontRef>
-        </p:style>
-      </p:cxnSp>
     </p:spTree>
     <p:extLst>
       <p:ext uri="{BB962C8B-B14F-4D97-AF65-F5344CB8AC3E}">
@@ -20005,7 +19692,7 @@
         <p:cNvPr id="1" name="">
           <a:extLst>
             <a:ext uri="{FF2B5EF4-FFF2-40B4-BE49-F238E27FC236}">
-              <a16:creationId xmlns:a16="http://schemas.microsoft.com/office/drawing/2014/main" id="{3E1B6933-698A-50EC-9F86-332A553B82E0}"/>
+              <a16:creationId xmlns:a16="http://schemas.microsoft.com/office/drawing/2014/main" id="{39FAE140-B205-3858-4BAC-DC63D91EFCAE}"/>
             </a:ext>
           </a:extLst>
         </p:cNvPr>
@@ -20025,7 +19712,7 @@
           <p:cNvPr id="2" name="Rectangle 1">
             <a:extLst>
               <a:ext uri="{FF2B5EF4-FFF2-40B4-BE49-F238E27FC236}">
-                <a16:creationId xmlns:a16="http://schemas.microsoft.com/office/drawing/2014/main" id="{027630A8-7192-18EB-FC78-22E54A41F1B8}"/>
+                <a16:creationId xmlns:a16="http://schemas.microsoft.com/office/drawing/2014/main" id="{DDD9F99E-3941-0A28-0EA6-B923B0962983}"/>
               </a:ext>
             </a:extLst>
           </p:cNvPr>
@@ -20067,7 +19754,7 @@
           <p:cNvPr id="3" name="pole tekstowe 2">
             <a:extLst>
               <a:ext uri="{FF2B5EF4-FFF2-40B4-BE49-F238E27FC236}">
-                <a16:creationId xmlns:a16="http://schemas.microsoft.com/office/drawing/2014/main" id="{6CE7831C-6E83-99A1-D7CE-2BD5223287C0}"/>
+                <a16:creationId xmlns:a16="http://schemas.microsoft.com/office/drawing/2014/main" id="{1BFE8D22-09BF-9786-18A9-64FA67CD1A4E}"/>
               </a:ext>
             </a:extLst>
           </p:cNvPr>
@@ -20146,7 +19833,7 @@
           <p:cNvPr id="12" name="Obraz 11">
             <a:extLst>
               <a:ext uri="{FF2B5EF4-FFF2-40B4-BE49-F238E27FC236}">
-                <a16:creationId xmlns:a16="http://schemas.microsoft.com/office/drawing/2014/main" id="{AA53F0FE-EFE3-EB0F-42C5-8C7D40F5E056}"/>
+                <a16:creationId xmlns:a16="http://schemas.microsoft.com/office/drawing/2014/main" id="{F2E57C3B-D76D-5038-B8FB-198214A8E451}"/>
               </a:ext>
             </a:extLst>
           </p:cNvPr>
@@ -20176,7 +19863,7 @@
           <p:cNvPr id="24" name="Łącznik prosty ze strzałką 23">
             <a:extLst>
               <a:ext uri="{FF2B5EF4-FFF2-40B4-BE49-F238E27FC236}">
-                <a16:creationId xmlns:a16="http://schemas.microsoft.com/office/drawing/2014/main" id="{92E3A99E-131C-4C08-2F66-8A31E6651532}"/>
+                <a16:creationId xmlns:a16="http://schemas.microsoft.com/office/drawing/2014/main" id="{2CBD3DBF-7DCC-4159-FF0D-B19FFA534EF0}"/>
               </a:ext>
             </a:extLst>
           </p:cNvPr>
@@ -20219,7 +19906,7 @@
           <p:cNvPr id="25" name="pole tekstowe 24">
             <a:extLst>
               <a:ext uri="{FF2B5EF4-FFF2-40B4-BE49-F238E27FC236}">
-                <a16:creationId xmlns:a16="http://schemas.microsoft.com/office/drawing/2014/main" id="{0805CAE3-CFD5-9F83-A11E-4B6769C105B0}"/>
+                <a16:creationId xmlns:a16="http://schemas.microsoft.com/office/drawing/2014/main" id="{2C674EBF-0458-B2B6-E06F-967A85FC3408}"/>
               </a:ext>
             </a:extLst>
           </p:cNvPr>
@@ -20261,7 +19948,7 @@
           <p:cNvPr id="26" name="Prostokąt: zaokrąglone rogi 25">
             <a:extLst>
               <a:ext uri="{FF2B5EF4-FFF2-40B4-BE49-F238E27FC236}">
-                <a16:creationId xmlns:a16="http://schemas.microsoft.com/office/drawing/2014/main" id="{99D2F780-FD1F-2D20-089B-DB66A664A7F4}"/>
+                <a16:creationId xmlns:a16="http://schemas.microsoft.com/office/drawing/2014/main" id="{9C652C74-AA6F-1D5F-D8CF-1CD0E395D1AF}"/>
               </a:ext>
             </a:extLst>
           </p:cNvPr>
@@ -20307,7 +19994,7 @@
           <p:cNvPr id="29" name="Łącznik prosty ze strzałką 28">
             <a:extLst>
               <a:ext uri="{FF2B5EF4-FFF2-40B4-BE49-F238E27FC236}">
-                <a16:creationId xmlns:a16="http://schemas.microsoft.com/office/drawing/2014/main" id="{FDE8D488-6182-514B-4B63-F8FD8F79BCD4}"/>
+                <a16:creationId xmlns:a16="http://schemas.microsoft.com/office/drawing/2014/main" id="{89758134-2AFD-8AA5-E586-80BB49FDC627}"/>
               </a:ext>
             </a:extLst>
           </p:cNvPr>
@@ -20350,7 +20037,7 @@
           <p:cNvPr id="30" name="pole tekstowe 29">
             <a:extLst>
               <a:ext uri="{FF2B5EF4-FFF2-40B4-BE49-F238E27FC236}">
-                <a16:creationId xmlns:a16="http://schemas.microsoft.com/office/drawing/2014/main" id="{3635900E-9541-9051-4F18-6375FDD4399D}"/>
+                <a16:creationId xmlns:a16="http://schemas.microsoft.com/office/drawing/2014/main" id="{C9D024F2-64F6-5B30-EA93-E7269ED9EAC2}"/>
               </a:ext>
             </a:extLst>
           </p:cNvPr>
@@ -20392,7 +20079,7 @@
           <p:cNvPr id="33" name="Łącznik prosty ze strzałką 32">
             <a:extLst>
               <a:ext uri="{FF2B5EF4-FFF2-40B4-BE49-F238E27FC236}">
-                <a16:creationId xmlns:a16="http://schemas.microsoft.com/office/drawing/2014/main" id="{03683451-5AA4-E9E2-A381-8AEADB878A97}"/>
+                <a16:creationId xmlns:a16="http://schemas.microsoft.com/office/drawing/2014/main" id="{3CBD5DD0-EC8A-C8DD-7DFF-37DBB23932A4}"/>
               </a:ext>
             </a:extLst>
           </p:cNvPr>
@@ -20435,7 +20122,7 @@
           <p:cNvPr id="31" name="Prostokąt: zaokrąglone rogi 30">
             <a:extLst>
               <a:ext uri="{FF2B5EF4-FFF2-40B4-BE49-F238E27FC236}">
-                <a16:creationId xmlns:a16="http://schemas.microsoft.com/office/drawing/2014/main" id="{00793C92-B231-3F82-625B-335940E9AB96}"/>
+                <a16:creationId xmlns:a16="http://schemas.microsoft.com/office/drawing/2014/main" id="{6F4316A7-CCF5-4C5E-D97B-7B32DC4CF754}"/>
               </a:ext>
             </a:extLst>
           </p:cNvPr>
@@ -20476,42 +20163,12 @@
           </a:p>
         </p:txBody>
       </p:sp>
-      <p:pic>
-        <p:nvPicPr>
-          <p:cNvPr id="5" name="Obraz 4">
-            <a:extLst>
-              <a:ext uri="{FF2B5EF4-FFF2-40B4-BE49-F238E27FC236}">
-                <a16:creationId xmlns:a16="http://schemas.microsoft.com/office/drawing/2014/main" id="{76AD5FE6-54CF-C1CC-E173-F55206BA0051}"/>
-              </a:ext>
-            </a:extLst>
-          </p:cNvPr>
-          <p:cNvPicPr>
-            <a:picLocks noChangeAspect="1"/>
-          </p:cNvPicPr>
-          <p:nvPr/>
-        </p:nvPicPr>
-        <p:blipFill>
-          <a:blip r:embed="rId5"/>
-          <a:stretch>
-            <a:fillRect/>
-          </a:stretch>
-        </p:blipFill>
-        <p:spPr>
-          <a:xfrm>
-            <a:off x="2278385" y="4643583"/>
-            <a:ext cx="5630838" cy="1379110"/>
-          </a:xfrm>
-          <a:prstGeom prst="rect">
-            <a:avLst/>
-          </a:prstGeom>
-        </p:spPr>
-      </p:pic>
-      <p:sp>
-        <p:nvSpPr>
-          <p:cNvPr id="6" name="pole tekstowe 5">
-            <a:extLst>
-              <a:ext uri="{FF2B5EF4-FFF2-40B4-BE49-F238E27FC236}">
-                <a16:creationId xmlns:a16="http://schemas.microsoft.com/office/drawing/2014/main" id="{4A51C663-0B25-A470-B16B-523E3C0C9416}"/>
+      <p:sp>
+        <p:nvSpPr>
+          <p:cNvPr id="39" name="pole tekstowe 38">
+            <a:extLst>
+              <a:ext uri="{FF2B5EF4-FFF2-40B4-BE49-F238E27FC236}">
+                <a16:creationId xmlns:a16="http://schemas.microsoft.com/office/drawing/2014/main" id="{FFA582AC-1BD6-8511-7A3C-3A6C7ABBBB06}"/>
               </a:ext>
             </a:extLst>
           </p:cNvPr>
@@ -20520,8 +20177,8 @@
         </p:nvSpPr>
         <p:spPr>
           <a:xfrm>
-            <a:off x="4355976" y="4046791"/>
-            <a:ext cx="3068873" cy="338554"/>
+            <a:off x="6638104" y="1933333"/>
+            <a:ext cx="2211575" cy="584775"/>
           </a:xfrm>
           <a:prstGeom prst="rect">
             <a:avLst/>
@@ -20543,27 +20200,17 @@
                   </a:schemeClr>
                 </a:solidFill>
               </a:rPr>
-              <a:t>Obiekt o </a:t>
-            </a:r>
-            <a:r>
-              <a:rPr lang="pl-PL" sz="1600" b="1" dirty="0">
-                <a:solidFill>
-                  <a:schemeClr val="accent4">
-                    <a:lumMod val="50000"/>
-                  </a:schemeClr>
-                </a:solidFill>
-              </a:rPr>
-              <a:t>typie interfejsu</a:t>
-            </a:r>
-          </a:p>
-        </p:txBody>
-      </p:sp>
-      <p:sp>
-        <p:nvSpPr>
-          <p:cNvPr id="7" name="Prostokąt: zaokrąglone rogi 6">
-            <a:extLst>
-              <a:ext uri="{FF2B5EF4-FFF2-40B4-BE49-F238E27FC236}">
-                <a16:creationId xmlns:a16="http://schemas.microsoft.com/office/drawing/2014/main" id="{73D52ECB-7F43-982F-96F7-0CF003576AAE}"/>
+              <a:t>Implementowany interfejs</a:t>
+            </a:r>
+          </a:p>
+        </p:txBody>
+      </p:sp>
+      <p:sp>
+        <p:nvSpPr>
+          <p:cNvPr id="40" name="Prostokąt: zaokrąglone rogi 39">
+            <a:extLst>
+              <a:ext uri="{FF2B5EF4-FFF2-40B4-BE49-F238E27FC236}">
+                <a16:creationId xmlns:a16="http://schemas.microsoft.com/office/drawing/2014/main" id="{9C419407-B8C8-D074-CB53-25353E36FA7F}"/>
               </a:ext>
             </a:extLst>
           </p:cNvPr>
@@ -20572,8 +20219,8 @@
         </p:nvSpPr>
         <p:spPr>
           <a:xfrm>
-            <a:off x="4355976" y="4046791"/>
-            <a:ext cx="2304256" cy="357012"/>
+            <a:off x="6508957" y="1933962"/>
+            <a:ext cx="2211575" cy="584775"/>
           </a:xfrm>
           <a:prstGeom prst="roundRect">
             <a:avLst/>
@@ -20606,23 +20253,22 @@
       </p:sp>
       <p:cxnSp>
         <p:nvCxnSpPr>
-          <p:cNvPr id="8" name="Łącznik prosty ze strzałką 7">
-            <a:extLst>
-              <a:ext uri="{FF2B5EF4-FFF2-40B4-BE49-F238E27FC236}">
-                <a16:creationId xmlns:a16="http://schemas.microsoft.com/office/drawing/2014/main" id="{13306351-C95A-9B57-EB0D-64DA4F67E07A}"/>
+          <p:cNvPr id="41" name="Łącznik prosty ze strzałką 40">
+            <a:extLst>
+              <a:ext uri="{FF2B5EF4-FFF2-40B4-BE49-F238E27FC236}">
+                <a16:creationId xmlns:a16="http://schemas.microsoft.com/office/drawing/2014/main" id="{BFCC87C8-284A-36EF-6E1A-5676B2A59A6E}"/>
               </a:ext>
             </a:extLst>
           </p:cNvPr>
           <p:cNvCxnSpPr>
             <a:cxnSpLocks/>
-            <a:stCxn id="7" idx="2"/>
           </p:cNvCxnSpPr>
           <p:nvPr/>
         </p:nvCxnSpPr>
         <p:spPr>
           <a:xfrm flipH="1">
-            <a:off x="3923927" y="4403803"/>
-            <a:ext cx="1584177" cy="250103"/>
+            <a:off x="6721258" y="2550830"/>
+            <a:ext cx="893486" cy="429180"/>
           </a:xfrm>
           <a:prstGeom prst="straightConnector1">
             <a:avLst/>
@@ -20649,23 +20295,22 @@
       </p:cxnSp>
       <p:cxnSp>
         <p:nvCxnSpPr>
-          <p:cNvPr id="10" name="Łącznik prosty ze strzałką 9">
-            <a:extLst>
-              <a:ext uri="{FF2B5EF4-FFF2-40B4-BE49-F238E27FC236}">
-                <a16:creationId xmlns:a16="http://schemas.microsoft.com/office/drawing/2014/main" id="{AD5CD3B9-0E34-6081-7CE8-DF0711D5BB41}"/>
+          <p:cNvPr id="42" name="Łącznik prosty ze strzałką 41">
+            <a:extLst>
+              <a:ext uri="{FF2B5EF4-FFF2-40B4-BE49-F238E27FC236}">
+                <a16:creationId xmlns:a16="http://schemas.microsoft.com/office/drawing/2014/main" id="{2ABE51CC-1838-B9AF-B3A4-418BD4651EA6}"/>
               </a:ext>
             </a:extLst>
           </p:cNvPr>
           <p:cNvCxnSpPr>
             <a:cxnSpLocks/>
-            <a:stCxn id="7" idx="0"/>
           </p:cNvCxnSpPr>
           <p:nvPr/>
         </p:nvCxnSpPr>
         <p:spPr>
-          <a:xfrm flipV="1">
-            <a:off x="5508104" y="3472238"/>
-            <a:ext cx="850175" cy="574553"/>
+          <a:xfrm>
+            <a:off x="8190634" y="2550830"/>
+            <a:ext cx="413814" cy="677219"/>
           </a:xfrm>
           <a:prstGeom prst="straightConnector1">
             <a:avLst/>
@@ -20690,315 +20335,10 @@
           </a:fontRef>
         </p:style>
       </p:cxnSp>
-      <p:cxnSp>
-        <p:nvCxnSpPr>
-          <p:cNvPr id="13" name="Łącznik prosty ze strzałką 12">
-            <a:extLst>
-              <a:ext uri="{FF2B5EF4-FFF2-40B4-BE49-F238E27FC236}">
-                <a16:creationId xmlns:a16="http://schemas.microsoft.com/office/drawing/2014/main" id="{8578AF3E-0984-A8C0-739D-D1FEBF9140EE}"/>
-              </a:ext>
-            </a:extLst>
-          </p:cNvPr>
-          <p:cNvCxnSpPr>
-            <a:cxnSpLocks/>
-            <a:stCxn id="7" idx="0"/>
-          </p:cNvCxnSpPr>
-          <p:nvPr/>
-        </p:nvCxnSpPr>
-        <p:spPr>
-          <a:xfrm flipV="1">
-            <a:off x="5508104" y="3472238"/>
-            <a:ext cx="2426309" cy="574553"/>
-          </a:xfrm>
-          <a:prstGeom prst="straightConnector1">
-            <a:avLst/>
-          </a:prstGeom>
-          <a:ln w="63500" cap="rnd">
-            <a:prstDash val="solid"/>
-            <a:tailEnd type="triangle"/>
-          </a:ln>
-        </p:spPr>
-        <p:style>
-          <a:lnRef idx="2">
-            <a:schemeClr val="accent1"/>
-          </a:lnRef>
-          <a:fillRef idx="0">
-            <a:schemeClr val="accent1"/>
-          </a:fillRef>
-          <a:effectRef idx="1">
-            <a:schemeClr val="accent1"/>
-          </a:effectRef>
-          <a:fontRef idx="minor">
-            <a:schemeClr val="tx1"/>
-          </a:fontRef>
-        </p:style>
-      </p:cxnSp>
-      <p:sp>
-        <p:nvSpPr>
-          <p:cNvPr id="18" name="Prostokąt: zaokrąglone rogi 17">
-            <a:extLst>
-              <a:ext uri="{FF2B5EF4-FFF2-40B4-BE49-F238E27FC236}">
-                <a16:creationId xmlns:a16="http://schemas.microsoft.com/office/drawing/2014/main" id="{EF0BD6E0-6744-3120-A9E7-C279792C6601}"/>
-              </a:ext>
-            </a:extLst>
-          </p:cNvPr>
-          <p:cNvSpPr/>
-          <p:nvPr/>
-        </p:nvSpPr>
-        <p:spPr>
-          <a:xfrm>
-            <a:off x="1237856" y="2956308"/>
-            <a:ext cx="2211575" cy="584775"/>
-          </a:xfrm>
-          <a:prstGeom prst="roundRect">
-            <a:avLst/>
-          </a:prstGeom>
-          <a:noFill/>
-          <a:ln w="63500"/>
-        </p:spPr>
-        <p:style>
-          <a:lnRef idx="1">
-            <a:schemeClr val="accent1"/>
-          </a:lnRef>
-          <a:fillRef idx="3">
-            <a:schemeClr val="accent1"/>
-          </a:fillRef>
-          <a:effectRef idx="2">
-            <a:schemeClr val="accent1"/>
-          </a:effectRef>
-          <a:fontRef idx="minor">
-            <a:schemeClr val="lt1"/>
-          </a:fontRef>
-        </p:style>
-        <p:txBody>
-          <a:bodyPr rtlCol="0" anchor="ctr"/>
-          <a:lstStyle/>
-          <a:p>
-            <a:pPr algn="ctr"/>
-            <a:endParaRPr lang="pl-PL"/>
-          </a:p>
-        </p:txBody>
-      </p:sp>
-      <p:sp>
-        <p:nvSpPr>
-          <p:cNvPr id="19" name="pole tekstowe 18">
-            <a:extLst>
-              <a:ext uri="{FF2B5EF4-FFF2-40B4-BE49-F238E27FC236}">
-                <a16:creationId xmlns:a16="http://schemas.microsoft.com/office/drawing/2014/main" id="{98E747A8-B5AB-3C3A-5897-8841AE6CB6B5}"/>
-              </a:ext>
-            </a:extLst>
-          </p:cNvPr>
-          <p:cNvSpPr txBox="1"/>
-          <p:nvPr/>
-        </p:nvSpPr>
-        <p:spPr>
-          <a:xfrm>
-            <a:off x="6638104" y="1933333"/>
-            <a:ext cx="2211575" cy="584775"/>
-          </a:xfrm>
-          <a:prstGeom prst="rect">
-            <a:avLst/>
-          </a:prstGeom>
-          <a:noFill/>
-        </p:spPr>
-        <p:txBody>
-          <a:bodyPr wrap="square" rtlCol="0">
-            <a:spAutoFit/>
-          </a:bodyPr>
-          <a:lstStyle/>
-          <a:p>
-            <a:pPr algn="just"/>
-            <a:r>
-              <a:rPr lang="pl-PL" sz="1600" dirty="0">
-                <a:solidFill>
-                  <a:schemeClr val="accent4">
-                    <a:lumMod val="50000"/>
-                  </a:schemeClr>
-                </a:solidFill>
-              </a:rPr>
-              <a:t>Implementowany interfejs</a:t>
-            </a:r>
-          </a:p>
-        </p:txBody>
-      </p:sp>
-      <p:sp>
-        <p:nvSpPr>
-          <p:cNvPr id="20" name="Prostokąt: zaokrąglone rogi 19">
-            <a:extLst>
-              <a:ext uri="{FF2B5EF4-FFF2-40B4-BE49-F238E27FC236}">
-                <a16:creationId xmlns:a16="http://schemas.microsoft.com/office/drawing/2014/main" id="{9F9255B4-5C00-16BC-7B16-D07E0659BEFC}"/>
-              </a:ext>
-            </a:extLst>
-          </p:cNvPr>
-          <p:cNvSpPr/>
-          <p:nvPr/>
-        </p:nvSpPr>
-        <p:spPr>
-          <a:xfrm>
-            <a:off x="6508957" y="1933962"/>
-            <a:ext cx="2211575" cy="584775"/>
-          </a:xfrm>
-          <a:prstGeom prst="roundRect">
-            <a:avLst/>
-          </a:prstGeom>
-          <a:noFill/>
-          <a:ln w="63500"/>
-        </p:spPr>
-        <p:style>
-          <a:lnRef idx="1">
-            <a:schemeClr val="accent1"/>
-          </a:lnRef>
-          <a:fillRef idx="3">
-            <a:schemeClr val="accent1"/>
-          </a:fillRef>
-          <a:effectRef idx="2">
-            <a:schemeClr val="accent1"/>
-          </a:effectRef>
-          <a:fontRef idx="minor">
-            <a:schemeClr val="lt1"/>
-          </a:fontRef>
-        </p:style>
-        <p:txBody>
-          <a:bodyPr rtlCol="0" anchor="ctr"/>
-          <a:lstStyle/>
-          <a:p>
-            <a:pPr algn="ctr"/>
-            <a:endParaRPr lang="pl-PL"/>
-          </a:p>
-        </p:txBody>
-      </p:sp>
-      <p:cxnSp>
-        <p:nvCxnSpPr>
-          <p:cNvPr id="21" name="Łącznik prosty ze strzałką 20">
-            <a:extLst>
-              <a:ext uri="{FF2B5EF4-FFF2-40B4-BE49-F238E27FC236}">
-                <a16:creationId xmlns:a16="http://schemas.microsoft.com/office/drawing/2014/main" id="{F77AC89F-2854-CAE7-3B41-AE733DDC47D7}"/>
-              </a:ext>
-            </a:extLst>
-          </p:cNvPr>
-          <p:cNvCxnSpPr>
-            <a:cxnSpLocks/>
-          </p:cNvCxnSpPr>
-          <p:nvPr/>
-        </p:nvCxnSpPr>
-        <p:spPr>
-          <a:xfrm flipH="1">
-            <a:off x="6721258" y="2550830"/>
-            <a:ext cx="893486" cy="429180"/>
-          </a:xfrm>
-          <a:prstGeom prst="straightConnector1">
-            <a:avLst/>
-          </a:prstGeom>
-          <a:ln w="63500" cap="rnd">
-            <a:prstDash val="solid"/>
-            <a:tailEnd type="triangle"/>
-          </a:ln>
-        </p:spPr>
-        <p:style>
-          <a:lnRef idx="2">
-            <a:schemeClr val="accent1"/>
-          </a:lnRef>
-          <a:fillRef idx="0">
-            <a:schemeClr val="accent1"/>
-          </a:fillRef>
-          <a:effectRef idx="1">
-            <a:schemeClr val="accent1"/>
-          </a:effectRef>
-          <a:fontRef idx="minor">
-            <a:schemeClr val="tx1"/>
-          </a:fontRef>
-        </p:style>
-      </p:cxnSp>
-      <p:cxnSp>
-        <p:nvCxnSpPr>
-          <p:cNvPr id="23" name="Łącznik prosty ze strzałką 22">
-            <a:extLst>
-              <a:ext uri="{FF2B5EF4-FFF2-40B4-BE49-F238E27FC236}">
-                <a16:creationId xmlns:a16="http://schemas.microsoft.com/office/drawing/2014/main" id="{BBBC4D8D-0AE0-1D3B-3D37-3DECE520F27F}"/>
-              </a:ext>
-            </a:extLst>
-          </p:cNvPr>
-          <p:cNvCxnSpPr>
-            <a:cxnSpLocks/>
-          </p:cNvCxnSpPr>
-          <p:nvPr/>
-        </p:nvCxnSpPr>
-        <p:spPr>
-          <a:xfrm>
-            <a:off x="8190634" y="2550830"/>
-            <a:ext cx="413814" cy="677219"/>
-          </a:xfrm>
-          <a:prstGeom prst="straightConnector1">
-            <a:avLst/>
-          </a:prstGeom>
-          <a:ln w="63500" cap="rnd">
-            <a:prstDash val="solid"/>
-            <a:tailEnd type="triangle"/>
-          </a:ln>
-        </p:spPr>
-        <p:style>
-          <a:lnRef idx="2">
-            <a:schemeClr val="accent1"/>
-          </a:lnRef>
-          <a:fillRef idx="0">
-            <a:schemeClr val="accent1"/>
-          </a:fillRef>
-          <a:effectRef idx="1">
-            <a:schemeClr val="accent1"/>
-          </a:effectRef>
-          <a:fontRef idx="minor">
-            <a:schemeClr val="tx1"/>
-          </a:fontRef>
-        </p:style>
-      </p:cxnSp>
-      <p:sp>
-        <p:nvSpPr>
-          <p:cNvPr id="28" name="pole tekstowe 27">
-            <a:extLst>
-              <a:ext uri="{FF2B5EF4-FFF2-40B4-BE49-F238E27FC236}">
-                <a16:creationId xmlns:a16="http://schemas.microsoft.com/office/drawing/2014/main" id="{900852B1-92E4-71D7-EC1B-5331D65134AD}"/>
-              </a:ext>
-            </a:extLst>
-          </p:cNvPr>
-          <p:cNvSpPr txBox="1"/>
-          <p:nvPr/>
-        </p:nvSpPr>
-        <p:spPr>
-          <a:xfrm>
-            <a:off x="1287103" y="6280931"/>
-            <a:ext cx="7677385" cy="338554"/>
-          </a:xfrm>
-          <a:prstGeom prst="rect">
-            <a:avLst/>
-          </a:prstGeom>
-          <a:noFill/>
-        </p:spPr>
-        <p:txBody>
-          <a:bodyPr wrap="square" rtlCol="0">
-            <a:spAutoFit/>
-          </a:bodyPr>
-          <a:lstStyle/>
-          <a:p>
-            <a:pPr algn="just"/>
-            <a:r>
-              <a:rPr lang="pl-PL" sz="1600" dirty="0"/>
-              <a:t>Przykładem interfejsu znacznikowego w bibliotece standardowej jest </a:t>
-            </a:r>
-            <a:r>
-              <a:rPr lang="pl-PL" sz="1600" b="1" dirty="0" err="1"/>
-              <a:t>Serializable</a:t>
-            </a:r>
-            <a:r>
-              <a:rPr lang="pl-PL" sz="1600" b="1" dirty="0"/>
-              <a:t>.</a:t>
-            </a:r>
-          </a:p>
-        </p:txBody>
-      </p:sp>
     </p:spTree>
     <p:extLst>
       <p:ext uri="{BB962C8B-B14F-4D97-AF65-F5344CB8AC3E}">
-        <p14:creationId xmlns:p14="http://schemas.microsoft.com/office/powerpoint/2010/main" val="244739722"/>
+        <p14:creationId xmlns:p14="http://schemas.microsoft.com/office/powerpoint/2010/main" val="1060506003"/>
       </p:ext>
     </p:extLst>
   </p:cSld>
@@ -21798,6 +21138,1029 @@
         <p:cNvPr id="1" name="">
           <a:extLst>
             <a:ext uri="{FF2B5EF4-FFF2-40B4-BE49-F238E27FC236}">
+              <a16:creationId xmlns:a16="http://schemas.microsoft.com/office/drawing/2014/main" id="{3E1B6933-698A-50EC-9F86-332A553B82E0}"/>
+            </a:ext>
+          </a:extLst>
+        </p:cNvPr>
+        <p:cNvGrpSpPr/>
+        <p:nvPr/>
+      </p:nvGrpSpPr>
+      <p:grpSpPr>
+        <a:xfrm>
+          <a:off x="0" y="0"/>
+          <a:ext cx="0" cy="0"/>
+          <a:chOff x="0" y="0"/>
+          <a:chExt cx="0" cy="0"/>
+        </a:xfrm>
+      </p:grpSpPr>
+      <p:sp>
+        <p:nvSpPr>
+          <p:cNvPr id="2" name="Rectangle 1">
+            <a:extLst>
+              <a:ext uri="{FF2B5EF4-FFF2-40B4-BE49-F238E27FC236}">
+                <a16:creationId xmlns:a16="http://schemas.microsoft.com/office/drawing/2014/main" id="{027630A8-7192-18EB-FC78-22E54A41F1B8}"/>
+              </a:ext>
+            </a:extLst>
+          </p:cNvPr>
+          <p:cNvSpPr/>
+          <p:nvPr/>
+        </p:nvSpPr>
+        <p:spPr>
+          <a:xfrm>
+            <a:off x="1979712" y="188640"/>
+            <a:ext cx="6696744" cy="492443"/>
+          </a:xfrm>
+          <a:prstGeom prst="rect">
+            <a:avLst/>
+          </a:prstGeom>
+        </p:spPr>
+        <p:txBody>
+          <a:bodyPr wrap="square">
+            <a:spAutoFit/>
+          </a:bodyPr>
+          <a:lstStyle/>
+          <a:p>
+            <a:pPr algn="ctr"/>
+            <a:r>
+              <a:rPr lang="pl-PL" sz="2600" dirty="0">
+                <a:solidFill>
+                  <a:schemeClr val="bg1"/>
+                </a:solidFill>
+                <a:latin typeface="Verdana" panose="020B0604030504040204" pitchFamily="34" charset="0"/>
+                <a:ea typeface="Verdana" panose="020B0604030504040204" pitchFamily="34" charset="0"/>
+                <a:cs typeface="Verdana" panose="020B0604030504040204" pitchFamily="34" charset="0"/>
+              </a:rPr>
+              <a:t>Zastosowania interfejsów</a:t>
+            </a:r>
+          </a:p>
+        </p:txBody>
+      </p:sp>
+      <p:sp>
+        <p:nvSpPr>
+          <p:cNvPr id="3" name="pole tekstowe 2">
+            <a:extLst>
+              <a:ext uri="{FF2B5EF4-FFF2-40B4-BE49-F238E27FC236}">
+                <a16:creationId xmlns:a16="http://schemas.microsoft.com/office/drawing/2014/main" id="{6CE7831C-6E83-99A1-D7CE-2BD5223287C0}"/>
+              </a:ext>
+            </a:extLst>
+          </p:cNvPr>
+          <p:cNvSpPr txBox="1"/>
+          <p:nvPr/>
+        </p:nvSpPr>
+        <p:spPr>
+          <a:xfrm>
+            <a:off x="1043608" y="836712"/>
+            <a:ext cx="8100392" cy="1107996"/>
+          </a:xfrm>
+          <a:prstGeom prst="rect">
+            <a:avLst/>
+          </a:prstGeom>
+          <a:noFill/>
+        </p:spPr>
+        <p:txBody>
+          <a:bodyPr wrap="square" rtlCol="0">
+            <a:spAutoFit/>
+          </a:bodyPr>
+          <a:lstStyle/>
+          <a:p>
+            <a:pPr algn="ctr"/>
+            <a:r>
+              <a:rPr lang="pl-PL" sz="1800" b="1" dirty="0"/>
+              <a:t>Interfejs znacznikowy</a:t>
+            </a:r>
+          </a:p>
+          <a:p>
+            <a:pPr algn="ctr"/>
+            <a:endParaRPr lang="pl-PL" sz="1600" dirty="0"/>
+          </a:p>
+          <a:p>
+            <a:pPr algn="just"/>
+            <a:r>
+              <a:rPr lang="pl-PL" sz="1600" dirty="0"/>
+              <a:t>interfejs, który </a:t>
+            </a:r>
+            <a:r>
+              <a:rPr lang="pl-PL" sz="1600" b="1" dirty="0"/>
+              <a:t>nie zawiera żadnych</a:t>
+            </a:r>
+            <a:r>
+              <a:rPr lang="pl-PL" sz="1600" dirty="0"/>
+              <a:t> metod ani właściwości. Celem jest </a:t>
+            </a:r>
+            <a:r>
+              <a:rPr lang="pl-PL" sz="1600" b="1" dirty="0"/>
+              <a:t>oznaczenie</a:t>
+            </a:r>
+            <a:r>
+              <a:rPr lang="pl-PL" sz="1600" dirty="0"/>
+              <a:t> klas jako </a:t>
+            </a:r>
+            <a:r>
+              <a:rPr lang="pl-PL" sz="1600" b="1" dirty="0"/>
+              <a:t>spełniających określone kryteria</a:t>
+            </a:r>
+            <a:r>
+              <a:rPr lang="pl-PL" sz="1600" dirty="0"/>
+              <a:t>, </a:t>
+            </a:r>
+            <a:r>
+              <a:rPr lang="pl-PL" sz="1600" b="1" dirty="0"/>
+              <a:t>zgrupowanie</a:t>
+            </a:r>
+            <a:r>
+              <a:rPr lang="pl-PL" sz="1600" dirty="0"/>
+              <a:t> pod wspólnym typem.</a:t>
+            </a:r>
+          </a:p>
+        </p:txBody>
+      </p:sp>
+      <p:pic>
+        <p:nvPicPr>
+          <p:cNvPr id="12" name="Obraz 11">
+            <a:extLst>
+              <a:ext uri="{FF2B5EF4-FFF2-40B4-BE49-F238E27FC236}">
+                <a16:creationId xmlns:a16="http://schemas.microsoft.com/office/drawing/2014/main" id="{AA53F0FE-EFE3-EB0F-42C5-8C7D40F5E056}"/>
+              </a:ext>
+            </a:extLst>
+          </p:cNvPr>
+          <p:cNvPicPr>
+            <a:picLocks noChangeAspect="1"/>
+          </p:cNvPicPr>
+          <p:nvPr/>
+        </p:nvPicPr>
+        <p:blipFill>
+          <a:blip r:embed="rId4"/>
+          <a:stretch>
+            <a:fillRect/>
+          </a:stretch>
+        </p:blipFill>
+        <p:spPr>
+          <a:xfrm>
+            <a:off x="3923928" y="2564904"/>
+            <a:ext cx="5104234" cy="965856"/>
+          </a:xfrm>
+          <a:prstGeom prst="rect">
+            <a:avLst/>
+          </a:prstGeom>
+        </p:spPr>
+      </p:pic>
+      <p:cxnSp>
+        <p:nvCxnSpPr>
+          <p:cNvPr id="24" name="Łącznik prosty ze strzałką 23">
+            <a:extLst>
+              <a:ext uri="{FF2B5EF4-FFF2-40B4-BE49-F238E27FC236}">
+                <a16:creationId xmlns:a16="http://schemas.microsoft.com/office/drawing/2014/main" id="{92E3A99E-131C-4C08-2F66-8A31E6651532}"/>
+              </a:ext>
+            </a:extLst>
+          </p:cNvPr>
+          <p:cNvCxnSpPr>
+            <a:cxnSpLocks/>
+            <a:stCxn id="26" idx="2"/>
+          </p:cNvCxnSpPr>
+          <p:nvPr/>
+        </p:nvCxnSpPr>
+        <p:spPr>
+          <a:xfrm>
+            <a:off x="2818140" y="2435795"/>
+            <a:ext cx="1438643" cy="387665"/>
+          </a:xfrm>
+          <a:prstGeom prst="straightConnector1">
+            <a:avLst/>
+          </a:prstGeom>
+          <a:ln w="63500" cap="rnd">
+            <a:prstDash val="solid"/>
+            <a:tailEnd type="triangle"/>
+          </a:ln>
+        </p:spPr>
+        <p:style>
+          <a:lnRef idx="2">
+            <a:schemeClr val="accent1"/>
+          </a:lnRef>
+          <a:fillRef idx="0">
+            <a:schemeClr val="accent1"/>
+          </a:fillRef>
+          <a:effectRef idx="1">
+            <a:schemeClr val="accent1"/>
+          </a:effectRef>
+          <a:fontRef idx="minor">
+            <a:schemeClr val="tx1"/>
+          </a:fontRef>
+        </p:style>
+      </p:cxnSp>
+      <p:sp>
+        <p:nvSpPr>
+          <p:cNvPr id="25" name="pole tekstowe 24">
+            <a:extLst>
+              <a:ext uri="{FF2B5EF4-FFF2-40B4-BE49-F238E27FC236}">
+                <a16:creationId xmlns:a16="http://schemas.microsoft.com/office/drawing/2014/main" id="{0805CAE3-CFD5-9F83-A11E-4B6769C105B0}"/>
+              </a:ext>
+            </a:extLst>
+          </p:cNvPr>
+          <p:cNvSpPr txBox="1"/>
+          <p:nvPr/>
+        </p:nvSpPr>
+        <p:spPr>
+          <a:xfrm>
+            <a:off x="1689740" y="2073817"/>
+            <a:ext cx="3158328" cy="338554"/>
+          </a:xfrm>
+          <a:prstGeom prst="rect">
+            <a:avLst/>
+          </a:prstGeom>
+          <a:noFill/>
+        </p:spPr>
+        <p:txBody>
+          <a:bodyPr wrap="square" rtlCol="0">
+            <a:spAutoFit/>
+          </a:bodyPr>
+          <a:lstStyle/>
+          <a:p>
+            <a:pPr algn="just"/>
+            <a:r>
+              <a:rPr lang="pl-PL" sz="1600" b="1" dirty="0">
+                <a:solidFill>
+                  <a:schemeClr val="accent4">
+                    <a:lumMod val="50000"/>
+                  </a:schemeClr>
+                </a:solidFill>
+              </a:rPr>
+              <a:t>Interfejs znacznikowy</a:t>
+            </a:r>
+          </a:p>
+        </p:txBody>
+      </p:sp>
+      <p:sp>
+        <p:nvSpPr>
+          <p:cNvPr id="26" name="Prostokąt: zaokrąglone rogi 25">
+            <a:extLst>
+              <a:ext uri="{FF2B5EF4-FFF2-40B4-BE49-F238E27FC236}">
+                <a16:creationId xmlns:a16="http://schemas.microsoft.com/office/drawing/2014/main" id="{99D2F780-FD1F-2D20-089B-DB66A664A7F4}"/>
+              </a:ext>
+            </a:extLst>
+          </p:cNvPr>
+          <p:cNvSpPr/>
+          <p:nvPr/>
+        </p:nvSpPr>
+        <p:spPr>
+          <a:xfrm>
+            <a:off x="1712352" y="2087122"/>
+            <a:ext cx="2211575" cy="348673"/>
+          </a:xfrm>
+          <a:prstGeom prst="roundRect">
+            <a:avLst/>
+          </a:prstGeom>
+          <a:noFill/>
+          <a:ln w="63500"/>
+        </p:spPr>
+        <p:style>
+          <a:lnRef idx="1">
+            <a:schemeClr val="accent1"/>
+          </a:lnRef>
+          <a:fillRef idx="3">
+            <a:schemeClr val="accent1"/>
+          </a:fillRef>
+          <a:effectRef idx="2">
+            <a:schemeClr val="accent1"/>
+          </a:effectRef>
+          <a:fontRef idx="minor">
+            <a:schemeClr val="lt1"/>
+          </a:fontRef>
+        </p:style>
+        <p:txBody>
+          <a:bodyPr rtlCol="0" anchor="ctr"/>
+          <a:lstStyle/>
+          <a:p>
+            <a:pPr algn="ctr"/>
+            <a:endParaRPr lang="pl-PL"/>
+          </a:p>
+        </p:txBody>
+      </p:sp>
+      <p:cxnSp>
+        <p:nvCxnSpPr>
+          <p:cNvPr id="29" name="Łącznik prosty ze strzałką 28">
+            <a:extLst>
+              <a:ext uri="{FF2B5EF4-FFF2-40B4-BE49-F238E27FC236}">
+                <a16:creationId xmlns:a16="http://schemas.microsoft.com/office/drawing/2014/main" id="{FDE8D488-6182-514B-4B63-F8FD8F79BCD4}"/>
+              </a:ext>
+            </a:extLst>
+          </p:cNvPr>
+          <p:cNvCxnSpPr>
+            <a:cxnSpLocks/>
+            <a:stCxn id="31" idx="3"/>
+          </p:cNvCxnSpPr>
+          <p:nvPr/>
+        </p:nvCxnSpPr>
+        <p:spPr>
+          <a:xfrm flipV="1">
+            <a:off x="3471207" y="3140968"/>
+            <a:ext cx="785576" cy="97405"/>
+          </a:xfrm>
+          <a:prstGeom prst="straightConnector1">
+            <a:avLst/>
+          </a:prstGeom>
+          <a:ln w="63500" cap="rnd">
+            <a:prstDash val="solid"/>
+            <a:tailEnd type="triangle"/>
+          </a:ln>
+        </p:spPr>
+        <p:style>
+          <a:lnRef idx="2">
+            <a:schemeClr val="accent1"/>
+          </a:lnRef>
+          <a:fillRef idx="0">
+            <a:schemeClr val="accent1"/>
+          </a:fillRef>
+          <a:effectRef idx="1">
+            <a:schemeClr val="accent1"/>
+          </a:effectRef>
+          <a:fontRef idx="minor">
+            <a:schemeClr val="tx1"/>
+          </a:fontRef>
+        </p:style>
+      </p:cxnSp>
+      <p:sp>
+        <p:nvSpPr>
+          <p:cNvPr id="30" name="pole tekstowe 29">
+            <a:extLst>
+              <a:ext uri="{FF2B5EF4-FFF2-40B4-BE49-F238E27FC236}">
+                <a16:creationId xmlns:a16="http://schemas.microsoft.com/office/drawing/2014/main" id="{3635900E-9541-9051-4F18-6375FDD4399D}"/>
+              </a:ext>
+            </a:extLst>
+          </p:cNvPr>
+          <p:cNvSpPr txBox="1"/>
+          <p:nvPr/>
+        </p:nvSpPr>
+        <p:spPr>
+          <a:xfrm>
+            <a:off x="1287103" y="2935662"/>
+            <a:ext cx="2211575" cy="584775"/>
+          </a:xfrm>
+          <a:prstGeom prst="rect">
+            <a:avLst/>
+          </a:prstGeom>
+          <a:noFill/>
+        </p:spPr>
+        <p:txBody>
+          <a:bodyPr wrap="square" rtlCol="0">
+            <a:spAutoFit/>
+          </a:bodyPr>
+          <a:lstStyle/>
+          <a:p>
+            <a:pPr algn="just"/>
+            <a:r>
+              <a:rPr lang="pl-PL" sz="1600" dirty="0">
+                <a:solidFill>
+                  <a:schemeClr val="accent4">
+                    <a:lumMod val="50000"/>
+                  </a:schemeClr>
+                </a:solidFill>
+              </a:rPr>
+              <a:t>Klasa implementująca interfejs</a:t>
+            </a:r>
+          </a:p>
+        </p:txBody>
+      </p:sp>
+      <p:cxnSp>
+        <p:nvCxnSpPr>
+          <p:cNvPr id="33" name="Łącznik prosty ze strzałką 32">
+            <a:extLst>
+              <a:ext uri="{FF2B5EF4-FFF2-40B4-BE49-F238E27FC236}">
+                <a16:creationId xmlns:a16="http://schemas.microsoft.com/office/drawing/2014/main" id="{03683451-5AA4-E9E2-A381-8AEADB878A97}"/>
+              </a:ext>
+            </a:extLst>
+          </p:cNvPr>
+          <p:cNvCxnSpPr>
+            <a:cxnSpLocks/>
+            <a:stCxn id="31" idx="3"/>
+          </p:cNvCxnSpPr>
+          <p:nvPr/>
+        </p:nvCxnSpPr>
+        <p:spPr>
+          <a:xfrm>
+            <a:off x="3471207" y="3238373"/>
+            <a:ext cx="785576" cy="142338"/>
+          </a:xfrm>
+          <a:prstGeom prst="straightConnector1">
+            <a:avLst/>
+          </a:prstGeom>
+          <a:ln w="63500" cap="rnd">
+            <a:prstDash val="solid"/>
+            <a:tailEnd type="triangle"/>
+          </a:ln>
+        </p:spPr>
+        <p:style>
+          <a:lnRef idx="2">
+            <a:schemeClr val="accent1"/>
+          </a:lnRef>
+          <a:fillRef idx="0">
+            <a:schemeClr val="accent1"/>
+          </a:fillRef>
+          <a:effectRef idx="1">
+            <a:schemeClr val="accent1"/>
+          </a:effectRef>
+          <a:fontRef idx="minor">
+            <a:schemeClr val="tx1"/>
+          </a:fontRef>
+        </p:style>
+      </p:cxnSp>
+      <p:sp>
+        <p:nvSpPr>
+          <p:cNvPr id="31" name="Prostokąt: zaokrąglone rogi 30">
+            <a:extLst>
+              <a:ext uri="{FF2B5EF4-FFF2-40B4-BE49-F238E27FC236}">
+                <a16:creationId xmlns:a16="http://schemas.microsoft.com/office/drawing/2014/main" id="{00793C92-B231-3F82-625B-335940E9AB96}"/>
+              </a:ext>
+            </a:extLst>
+          </p:cNvPr>
+          <p:cNvSpPr/>
+          <p:nvPr/>
+        </p:nvSpPr>
+        <p:spPr>
+          <a:xfrm>
+            <a:off x="1259632" y="2945985"/>
+            <a:ext cx="2211575" cy="584775"/>
+          </a:xfrm>
+          <a:prstGeom prst="roundRect">
+            <a:avLst/>
+          </a:prstGeom>
+          <a:noFill/>
+          <a:ln w="63500"/>
+        </p:spPr>
+        <p:style>
+          <a:lnRef idx="1">
+            <a:schemeClr val="accent1"/>
+          </a:lnRef>
+          <a:fillRef idx="3">
+            <a:schemeClr val="accent1"/>
+          </a:fillRef>
+          <a:effectRef idx="2">
+            <a:schemeClr val="accent1"/>
+          </a:effectRef>
+          <a:fontRef idx="minor">
+            <a:schemeClr val="lt1"/>
+          </a:fontRef>
+        </p:style>
+        <p:txBody>
+          <a:bodyPr rtlCol="0" anchor="ctr"/>
+          <a:lstStyle/>
+          <a:p>
+            <a:pPr algn="ctr"/>
+            <a:endParaRPr lang="pl-PL"/>
+          </a:p>
+        </p:txBody>
+      </p:sp>
+      <p:pic>
+        <p:nvPicPr>
+          <p:cNvPr id="5" name="Obraz 4">
+            <a:extLst>
+              <a:ext uri="{FF2B5EF4-FFF2-40B4-BE49-F238E27FC236}">
+                <a16:creationId xmlns:a16="http://schemas.microsoft.com/office/drawing/2014/main" id="{76AD5FE6-54CF-C1CC-E173-F55206BA0051}"/>
+              </a:ext>
+            </a:extLst>
+          </p:cNvPr>
+          <p:cNvPicPr>
+            <a:picLocks noChangeAspect="1"/>
+          </p:cNvPicPr>
+          <p:nvPr/>
+        </p:nvPicPr>
+        <p:blipFill>
+          <a:blip r:embed="rId5"/>
+          <a:stretch>
+            <a:fillRect/>
+          </a:stretch>
+        </p:blipFill>
+        <p:spPr>
+          <a:xfrm>
+            <a:off x="2278385" y="4643583"/>
+            <a:ext cx="5630838" cy="1379110"/>
+          </a:xfrm>
+          <a:prstGeom prst="rect">
+            <a:avLst/>
+          </a:prstGeom>
+        </p:spPr>
+      </p:pic>
+      <p:sp>
+        <p:nvSpPr>
+          <p:cNvPr id="6" name="pole tekstowe 5">
+            <a:extLst>
+              <a:ext uri="{FF2B5EF4-FFF2-40B4-BE49-F238E27FC236}">
+                <a16:creationId xmlns:a16="http://schemas.microsoft.com/office/drawing/2014/main" id="{4A51C663-0B25-A470-B16B-523E3C0C9416}"/>
+              </a:ext>
+            </a:extLst>
+          </p:cNvPr>
+          <p:cNvSpPr txBox="1"/>
+          <p:nvPr/>
+        </p:nvSpPr>
+        <p:spPr>
+          <a:xfrm>
+            <a:off x="4355976" y="4046791"/>
+            <a:ext cx="3068873" cy="338554"/>
+          </a:xfrm>
+          <a:prstGeom prst="rect">
+            <a:avLst/>
+          </a:prstGeom>
+          <a:noFill/>
+        </p:spPr>
+        <p:txBody>
+          <a:bodyPr wrap="square" rtlCol="0">
+            <a:spAutoFit/>
+          </a:bodyPr>
+          <a:lstStyle/>
+          <a:p>
+            <a:pPr algn="just"/>
+            <a:r>
+              <a:rPr lang="pl-PL" sz="1600" dirty="0">
+                <a:solidFill>
+                  <a:schemeClr val="accent4">
+                    <a:lumMod val="50000"/>
+                  </a:schemeClr>
+                </a:solidFill>
+              </a:rPr>
+              <a:t>Obiekt o </a:t>
+            </a:r>
+            <a:r>
+              <a:rPr lang="pl-PL" sz="1600" b="1" dirty="0">
+                <a:solidFill>
+                  <a:schemeClr val="accent4">
+                    <a:lumMod val="50000"/>
+                  </a:schemeClr>
+                </a:solidFill>
+              </a:rPr>
+              <a:t>typie interfejsu</a:t>
+            </a:r>
+          </a:p>
+        </p:txBody>
+      </p:sp>
+      <p:sp>
+        <p:nvSpPr>
+          <p:cNvPr id="7" name="Prostokąt: zaokrąglone rogi 6">
+            <a:extLst>
+              <a:ext uri="{FF2B5EF4-FFF2-40B4-BE49-F238E27FC236}">
+                <a16:creationId xmlns:a16="http://schemas.microsoft.com/office/drawing/2014/main" id="{73D52ECB-7F43-982F-96F7-0CF003576AAE}"/>
+              </a:ext>
+            </a:extLst>
+          </p:cNvPr>
+          <p:cNvSpPr/>
+          <p:nvPr/>
+        </p:nvSpPr>
+        <p:spPr>
+          <a:xfrm>
+            <a:off x="4355976" y="4046791"/>
+            <a:ext cx="2304256" cy="357012"/>
+          </a:xfrm>
+          <a:prstGeom prst="roundRect">
+            <a:avLst/>
+          </a:prstGeom>
+          <a:noFill/>
+          <a:ln w="63500"/>
+        </p:spPr>
+        <p:style>
+          <a:lnRef idx="1">
+            <a:schemeClr val="accent1"/>
+          </a:lnRef>
+          <a:fillRef idx="3">
+            <a:schemeClr val="accent1"/>
+          </a:fillRef>
+          <a:effectRef idx="2">
+            <a:schemeClr val="accent1"/>
+          </a:effectRef>
+          <a:fontRef idx="minor">
+            <a:schemeClr val="lt1"/>
+          </a:fontRef>
+        </p:style>
+        <p:txBody>
+          <a:bodyPr rtlCol="0" anchor="ctr"/>
+          <a:lstStyle/>
+          <a:p>
+            <a:pPr algn="ctr"/>
+            <a:endParaRPr lang="pl-PL"/>
+          </a:p>
+        </p:txBody>
+      </p:sp>
+      <p:cxnSp>
+        <p:nvCxnSpPr>
+          <p:cNvPr id="8" name="Łącznik prosty ze strzałką 7">
+            <a:extLst>
+              <a:ext uri="{FF2B5EF4-FFF2-40B4-BE49-F238E27FC236}">
+                <a16:creationId xmlns:a16="http://schemas.microsoft.com/office/drawing/2014/main" id="{13306351-C95A-9B57-EB0D-64DA4F67E07A}"/>
+              </a:ext>
+            </a:extLst>
+          </p:cNvPr>
+          <p:cNvCxnSpPr>
+            <a:cxnSpLocks/>
+            <a:stCxn id="7" idx="2"/>
+          </p:cNvCxnSpPr>
+          <p:nvPr/>
+        </p:nvCxnSpPr>
+        <p:spPr>
+          <a:xfrm flipH="1">
+            <a:off x="3923927" y="4403803"/>
+            <a:ext cx="1584177" cy="250103"/>
+          </a:xfrm>
+          <a:prstGeom prst="straightConnector1">
+            <a:avLst/>
+          </a:prstGeom>
+          <a:ln w="63500" cap="rnd">
+            <a:prstDash val="solid"/>
+            <a:tailEnd type="triangle"/>
+          </a:ln>
+        </p:spPr>
+        <p:style>
+          <a:lnRef idx="2">
+            <a:schemeClr val="accent1"/>
+          </a:lnRef>
+          <a:fillRef idx="0">
+            <a:schemeClr val="accent1"/>
+          </a:fillRef>
+          <a:effectRef idx="1">
+            <a:schemeClr val="accent1"/>
+          </a:effectRef>
+          <a:fontRef idx="minor">
+            <a:schemeClr val="tx1"/>
+          </a:fontRef>
+        </p:style>
+      </p:cxnSp>
+      <p:cxnSp>
+        <p:nvCxnSpPr>
+          <p:cNvPr id="10" name="Łącznik prosty ze strzałką 9">
+            <a:extLst>
+              <a:ext uri="{FF2B5EF4-FFF2-40B4-BE49-F238E27FC236}">
+                <a16:creationId xmlns:a16="http://schemas.microsoft.com/office/drawing/2014/main" id="{AD5CD3B9-0E34-6081-7CE8-DF0711D5BB41}"/>
+              </a:ext>
+            </a:extLst>
+          </p:cNvPr>
+          <p:cNvCxnSpPr>
+            <a:cxnSpLocks/>
+            <a:stCxn id="7" idx="0"/>
+          </p:cNvCxnSpPr>
+          <p:nvPr/>
+        </p:nvCxnSpPr>
+        <p:spPr>
+          <a:xfrm flipV="1">
+            <a:off x="5508104" y="3472238"/>
+            <a:ext cx="850175" cy="574553"/>
+          </a:xfrm>
+          <a:prstGeom prst="straightConnector1">
+            <a:avLst/>
+          </a:prstGeom>
+          <a:ln w="63500" cap="rnd">
+            <a:prstDash val="solid"/>
+            <a:tailEnd type="triangle"/>
+          </a:ln>
+        </p:spPr>
+        <p:style>
+          <a:lnRef idx="2">
+            <a:schemeClr val="accent1"/>
+          </a:lnRef>
+          <a:fillRef idx="0">
+            <a:schemeClr val="accent1"/>
+          </a:fillRef>
+          <a:effectRef idx="1">
+            <a:schemeClr val="accent1"/>
+          </a:effectRef>
+          <a:fontRef idx="minor">
+            <a:schemeClr val="tx1"/>
+          </a:fontRef>
+        </p:style>
+      </p:cxnSp>
+      <p:cxnSp>
+        <p:nvCxnSpPr>
+          <p:cNvPr id="13" name="Łącznik prosty ze strzałką 12">
+            <a:extLst>
+              <a:ext uri="{FF2B5EF4-FFF2-40B4-BE49-F238E27FC236}">
+                <a16:creationId xmlns:a16="http://schemas.microsoft.com/office/drawing/2014/main" id="{8578AF3E-0984-A8C0-739D-D1FEBF9140EE}"/>
+              </a:ext>
+            </a:extLst>
+          </p:cNvPr>
+          <p:cNvCxnSpPr>
+            <a:cxnSpLocks/>
+            <a:stCxn id="7" idx="0"/>
+          </p:cNvCxnSpPr>
+          <p:nvPr/>
+        </p:nvCxnSpPr>
+        <p:spPr>
+          <a:xfrm flipV="1">
+            <a:off x="5508104" y="3472238"/>
+            <a:ext cx="2426309" cy="574553"/>
+          </a:xfrm>
+          <a:prstGeom prst="straightConnector1">
+            <a:avLst/>
+          </a:prstGeom>
+          <a:ln w="63500" cap="rnd">
+            <a:prstDash val="solid"/>
+            <a:tailEnd type="triangle"/>
+          </a:ln>
+        </p:spPr>
+        <p:style>
+          <a:lnRef idx="2">
+            <a:schemeClr val="accent1"/>
+          </a:lnRef>
+          <a:fillRef idx="0">
+            <a:schemeClr val="accent1"/>
+          </a:fillRef>
+          <a:effectRef idx="1">
+            <a:schemeClr val="accent1"/>
+          </a:effectRef>
+          <a:fontRef idx="minor">
+            <a:schemeClr val="tx1"/>
+          </a:fontRef>
+        </p:style>
+      </p:cxnSp>
+      <p:sp>
+        <p:nvSpPr>
+          <p:cNvPr id="18" name="Prostokąt: zaokrąglone rogi 17">
+            <a:extLst>
+              <a:ext uri="{FF2B5EF4-FFF2-40B4-BE49-F238E27FC236}">
+                <a16:creationId xmlns:a16="http://schemas.microsoft.com/office/drawing/2014/main" id="{EF0BD6E0-6744-3120-A9E7-C279792C6601}"/>
+              </a:ext>
+            </a:extLst>
+          </p:cNvPr>
+          <p:cNvSpPr/>
+          <p:nvPr/>
+        </p:nvSpPr>
+        <p:spPr>
+          <a:xfrm>
+            <a:off x="1237856" y="2956308"/>
+            <a:ext cx="2211575" cy="584775"/>
+          </a:xfrm>
+          <a:prstGeom prst="roundRect">
+            <a:avLst/>
+          </a:prstGeom>
+          <a:noFill/>
+          <a:ln w="63500"/>
+        </p:spPr>
+        <p:style>
+          <a:lnRef idx="1">
+            <a:schemeClr val="accent1"/>
+          </a:lnRef>
+          <a:fillRef idx="3">
+            <a:schemeClr val="accent1"/>
+          </a:fillRef>
+          <a:effectRef idx="2">
+            <a:schemeClr val="accent1"/>
+          </a:effectRef>
+          <a:fontRef idx="minor">
+            <a:schemeClr val="lt1"/>
+          </a:fontRef>
+        </p:style>
+        <p:txBody>
+          <a:bodyPr rtlCol="0" anchor="ctr"/>
+          <a:lstStyle/>
+          <a:p>
+            <a:pPr algn="ctr"/>
+            <a:endParaRPr lang="pl-PL"/>
+          </a:p>
+        </p:txBody>
+      </p:sp>
+      <p:sp>
+        <p:nvSpPr>
+          <p:cNvPr id="19" name="pole tekstowe 18">
+            <a:extLst>
+              <a:ext uri="{FF2B5EF4-FFF2-40B4-BE49-F238E27FC236}">
+                <a16:creationId xmlns:a16="http://schemas.microsoft.com/office/drawing/2014/main" id="{98E747A8-B5AB-3C3A-5897-8841AE6CB6B5}"/>
+              </a:ext>
+            </a:extLst>
+          </p:cNvPr>
+          <p:cNvSpPr txBox="1"/>
+          <p:nvPr/>
+        </p:nvSpPr>
+        <p:spPr>
+          <a:xfrm>
+            <a:off x="6638104" y="1933333"/>
+            <a:ext cx="2211575" cy="584775"/>
+          </a:xfrm>
+          <a:prstGeom prst="rect">
+            <a:avLst/>
+          </a:prstGeom>
+          <a:noFill/>
+        </p:spPr>
+        <p:txBody>
+          <a:bodyPr wrap="square" rtlCol="0">
+            <a:spAutoFit/>
+          </a:bodyPr>
+          <a:lstStyle/>
+          <a:p>
+            <a:pPr algn="just"/>
+            <a:r>
+              <a:rPr lang="pl-PL" sz="1600" dirty="0">
+                <a:solidFill>
+                  <a:schemeClr val="accent4">
+                    <a:lumMod val="50000"/>
+                  </a:schemeClr>
+                </a:solidFill>
+              </a:rPr>
+              <a:t>Implementowany interfejs</a:t>
+            </a:r>
+          </a:p>
+        </p:txBody>
+      </p:sp>
+      <p:sp>
+        <p:nvSpPr>
+          <p:cNvPr id="20" name="Prostokąt: zaokrąglone rogi 19">
+            <a:extLst>
+              <a:ext uri="{FF2B5EF4-FFF2-40B4-BE49-F238E27FC236}">
+                <a16:creationId xmlns:a16="http://schemas.microsoft.com/office/drawing/2014/main" id="{9F9255B4-5C00-16BC-7B16-D07E0659BEFC}"/>
+              </a:ext>
+            </a:extLst>
+          </p:cNvPr>
+          <p:cNvSpPr/>
+          <p:nvPr/>
+        </p:nvSpPr>
+        <p:spPr>
+          <a:xfrm>
+            <a:off x="6508957" y="1933962"/>
+            <a:ext cx="2211575" cy="584775"/>
+          </a:xfrm>
+          <a:prstGeom prst="roundRect">
+            <a:avLst/>
+          </a:prstGeom>
+          <a:noFill/>
+          <a:ln w="63500"/>
+        </p:spPr>
+        <p:style>
+          <a:lnRef idx="1">
+            <a:schemeClr val="accent1"/>
+          </a:lnRef>
+          <a:fillRef idx="3">
+            <a:schemeClr val="accent1"/>
+          </a:fillRef>
+          <a:effectRef idx="2">
+            <a:schemeClr val="accent1"/>
+          </a:effectRef>
+          <a:fontRef idx="minor">
+            <a:schemeClr val="lt1"/>
+          </a:fontRef>
+        </p:style>
+        <p:txBody>
+          <a:bodyPr rtlCol="0" anchor="ctr"/>
+          <a:lstStyle/>
+          <a:p>
+            <a:pPr algn="ctr"/>
+            <a:endParaRPr lang="pl-PL"/>
+          </a:p>
+        </p:txBody>
+      </p:sp>
+      <p:cxnSp>
+        <p:nvCxnSpPr>
+          <p:cNvPr id="21" name="Łącznik prosty ze strzałką 20">
+            <a:extLst>
+              <a:ext uri="{FF2B5EF4-FFF2-40B4-BE49-F238E27FC236}">
+                <a16:creationId xmlns:a16="http://schemas.microsoft.com/office/drawing/2014/main" id="{F77AC89F-2854-CAE7-3B41-AE733DDC47D7}"/>
+              </a:ext>
+            </a:extLst>
+          </p:cNvPr>
+          <p:cNvCxnSpPr>
+            <a:cxnSpLocks/>
+          </p:cNvCxnSpPr>
+          <p:nvPr/>
+        </p:nvCxnSpPr>
+        <p:spPr>
+          <a:xfrm flipH="1">
+            <a:off x="6721258" y="2550830"/>
+            <a:ext cx="893486" cy="429180"/>
+          </a:xfrm>
+          <a:prstGeom prst="straightConnector1">
+            <a:avLst/>
+          </a:prstGeom>
+          <a:ln w="63500" cap="rnd">
+            <a:prstDash val="solid"/>
+            <a:tailEnd type="triangle"/>
+          </a:ln>
+        </p:spPr>
+        <p:style>
+          <a:lnRef idx="2">
+            <a:schemeClr val="accent1"/>
+          </a:lnRef>
+          <a:fillRef idx="0">
+            <a:schemeClr val="accent1"/>
+          </a:fillRef>
+          <a:effectRef idx="1">
+            <a:schemeClr val="accent1"/>
+          </a:effectRef>
+          <a:fontRef idx="minor">
+            <a:schemeClr val="tx1"/>
+          </a:fontRef>
+        </p:style>
+      </p:cxnSp>
+      <p:cxnSp>
+        <p:nvCxnSpPr>
+          <p:cNvPr id="23" name="Łącznik prosty ze strzałką 22">
+            <a:extLst>
+              <a:ext uri="{FF2B5EF4-FFF2-40B4-BE49-F238E27FC236}">
+                <a16:creationId xmlns:a16="http://schemas.microsoft.com/office/drawing/2014/main" id="{BBBC4D8D-0AE0-1D3B-3D37-3DECE520F27F}"/>
+              </a:ext>
+            </a:extLst>
+          </p:cNvPr>
+          <p:cNvCxnSpPr>
+            <a:cxnSpLocks/>
+          </p:cNvCxnSpPr>
+          <p:nvPr/>
+        </p:nvCxnSpPr>
+        <p:spPr>
+          <a:xfrm>
+            <a:off x="8190634" y="2550830"/>
+            <a:ext cx="413814" cy="677219"/>
+          </a:xfrm>
+          <a:prstGeom prst="straightConnector1">
+            <a:avLst/>
+          </a:prstGeom>
+          <a:ln w="63500" cap="rnd">
+            <a:prstDash val="solid"/>
+            <a:tailEnd type="triangle"/>
+          </a:ln>
+        </p:spPr>
+        <p:style>
+          <a:lnRef idx="2">
+            <a:schemeClr val="accent1"/>
+          </a:lnRef>
+          <a:fillRef idx="0">
+            <a:schemeClr val="accent1"/>
+          </a:fillRef>
+          <a:effectRef idx="1">
+            <a:schemeClr val="accent1"/>
+          </a:effectRef>
+          <a:fontRef idx="minor">
+            <a:schemeClr val="tx1"/>
+          </a:fontRef>
+        </p:style>
+      </p:cxnSp>
+      <p:sp>
+        <p:nvSpPr>
+          <p:cNvPr id="28" name="pole tekstowe 27">
+            <a:extLst>
+              <a:ext uri="{FF2B5EF4-FFF2-40B4-BE49-F238E27FC236}">
+                <a16:creationId xmlns:a16="http://schemas.microsoft.com/office/drawing/2014/main" id="{900852B1-92E4-71D7-EC1B-5331D65134AD}"/>
+              </a:ext>
+            </a:extLst>
+          </p:cNvPr>
+          <p:cNvSpPr txBox="1"/>
+          <p:nvPr/>
+        </p:nvSpPr>
+        <p:spPr>
+          <a:xfrm>
+            <a:off x="1287103" y="6280931"/>
+            <a:ext cx="7677385" cy="338554"/>
+          </a:xfrm>
+          <a:prstGeom prst="rect">
+            <a:avLst/>
+          </a:prstGeom>
+          <a:noFill/>
+        </p:spPr>
+        <p:txBody>
+          <a:bodyPr wrap="square" rtlCol="0">
+            <a:spAutoFit/>
+          </a:bodyPr>
+          <a:lstStyle/>
+          <a:p>
+            <a:pPr algn="just"/>
+            <a:r>
+              <a:rPr lang="pl-PL" sz="1600" dirty="0"/>
+              <a:t>Przykładem interfejsu znacznikowego w bibliotece standardowej jest </a:t>
+            </a:r>
+            <a:r>
+              <a:rPr lang="pl-PL" sz="1600" b="1" dirty="0" err="1"/>
+              <a:t>Serializable</a:t>
+            </a:r>
+            <a:r>
+              <a:rPr lang="pl-PL" sz="1600" b="1" dirty="0"/>
+              <a:t>.</a:t>
+            </a:r>
+          </a:p>
+        </p:txBody>
+      </p:sp>
+    </p:spTree>
+    <p:extLst>
+      <p:ext uri="{BB962C8B-B14F-4D97-AF65-F5344CB8AC3E}">
+        <p14:creationId xmlns:p14="http://schemas.microsoft.com/office/powerpoint/2010/main" val="244739722"/>
+      </p:ext>
+    </p:extLst>
+  </p:cSld>
+  <p:clrMapOvr>
+    <a:masterClrMapping/>
+  </p:clrMapOvr>
+</p:sld>
+</file>
+
+<file path=ppt/slides/slide31.xml><?xml version="1.0" encoding="utf-8"?>
+<p:sld xmlns:a="http://schemas.openxmlformats.org/drawingml/2006/main" xmlns:r="http://schemas.openxmlformats.org/officeDocument/2006/relationships" xmlns:p="http://schemas.openxmlformats.org/presentationml/2006/main">
+  <p:cSld>
+    <p:bg>
+      <p:bgPr>
+        <a:blipFill dpi="0" rotWithShape="0">
+          <a:blip r:embed="rId3" cstate="print"/>
+          <a:srcRect/>
+          <a:stretch>
+            <a:fillRect/>
+          </a:stretch>
+        </a:blipFill>
+        <a:effectLst/>
+      </p:bgPr>
+    </p:bg>
+    <p:spTree>
+      <p:nvGrpSpPr>
+        <p:cNvPr id="1" name="">
+          <a:extLst>
+            <a:ext uri="{FF2B5EF4-FFF2-40B4-BE49-F238E27FC236}">
               <a16:creationId xmlns:a16="http://schemas.microsoft.com/office/drawing/2014/main" id="{A52CC04E-B7D7-93B8-FA7E-B2B7A055EBD6}"/>
             </a:ext>
           </a:extLst>
@@ -21977,7 +22340,7 @@
 </p:sld>
 </file>
 
-<file path=ppt/slides/slide31.xml><?xml version="1.0" encoding="utf-8"?>
+<file path=ppt/slides/slide32.xml><?xml version="1.0" encoding="utf-8"?>
 <p:sld xmlns:a="http://schemas.openxmlformats.org/drawingml/2006/main" xmlns:r="http://schemas.openxmlformats.org/officeDocument/2006/relationships" xmlns:p="http://schemas.openxmlformats.org/presentationml/2006/main">
   <p:cSld>
     <p:bg>
@@ -22620,7 +22983,7 @@
 </p:sld>
 </file>
 
-<file path=ppt/slides/slide32.xml><?xml version="1.0" encoding="utf-8"?>
+<file path=ppt/slides/slide33.xml><?xml version="1.0" encoding="utf-8"?>
 <p:sld xmlns:a="http://schemas.openxmlformats.org/drawingml/2006/main" xmlns:r="http://schemas.openxmlformats.org/officeDocument/2006/relationships" xmlns:p="http://schemas.openxmlformats.org/presentationml/2006/main">
   <p:cSld>
     <p:bg>
@@ -23380,7 +23743,7 @@
 </p:sld>
 </file>
 
-<file path=ppt/slides/slide33.xml><?xml version="1.0" encoding="utf-8"?>
+<file path=ppt/slides/slide34.xml><?xml version="1.0" encoding="utf-8"?>
 <p:sld xmlns:a="http://schemas.openxmlformats.org/drawingml/2006/main" xmlns:r="http://schemas.openxmlformats.org/officeDocument/2006/relationships" xmlns:p="http://schemas.openxmlformats.org/presentationml/2006/main">
   <p:cSld>
     <p:bg>
@@ -24225,7 +24588,7 @@
 </p:sld>
 </file>
 
-<file path=ppt/slides/slide34.xml><?xml version="1.0" encoding="utf-8"?>
+<file path=ppt/slides/slide35.xml><?xml version="1.0" encoding="utf-8"?>
 <p:sld xmlns:a="http://schemas.openxmlformats.org/drawingml/2006/main" xmlns:r="http://schemas.openxmlformats.org/officeDocument/2006/relationships" xmlns:p="http://schemas.openxmlformats.org/presentationml/2006/main">
   <p:cSld>
     <p:bg>
@@ -25177,7 +25540,7 @@
 </p:sld>
 </file>
 
-<file path=ppt/slides/slide35.xml><?xml version="1.0" encoding="utf-8"?>
+<file path=ppt/slides/slide36.xml><?xml version="1.0" encoding="utf-8"?>
 <p:sld xmlns:a="http://schemas.openxmlformats.org/drawingml/2006/main" xmlns:r="http://schemas.openxmlformats.org/officeDocument/2006/relationships" xmlns:p="http://schemas.openxmlformats.org/presentationml/2006/main">
   <p:cSld>
     <p:bg>
@@ -25531,7 +25894,7 @@
 </p:sld>
 </file>
 
-<file path=ppt/slides/slide36.xml><?xml version="1.0" encoding="utf-8"?>
+<file path=ppt/slides/slide37.xml><?xml version="1.0" encoding="utf-8"?>
 <p:sld xmlns:a="http://schemas.openxmlformats.org/drawingml/2006/main" xmlns:r="http://schemas.openxmlformats.org/officeDocument/2006/relationships" xmlns:p="http://schemas.openxmlformats.org/presentationml/2006/main">
   <p:cSld>
     <p:bg>
@@ -25797,7 +26160,7 @@
 </p:sld>
 </file>
 
-<file path=ppt/slides/slide37.xml><?xml version="1.0" encoding="utf-8"?>
+<file path=ppt/slides/slide38.xml><?xml version="1.0" encoding="utf-8"?>
 <p:sld xmlns:a="http://schemas.openxmlformats.org/drawingml/2006/main" xmlns:r="http://schemas.openxmlformats.org/officeDocument/2006/relationships" xmlns:p="http://schemas.openxmlformats.org/presentationml/2006/main">
   <p:cSld>
     <p:bg>
@@ -25947,7 +26310,7 @@
 </p:sld>
 </file>
 
-<file path=ppt/slides/slide38.xml><?xml version="1.0" encoding="utf-8"?>
+<file path=ppt/slides/slide39.xml><?xml version="1.0" encoding="utf-8"?>
 <p:sld xmlns:a="http://schemas.openxmlformats.org/drawingml/2006/main" xmlns:r="http://schemas.openxmlformats.org/officeDocument/2006/relationships" xmlns:p="http://schemas.openxmlformats.org/presentationml/2006/main">
   <p:cSld>
     <p:bg>
@@ -26323,7 +26686,272 @@
 </p:sld>
 </file>
 
-<file path=ppt/slides/slide39.xml><?xml version="1.0" encoding="utf-8"?>
+<file path=ppt/slides/slide4.xml><?xml version="1.0" encoding="utf-8"?>
+<p:sld xmlns:a="http://schemas.openxmlformats.org/drawingml/2006/main" xmlns:r="http://schemas.openxmlformats.org/officeDocument/2006/relationships" xmlns:p="http://schemas.openxmlformats.org/presentationml/2006/main">
+  <p:cSld>
+    <p:bg>
+      <p:bgPr>
+        <a:blipFill dpi="0" rotWithShape="0">
+          <a:blip r:embed="rId3" cstate="print"/>
+          <a:srcRect/>
+          <a:stretch>
+            <a:fillRect/>
+          </a:stretch>
+        </a:blipFill>
+        <a:effectLst/>
+      </p:bgPr>
+    </p:bg>
+    <p:spTree>
+      <p:nvGrpSpPr>
+        <p:cNvPr id="1" name="">
+          <a:extLst>
+            <a:ext uri="{FF2B5EF4-FFF2-40B4-BE49-F238E27FC236}">
+              <a16:creationId xmlns:a16="http://schemas.microsoft.com/office/drawing/2014/main" id="{1915ED04-D91F-FA66-614A-0551933AA5D9}"/>
+            </a:ext>
+          </a:extLst>
+        </p:cNvPr>
+        <p:cNvGrpSpPr/>
+        <p:nvPr/>
+      </p:nvGrpSpPr>
+      <p:grpSpPr>
+        <a:xfrm>
+          <a:off x="0" y="0"/>
+          <a:ext cx="0" cy="0"/>
+          <a:chOff x="0" y="0"/>
+          <a:chExt cx="0" cy="0"/>
+        </a:xfrm>
+      </p:grpSpPr>
+      <p:sp>
+        <p:nvSpPr>
+          <p:cNvPr id="2" name="Rectangle 1">
+            <a:extLst>
+              <a:ext uri="{FF2B5EF4-FFF2-40B4-BE49-F238E27FC236}">
+                <a16:creationId xmlns:a16="http://schemas.microsoft.com/office/drawing/2014/main" id="{0DD61E60-FE3D-336A-AC41-02502501F961}"/>
+              </a:ext>
+            </a:extLst>
+          </p:cNvPr>
+          <p:cNvSpPr/>
+          <p:nvPr/>
+        </p:nvSpPr>
+        <p:spPr>
+          <a:xfrm>
+            <a:off x="1979712" y="188640"/>
+            <a:ext cx="6696744" cy="492443"/>
+          </a:xfrm>
+          <a:prstGeom prst="rect">
+            <a:avLst/>
+          </a:prstGeom>
+        </p:spPr>
+        <p:txBody>
+          <a:bodyPr wrap="square">
+            <a:spAutoFit/>
+          </a:bodyPr>
+          <a:lstStyle/>
+          <a:p>
+            <a:pPr algn="ctr"/>
+            <a:r>
+              <a:rPr lang="pl-PL" sz="2600" dirty="0">
+                <a:solidFill>
+                  <a:schemeClr val="bg1"/>
+                </a:solidFill>
+                <a:latin typeface="Verdana" panose="020B0604030504040204" pitchFamily="34" charset="0"/>
+                <a:ea typeface="Verdana" panose="020B0604030504040204" pitchFamily="34" charset="0"/>
+                <a:cs typeface="Verdana" panose="020B0604030504040204" pitchFamily="34" charset="0"/>
+              </a:rPr>
+              <a:t>Obiekty</a:t>
+            </a:r>
+          </a:p>
+        </p:txBody>
+      </p:sp>
+      <p:sp>
+        <p:nvSpPr>
+          <p:cNvPr id="3" name="pole tekstowe 2">
+            <a:extLst>
+              <a:ext uri="{FF2B5EF4-FFF2-40B4-BE49-F238E27FC236}">
+                <a16:creationId xmlns:a16="http://schemas.microsoft.com/office/drawing/2014/main" id="{06B0E948-65CB-DF10-2404-FE5C735980E2}"/>
+              </a:ext>
+            </a:extLst>
+          </p:cNvPr>
+          <p:cNvSpPr txBox="1"/>
+          <p:nvPr/>
+        </p:nvSpPr>
+        <p:spPr>
+          <a:xfrm>
+            <a:off x="1043608" y="836712"/>
+            <a:ext cx="7848872" cy="584775"/>
+          </a:xfrm>
+          <a:prstGeom prst="rect">
+            <a:avLst/>
+          </a:prstGeom>
+          <a:noFill/>
+        </p:spPr>
+        <p:txBody>
+          <a:bodyPr wrap="square" rtlCol="0">
+            <a:spAutoFit/>
+          </a:bodyPr>
+          <a:lstStyle/>
+          <a:p>
+            <a:pPr algn="just"/>
+            <a:r>
+              <a:rPr lang="pl-PL" sz="1600" b="1" dirty="0"/>
+              <a:t>Obiekty anonimowe </a:t>
+            </a:r>
+            <a:r>
+              <a:rPr lang="pl-PL" sz="1600" dirty="0"/>
+              <a:t>można wykorzystać do </a:t>
+            </a:r>
+            <a:r>
+              <a:rPr lang="pl-PL" sz="1600" b="1" dirty="0"/>
+              <a:t>jednorazowej</a:t>
+            </a:r>
+            <a:r>
+              <a:rPr lang="pl-PL" sz="1600" dirty="0"/>
+              <a:t> implementacji interfejsów lub klas abstrakcyjnych.</a:t>
+            </a:r>
+          </a:p>
+        </p:txBody>
+      </p:sp>
+      <p:pic>
+        <p:nvPicPr>
+          <p:cNvPr id="5" name="Obraz 4">
+            <a:extLst>
+              <a:ext uri="{FF2B5EF4-FFF2-40B4-BE49-F238E27FC236}">
+                <a16:creationId xmlns:a16="http://schemas.microsoft.com/office/drawing/2014/main" id="{116982D9-6660-4159-5475-3770D5E93F2E}"/>
+              </a:ext>
+            </a:extLst>
+          </p:cNvPr>
+          <p:cNvPicPr>
+            <a:picLocks noChangeAspect="1"/>
+          </p:cNvPicPr>
+          <p:nvPr/>
+        </p:nvPicPr>
+        <p:blipFill>
+          <a:blip r:embed="rId4"/>
+          <a:stretch>
+            <a:fillRect/>
+          </a:stretch>
+        </p:blipFill>
+        <p:spPr>
+          <a:xfrm>
+            <a:off x="4572000" y="1542505"/>
+            <a:ext cx="3105240" cy="1075180"/>
+          </a:xfrm>
+          <a:prstGeom prst="rect">
+            <a:avLst/>
+          </a:prstGeom>
+        </p:spPr>
+      </p:pic>
+      <p:sp>
+        <p:nvSpPr>
+          <p:cNvPr id="13" name="pole tekstowe 12">
+            <a:extLst>
+              <a:ext uri="{FF2B5EF4-FFF2-40B4-BE49-F238E27FC236}">
+                <a16:creationId xmlns:a16="http://schemas.microsoft.com/office/drawing/2014/main" id="{FC2062F9-1781-14D8-9F8D-AEF2ECDD1ABD}"/>
+              </a:ext>
+            </a:extLst>
+          </p:cNvPr>
+          <p:cNvSpPr txBox="1"/>
+          <p:nvPr/>
+        </p:nvSpPr>
+        <p:spPr>
+          <a:xfrm>
+            <a:off x="2618548" y="1872531"/>
+            <a:ext cx="1787670" cy="646331"/>
+          </a:xfrm>
+          <a:prstGeom prst="rect">
+            <a:avLst/>
+          </a:prstGeom>
+          <a:noFill/>
+        </p:spPr>
+        <p:txBody>
+          <a:bodyPr wrap="none" rtlCol="0">
+            <a:spAutoFit/>
+          </a:bodyPr>
+          <a:lstStyle/>
+          <a:p>
+            <a:pPr algn="ctr"/>
+            <a:r>
+              <a:rPr lang="pl-PL" sz="1800" b="1" dirty="0">
+                <a:solidFill>
+                  <a:schemeClr val="accent5">
+                    <a:lumMod val="75000"/>
+                  </a:schemeClr>
+                </a:solidFill>
+              </a:rPr>
+              <a:t>wymagana</a:t>
+            </a:r>
+          </a:p>
+          <a:p>
+            <a:pPr algn="ctr"/>
+            <a:r>
+              <a:rPr lang="pl-PL" sz="1800" b="1" dirty="0">
+                <a:solidFill>
+                  <a:schemeClr val="accent5">
+                    <a:lumMod val="75000"/>
+                  </a:schemeClr>
+                </a:solidFill>
+              </a:rPr>
+              <a:t>implementacja</a:t>
+            </a:r>
+          </a:p>
+        </p:txBody>
+      </p:sp>
+      <p:cxnSp>
+        <p:nvCxnSpPr>
+          <p:cNvPr id="14" name="Łącznik prosty ze strzałką 13">
+            <a:extLst>
+              <a:ext uri="{FF2B5EF4-FFF2-40B4-BE49-F238E27FC236}">
+                <a16:creationId xmlns:a16="http://schemas.microsoft.com/office/drawing/2014/main" id="{8DC2B101-FFE4-6FFB-DB99-07DCC6A2A883}"/>
+              </a:ext>
+            </a:extLst>
+          </p:cNvPr>
+          <p:cNvCxnSpPr>
+            <a:cxnSpLocks/>
+          </p:cNvCxnSpPr>
+          <p:nvPr/>
+        </p:nvCxnSpPr>
+        <p:spPr>
+          <a:xfrm>
+            <a:off x="4355221" y="2204864"/>
+            <a:ext cx="988736" cy="0"/>
+          </a:xfrm>
+          <a:prstGeom prst="straightConnector1">
+            <a:avLst/>
+          </a:prstGeom>
+          <a:ln w="63500" cap="rnd">
+            <a:prstDash val="solid"/>
+            <a:tailEnd type="triangle"/>
+          </a:ln>
+        </p:spPr>
+        <p:style>
+          <a:lnRef idx="2">
+            <a:schemeClr val="accent1"/>
+          </a:lnRef>
+          <a:fillRef idx="0">
+            <a:schemeClr val="accent1"/>
+          </a:fillRef>
+          <a:effectRef idx="1">
+            <a:schemeClr val="accent1"/>
+          </a:effectRef>
+          <a:fontRef idx="minor">
+            <a:schemeClr val="tx1"/>
+          </a:fontRef>
+        </p:style>
+      </p:cxnSp>
+    </p:spTree>
+    <p:extLst>
+      <p:ext uri="{BB962C8B-B14F-4D97-AF65-F5344CB8AC3E}">
+        <p14:creationId xmlns:p14="http://schemas.microsoft.com/office/powerpoint/2010/main" val="2325447200"/>
+      </p:ext>
+    </p:extLst>
+  </p:cSld>
+  <p:clrMapOvr>
+    <a:masterClrMapping/>
+  </p:clrMapOvr>
+</p:sld>
+</file>
+
+<file path=ppt/slides/slide40.xml><?xml version="1.0" encoding="utf-8"?>
 <p:sld xmlns:a="http://schemas.openxmlformats.org/drawingml/2006/main" xmlns:r="http://schemas.openxmlformats.org/officeDocument/2006/relationships" xmlns:p="http://schemas.openxmlformats.org/presentationml/2006/main">
   <p:cSld>
     <p:bg>
@@ -27113,272 +27741,7 @@
 </p:sld>
 </file>
 
-<file path=ppt/slides/slide4.xml><?xml version="1.0" encoding="utf-8"?>
-<p:sld xmlns:a="http://schemas.openxmlformats.org/drawingml/2006/main" xmlns:r="http://schemas.openxmlformats.org/officeDocument/2006/relationships" xmlns:p="http://schemas.openxmlformats.org/presentationml/2006/main">
-  <p:cSld>
-    <p:bg>
-      <p:bgPr>
-        <a:blipFill dpi="0" rotWithShape="0">
-          <a:blip r:embed="rId3" cstate="print"/>
-          <a:srcRect/>
-          <a:stretch>
-            <a:fillRect/>
-          </a:stretch>
-        </a:blipFill>
-        <a:effectLst/>
-      </p:bgPr>
-    </p:bg>
-    <p:spTree>
-      <p:nvGrpSpPr>
-        <p:cNvPr id="1" name="">
-          <a:extLst>
-            <a:ext uri="{FF2B5EF4-FFF2-40B4-BE49-F238E27FC236}">
-              <a16:creationId xmlns:a16="http://schemas.microsoft.com/office/drawing/2014/main" id="{1915ED04-D91F-FA66-614A-0551933AA5D9}"/>
-            </a:ext>
-          </a:extLst>
-        </p:cNvPr>
-        <p:cNvGrpSpPr/>
-        <p:nvPr/>
-      </p:nvGrpSpPr>
-      <p:grpSpPr>
-        <a:xfrm>
-          <a:off x="0" y="0"/>
-          <a:ext cx="0" cy="0"/>
-          <a:chOff x="0" y="0"/>
-          <a:chExt cx="0" cy="0"/>
-        </a:xfrm>
-      </p:grpSpPr>
-      <p:sp>
-        <p:nvSpPr>
-          <p:cNvPr id="2" name="Rectangle 1">
-            <a:extLst>
-              <a:ext uri="{FF2B5EF4-FFF2-40B4-BE49-F238E27FC236}">
-                <a16:creationId xmlns:a16="http://schemas.microsoft.com/office/drawing/2014/main" id="{0DD61E60-FE3D-336A-AC41-02502501F961}"/>
-              </a:ext>
-            </a:extLst>
-          </p:cNvPr>
-          <p:cNvSpPr/>
-          <p:nvPr/>
-        </p:nvSpPr>
-        <p:spPr>
-          <a:xfrm>
-            <a:off x="1979712" y="188640"/>
-            <a:ext cx="6696744" cy="492443"/>
-          </a:xfrm>
-          <a:prstGeom prst="rect">
-            <a:avLst/>
-          </a:prstGeom>
-        </p:spPr>
-        <p:txBody>
-          <a:bodyPr wrap="square">
-            <a:spAutoFit/>
-          </a:bodyPr>
-          <a:lstStyle/>
-          <a:p>
-            <a:pPr algn="ctr"/>
-            <a:r>
-              <a:rPr lang="pl-PL" sz="2600" dirty="0">
-                <a:solidFill>
-                  <a:schemeClr val="bg1"/>
-                </a:solidFill>
-                <a:latin typeface="Verdana" panose="020B0604030504040204" pitchFamily="34" charset="0"/>
-                <a:ea typeface="Verdana" panose="020B0604030504040204" pitchFamily="34" charset="0"/>
-                <a:cs typeface="Verdana" panose="020B0604030504040204" pitchFamily="34" charset="0"/>
-              </a:rPr>
-              <a:t>Obiekty</a:t>
-            </a:r>
-          </a:p>
-        </p:txBody>
-      </p:sp>
-      <p:sp>
-        <p:nvSpPr>
-          <p:cNvPr id="3" name="pole tekstowe 2">
-            <a:extLst>
-              <a:ext uri="{FF2B5EF4-FFF2-40B4-BE49-F238E27FC236}">
-                <a16:creationId xmlns:a16="http://schemas.microsoft.com/office/drawing/2014/main" id="{06B0E948-65CB-DF10-2404-FE5C735980E2}"/>
-              </a:ext>
-            </a:extLst>
-          </p:cNvPr>
-          <p:cNvSpPr txBox="1"/>
-          <p:nvPr/>
-        </p:nvSpPr>
-        <p:spPr>
-          <a:xfrm>
-            <a:off x="1043608" y="836712"/>
-            <a:ext cx="7848872" cy="584775"/>
-          </a:xfrm>
-          <a:prstGeom prst="rect">
-            <a:avLst/>
-          </a:prstGeom>
-          <a:noFill/>
-        </p:spPr>
-        <p:txBody>
-          <a:bodyPr wrap="square" rtlCol="0">
-            <a:spAutoFit/>
-          </a:bodyPr>
-          <a:lstStyle/>
-          <a:p>
-            <a:pPr algn="just"/>
-            <a:r>
-              <a:rPr lang="pl-PL" sz="1600" b="1" dirty="0"/>
-              <a:t>Obiekty anonimowe </a:t>
-            </a:r>
-            <a:r>
-              <a:rPr lang="pl-PL" sz="1600" dirty="0"/>
-              <a:t>można wykorzystać do </a:t>
-            </a:r>
-            <a:r>
-              <a:rPr lang="pl-PL" sz="1600" b="1" dirty="0"/>
-              <a:t>jednorazowej</a:t>
-            </a:r>
-            <a:r>
-              <a:rPr lang="pl-PL" sz="1600" dirty="0"/>
-              <a:t> implementacji interfejsów lub klas abstrakcyjnych.</a:t>
-            </a:r>
-          </a:p>
-        </p:txBody>
-      </p:sp>
-      <p:pic>
-        <p:nvPicPr>
-          <p:cNvPr id="5" name="Obraz 4">
-            <a:extLst>
-              <a:ext uri="{FF2B5EF4-FFF2-40B4-BE49-F238E27FC236}">
-                <a16:creationId xmlns:a16="http://schemas.microsoft.com/office/drawing/2014/main" id="{116982D9-6660-4159-5475-3770D5E93F2E}"/>
-              </a:ext>
-            </a:extLst>
-          </p:cNvPr>
-          <p:cNvPicPr>
-            <a:picLocks noChangeAspect="1"/>
-          </p:cNvPicPr>
-          <p:nvPr/>
-        </p:nvPicPr>
-        <p:blipFill>
-          <a:blip r:embed="rId4"/>
-          <a:stretch>
-            <a:fillRect/>
-          </a:stretch>
-        </p:blipFill>
-        <p:spPr>
-          <a:xfrm>
-            <a:off x="4572000" y="1542505"/>
-            <a:ext cx="3105240" cy="1075180"/>
-          </a:xfrm>
-          <a:prstGeom prst="rect">
-            <a:avLst/>
-          </a:prstGeom>
-        </p:spPr>
-      </p:pic>
-      <p:sp>
-        <p:nvSpPr>
-          <p:cNvPr id="13" name="pole tekstowe 12">
-            <a:extLst>
-              <a:ext uri="{FF2B5EF4-FFF2-40B4-BE49-F238E27FC236}">
-                <a16:creationId xmlns:a16="http://schemas.microsoft.com/office/drawing/2014/main" id="{FC2062F9-1781-14D8-9F8D-AEF2ECDD1ABD}"/>
-              </a:ext>
-            </a:extLst>
-          </p:cNvPr>
-          <p:cNvSpPr txBox="1"/>
-          <p:nvPr/>
-        </p:nvSpPr>
-        <p:spPr>
-          <a:xfrm>
-            <a:off x="2618548" y="1872531"/>
-            <a:ext cx="1787670" cy="646331"/>
-          </a:xfrm>
-          <a:prstGeom prst="rect">
-            <a:avLst/>
-          </a:prstGeom>
-          <a:noFill/>
-        </p:spPr>
-        <p:txBody>
-          <a:bodyPr wrap="none" rtlCol="0">
-            <a:spAutoFit/>
-          </a:bodyPr>
-          <a:lstStyle/>
-          <a:p>
-            <a:pPr algn="ctr"/>
-            <a:r>
-              <a:rPr lang="pl-PL" sz="1800" b="1" dirty="0">
-                <a:solidFill>
-                  <a:schemeClr val="accent5">
-                    <a:lumMod val="75000"/>
-                  </a:schemeClr>
-                </a:solidFill>
-              </a:rPr>
-              <a:t>wymagana</a:t>
-            </a:r>
-          </a:p>
-          <a:p>
-            <a:pPr algn="ctr"/>
-            <a:r>
-              <a:rPr lang="pl-PL" sz="1800" b="1" dirty="0">
-                <a:solidFill>
-                  <a:schemeClr val="accent5">
-                    <a:lumMod val="75000"/>
-                  </a:schemeClr>
-                </a:solidFill>
-              </a:rPr>
-              <a:t>implementacja</a:t>
-            </a:r>
-          </a:p>
-        </p:txBody>
-      </p:sp>
-      <p:cxnSp>
-        <p:nvCxnSpPr>
-          <p:cNvPr id="14" name="Łącznik prosty ze strzałką 13">
-            <a:extLst>
-              <a:ext uri="{FF2B5EF4-FFF2-40B4-BE49-F238E27FC236}">
-                <a16:creationId xmlns:a16="http://schemas.microsoft.com/office/drawing/2014/main" id="{8DC2B101-FFE4-6FFB-DB99-07DCC6A2A883}"/>
-              </a:ext>
-            </a:extLst>
-          </p:cNvPr>
-          <p:cNvCxnSpPr>
-            <a:cxnSpLocks/>
-          </p:cNvCxnSpPr>
-          <p:nvPr/>
-        </p:nvCxnSpPr>
-        <p:spPr>
-          <a:xfrm>
-            <a:off x="4355221" y="2204864"/>
-            <a:ext cx="988736" cy="0"/>
-          </a:xfrm>
-          <a:prstGeom prst="straightConnector1">
-            <a:avLst/>
-          </a:prstGeom>
-          <a:ln w="63500" cap="rnd">
-            <a:prstDash val="solid"/>
-            <a:tailEnd type="triangle"/>
-          </a:ln>
-        </p:spPr>
-        <p:style>
-          <a:lnRef idx="2">
-            <a:schemeClr val="accent1"/>
-          </a:lnRef>
-          <a:fillRef idx="0">
-            <a:schemeClr val="accent1"/>
-          </a:fillRef>
-          <a:effectRef idx="1">
-            <a:schemeClr val="accent1"/>
-          </a:effectRef>
-          <a:fontRef idx="minor">
-            <a:schemeClr val="tx1"/>
-          </a:fontRef>
-        </p:style>
-      </p:cxnSp>
-    </p:spTree>
-    <p:extLst>
-      <p:ext uri="{BB962C8B-B14F-4D97-AF65-F5344CB8AC3E}">
-        <p14:creationId xmlns:p14="http://schemas.microsoft.com/office/powerpoint/2010/main" val="2325447200"/>
-      </p:ext>
-    </p:extLst>
-  </p:cSld>
-  <p:clrMapOvr>
-    <a:masterClrMapping/>
-  </p:clrMapOvr>
-</p:sld>
-</file>
-
-<file path=ppt/slides/slide40.xml><?xml version="1.0" encoding="utf-8"?>
+<file path=ppt/slides/slide41.xml><?xml version="1.0" encoding="utf-8"?>
 <p:sld xmlns:a="http://schemas.openxmlformats.org/drawingml/2006/main" xmlns:r="http://schemas.openxmlformats.org/officeDocument/2006/relationships" xmlns:p="http://schemas.openxmlformats.org/presentationml/2006/main">
   <p:cSld>
     <p:bg>
@@ -27885,7 +28248,7 @@
 </p:sld>
 </file>
 
-<file path=ppt/slides/slide41.xml><?xml version="1.0" encoding="utf-8"?>
+<file path=ppt/slides/slide42.xml><?xml version="1.0" encoding="utf-8"?>
 <p:sld xmlns:a="http://schemas.openxmlformats.org/drawingml/2006/main" xmlns:r="http://schemas.openxmlformats.org/officeDocument/2006/relationships" xmlns:p="http://schemas.openxmlformats.org/presentationml/2006/main">
   <p:cSld>
     <p:bg>
@@ -28083,7 +28446,7 @@
 </p:sld>
 </file>
 
-<file path=ppt/slides/slide42.xml><?xml version="1.0" encoding="utf-8"?>
+<file path=ppt/slides/slide43.xml><?xml version="1.0" encoding="utf-8"?>
 <p:sld xmlns:a="http://schemas.openxmlformats.org/drawingml/2006/main" xmlns:r="http://schemas.openxmlformats.org/officeDocument/2006/relationships" xmlns:p="http://schemas.openxmlformats.org/presentationml/2006/main">
   <p:cSld>
     <p:bg>
@@ -28940,7 +29303,7 @@
 </p:sld>
 </file>
 
-<file path=ppt/slides/slide43.xml><?xml version="1.0" encoding="utf-8"?>
+<file path=ppt/slides/slide44.xml><?xml version="1.0" encoding="utf-8"?>
 <p:sld xmlns:a="http://schemas.openxmlformats.org/drawingml/2006/main" xmlns:r="http://schemas.openxmlformats.org/officeDocument/2006/relationships" xmlns:p="http://schemas.openxmlformats.org/presentationml/2006/main">
   <p:cSld>
     <p:bg>
@@ -29130,7 +29493,7 @@
 </p:sld>
 </file>
 
-<file path=ppt/slides/slide44.xml><?xml version="1.0" encoding="utf-8"?>
+<file path=ppt/slides/slide45.xml><?xml version="1.0" encoding="utf-8"?>
 <p:sld xmlns:a="http://schemas.openxmlformats.org/drawingml/2006/main" xmlns:r="http://schemas.openxmlformats.org/officeDocument/2006/relationships" xmlns:p="http://schemas.openxmlformats.org/presentationml/2006/main">
   <p:cSld>
     <p:bg>
@@ -29784,7 +30147,7 @@
 </p:sld>
 </file>
 
-<file path=ppt/slides/slide45.xml><?xml version="1.0" encoding="utf-8"?>
+<file path=ppt/slides/slide46.xml><?xml version="1.0" encoding="utf-8"?>
 <p:sld xmlns:a="http://schemas.openxmlformats.org/drawingml/2006/main" xmlns:r="http://schemas.openxmlformats.org/officeDocument/2006/relationships" xmlns:p="http://schemas.openxmlformats.org/presentationml/2006/main">
   <p:cSld>
     <p:bg>
@@ -30649,7 +31012,7 @@
 </p:sld>
 </file>
 
-<file path=ppt/slides/slide46.xml><?xml version="1.0" encoding="utf-8"?>
+<file path=ppt/slides/slide47.xml><?xml version="1.0" encoding="utf-8"?>
 <p:sld xmlns:a="http://schemas.openxmlformats.org/drawingml/2006/main" xmlns:r="http://schemas.openxmlformats.org/officeDocument/2006/relationships" xmlns:p="http://schemas.openxmlformats.org/presentationml/2006/main">
   <p:cSld>
     <p:bg>
@@ -31733,7 +32096,7 @@
 </p:sld>
 </file>
 
-<file path=ppt/slides/slide47.xml><?xml version="1.0" encoding="utf-8"?>
+<file path=ppt/slides/slide48.xml><?xml version="1.0" encoding="utf-8"?>
 <p:sld xmlns:a="http://schemas.openxmlformats.org/drawingml/2006/main" xmlns:r="http://schemas.openxmlformats.org/officeDocument/2006/relationships" xmlns:p="http://schemas.openxmlformats.org/presentationml/2006/main">
   <p:cSld>
     <p:bg>
@@ -33010,7 +33373,7 @@
 </p:sld>
 </file>
 
-<file path=ppt/slides/slide48.xml><?xml version="1.0" encoding="utf-8"?>
+<file path=ppt/slides/slide49.xml><?xml version="1.0" encoding="utf-8"?>
 <p:sld xmlns:a="http://schemas.openxmlformats.org/drawingml/2006/main" xmlns:r="http://schemas.openxmlformats.org/officeDocument/2006/relationships" xmlns:p="http://schemas.openxmlformats.org/presentationml/2006/main">
   <p:cSld>
     <p:bg>
@@ -34455,1019 +34818,6 @@
     <p:extLst>
       <p:ext uri="{BB962C8B-B14F-4D97-AF65-F5344CB8AC3E}">
         <p14:creationId xmlns:p14="http://schemas.microsoft.com/office/powerpoint/2010/main" val="3408246676"/>
-      </p:ext>
-    </p:extLst>
-  </p:cSld>
-  <p:clrMapOvr>
-    <a:masterClrMapping/>
-  </p:clrMapOvr>
-</p:sld>
-</file>
-
-<file path=ppt/slides/slide49.xml><?xml version="1.0" encoding="utf-8"?>
-<p:sld xmlns:a="http://schemas.openxmlformats.org/drawingml/2006/main" xmlns:r="http://schemas.openxmlformats.org/officeDocument/2006/relationships" xmlns:p="http://schemas.openxmlformats.org/presentationml/2006/main">
-  <p:cSld>
-    <p:bg>
-      <p:bgPr>
-        <a:blipFill dpi="0" rotWithShape="0">
-          <a:blip r:embed="rId3" cstate="print"/>
-          <a:srcRect/>
-          <a:stretch>
-            <a:fillRect/>
-          </a:stretch>
-        </a:blipFill>
-        <a:effectLst/>
-      </p:bgPr>
-    </p:bg>
-    <p:spTree>
-      <p:nvGrpSpPr>
-        <p:cNvPr id="1" name="">
-          <a:extLst>
-            <a:ext uri="{FF2B5EF4-FFF2-40B4-BE49-F238E27FC236}">
-              <a16:creationId xmlns:a16="http://schemas.microsoft.com/office/drawing/2014/main" id="{6A16B106-E302-3230-B6D8-66FE34A36039}"/>
-            </a:ext>
-          </a:extLst>
-        </p:cNvPr>
-        <p:cNvGrpSpPr/>
-        <p:nvPr/>
-      </p:nvGrpSpPr>
-      <p:grpSpPr>
-        <a:xfrm>
-          <a:off x="0" y="0"/>
-          <a:ext cx="0" cy="0"/>
-          <a:chOff x="0" y="0"/>
-          <a:chExt cx="0" cy="0"/>
-        </a:xfrm>
-      </p:grpSpPr>
-      <p:sp>
-        <p:nvSpPr>
-          <p:cNvPr id="2" name="Rectangle 1">
-            <a:extLst>
-              <a:ext uri="{FF2B5EF4-FFF2-40B4-BE49-F238E27FC236}">
-                <a16:creationId xmlns:a16="http://schemas.microsoft.com/office/drawing/2014/main" id="{9C9A4AE5-D428-878B-B340-1035542714B7}"/>
-              </a:ext>
-            </a:extLst>
-          </p:cNvPr>
-          <p:cNvSpPr/>
-          <p:nvPr/>
-        </p:nvSpPr>
-        <p:spPr>
-          <a:xfrm>
-            <a:off x="1979712" y="188640"/>
-            <a:ext cx="6696744" cy="492443"/>
-          </a:xfrm>
-          <a:prstGeom prst="rect">
-            <a:avLst/>
-          </a:prstGeom>
-        </p:spPr>
-        <p:txBody>
-          <a:bodyPr wrap="square">
-            <a:spAutoFit/>
-          </a:bodyPr>
-          <a:lstStyle/>
-          <a:p>
-            <a:pPr algn="ctr"/>
-            <a:r>
-              <a:rPr lang="pl-PL" sz="2600" dirty="0">
-                <a:solidFill>
-                  <a:schemeClr val="bg1"/>
-                </a:solidFill>
-                <a:latin typeface="Verdana" panose="020B0604030504040204" pitchFamily="34" charset="0"/>
-                <a:ea typeface="Verdana" panose="020B0604030504040204" pitchFamily="34" charset="0"/>
-                <a:cs typeface="Verdana" panose="020B0604030504040204" pitchFamily="34" charset="0"/>
-              </a:rPr>
-              <a:t>Klasy abstrakcyjne vs interfejsy</a:t>
-            </a:r>
-          </a:p>
-        </p:txBody>
-      </p:sp>
-      <p:sp>
-        <p:nvSpPr>
-          <p:cNvPr id="3" name="pole tekstowe 2">
-            <a:extLst>
-              <a:ext uri="{FF2B5EF4-FFF2-40B4-BE49-F238E27FC236}">
-                <a16:creationId xmlns:a16="http://schemas.microsoft.com/office/drawing/2014/main" id="{F50B9DB7-D087-4A66-2308-B67B5BA9C33E}"/>
-              </a:ext>
-            </a:extLst>
-          </p:cNvPr>
-          <p:cNvSpPr txBox="1"/>
-          <p:nvPr/>
-        </p:nvSpPr>
-        <p:spPr>
-          <a:xfrm>
-            <a:off x="1043608" y="836712"/>
-            <a:ext cx="8100392" cy="584775"/>
-          </a:xfrm>
-          <a:prstGeom prst="rect">
-            <a:avLst/>
-          </a:prstGeom>
-          <a:noFill/>
-        </p:spPr>
-        <p:txBody>
-          <a:bodyPr wrap="square" rtlCol="0">
-            <a:spAutoFit/>
-          </a:bodyPr>
-          <a:lstStyle/>
-          <a:p>
-            <a:r>
-              <a:rPr lang="pl-PL" sz="1600" dirty="0"/>
-              <a:t>interfejs </a:t>
-            </a:r>
-            <a:r>
-              <a:rPr lang="pl-PL" sz="1600" b="1" dirty="0"/>
-              <a:t>nie może przechowywać stanu </a:t>
-            </a:r>
-            <a:r>
-              <a:rPr lang="pl-PL" sz="1600" dirty="0"/>
-              <a:t>- za wyjątkiem przypadku kiedy może to zrobić (</a:t>
-            </a:r>
-            <a:r>
-              <a:rPr lang="pl-PL" sz="1600" b="1" dirty="0"/>
-              <a:t>zła praktyka</a:t>
-            </a:r>
-            <a:r>
-              <a:rPr lang="pl-PL" sz="1600" dirty="0"/>
-              <a:t>) - przykładowo w </a:t>
-            </a:r>
-            <a:r>
-              <a:rPr lang="pl-PL" sz="1600" b="1" dirty="0" err="1"/>
-              <a:t>companion</a:t>
-            </a:r>
-            <a:r>
-              <a:rPr lang="pl-PL" sz="1600" b="1" dirty="0"/>
-              <a:t> </a:t>
-            </a:r>
-            <a:r>
-              <a:rPr lang="pl-PL" sz="1600" b="1" dirty="0" err="1"/>
-              <a:t>object</a:t>
-            </a:r>
-            <a:endParaRPr lang="pl-PL" sz="1400" b="1" dirty="0"/>
-          </a:p>
-        </p:txBody>
-      </p:sp>
-      <p:pic>
-        <p:nvPicPr>
-          <p:cNvPr id="6" name="Obraz 5">
-            <a:extLst>
-              <a:ext uri="{FF2B5EF4-FFF2-40B4-BE49-F238E27FC236}">
-                <a16:creationId xmlns:a16="http://schemas.microsoft.com/office/drawing/2014/main" id="{E27FAF2F-A285-82CA-1C5F-CC8C732CC496}"/>
-              </a:ext>
-            </a:extLst>
-          </p:cNvPr>
-          <p:cNvPicPr>
-            <a:picLocks noChangeAspect="1"/>
-          </p:cNvPicPr>
-          <p:nvPr/>
-        </p:nvPicPr>
-        <p:blipFill>
-          <a:blip r:embed="rId4"/>
-          <a:stretch>
-            <a:fillRect/>
-          </a:stretch>
-        </p:blipFill>
-        <p:spPr>
-          <a:xfrm>
-            <a:off x="3997672" y="2132856"/>
-            <a:ext cx="4234086" cy="2110942"/>
-          </a:xfrm>
-          <a:prstGeom prst="rect">
-            <a:avLst/>
-          </a:prstGeom>
-        </p:spPr>
-      </p:pic>
-      <p:cxnSp>
-        <p:nvCxnSpPr>
-          <p:cNvPr id="8" name="Łącznik prosty ze strzałką 7">
-            <a:extLst>
-              <a:ext uri="{FF2B5EF4-FFF2-40B4-BE49-F238E27FC236}">
-                <a16:creationId xmlns:a16="http://schemas.microsoft.com/office/drawing/2014/main" id="{7B8B3592-1434-A652-4016-114F67C8DBCE}"/>
-              </a:ext>
-            </a:extLst>
-          </p:cNvPr>
-          <p:cNvCxnSpPr>
-            <a:cxnSpLocks/>
-            <a:stCxn id="12" idx="3"/>
-          </p:cNvCxnSpPr>
-          <p:nvPr/>
-        </p:nvCxnSpPr>
-        <p:spPr>
-          <a:xfrm>
-            <a:off x="3557311" y="1954064"/>
-            <a:ext cx="1144983" cy="610840"/>
-          </a:xfrm>
-          <a:prstGeom prst="straightConnector1">
-            <a:avLst/>
-          </a:prstGeom>
-          <a:ln w="63500" cap="rnd">
-            <a:prstDash val="solid"/>
-            <a:tailEnd type="triangle"/>
-          </a:ln>
-        </p:spPr>
-        <p:style>
-          <a:lnRef idx="2">
-            <a:schemeClr val="accent1"/>
-          </a:lnRef>
-          <a:fillRef idx="0">
-            <a:schemeClr val="accent1"/>
-          </a:fillRef>
-          <a:effectRef idx="1">
-            <a:schemeClr val="accent1"/>
-          </a:effectRef>
-          <a:fontRef idx="minor">
-            <a:schemeClr val="tx1"/>
-          </a:fontRef>
-        </p:style>
-      </p:cxnSp>
-      <p:sp>
-        <p:nvSpPr>
-          <p:cNvPr id="11" name="pole tekstowe 10">
-            <a:extLst>
-              <a:ext uri="{FF2B5EF4-FFF2-40B4-BE49-F238E27FC236}">
-                <a16:creationId xmlns:a16="http://schemas.microsoft.com/office/drawing/2014/main" id="{FC48D29D-9221-0064-0A5A-4B800762BF49}"/>
-              </a:ext>
-            </a:extLst>
-          </p:cNvPr>
-          <p:cNvSpPr txBox="1"/>
-          <p:nvPr/>
-        </p:nvSpPr>
-        <p:spPr>
-          <a:xfrm>
-            <a:off x="1114765" y="1661676"/>
-            <a:ext cx="2442546" cy="584775"/>
-          </a:xfrm>
-          <a:prstGeom prst="rect">
-            <a:avLst/>
-          </a:prstGeom>
-          <a:noFill/>
-        </p:spPr>
-        <p:txBody>
-          <a:bodyPr wrap="square" rtlCol="0">
-            <a:spAutoFit/>
-          </a:bodyPr>
-          <a:lstStyle/>
-          <a:p>
-            <a:pPr algn="just"/>
-            <a:r>
-              <a:rPr lang="pl-PL" sz="1600" dirty="0">
-                <a:solidFill>
-                  <a:schemeClr val="accent4">
-                    <a:lumMod val="50000"/>
-                  </a:schemeClr>
-                </a:solidFill>
-              </a:rPr>
-              <a:t>Właściwość z </a:t>
-            </a:r>
-            <a:r>
-              <a:rPr lang="pl-PL" sz="1600" b="1" dirty="0">
-                <a:solidFill>
-                  <a:schemeClr val="accent4">
-                    <a:lumMod val="50000"/>
-                  </a:schemeClr>
-                </a:solidFill>
-              </a:rPr>
-              <a:t>getterem</a:t>
-            </a:r>
-            <a:r>
-              <a:rPr lang="pl-PL" sz="1600" dirty="0">
-                <a:solidFill>
-                  <a:schemeClr val="accent4">
-                    <a:lumMod val="50000"/>
-                  </a:schemeClr>
-                </a:solidFill>
-              </a:rPr>
-              <a:t> i </a:t>
-            </a:r>
-            <a:r>
-              <a:rPr lang="pl-PL" sz="1600" b="1" dirty="0" err="1">
-                <a:solidFill>
-                  <a:schemeClr val="accent4">
-                    <a:lumMod val="50000"/>
-                  </a:schemeClr>
-                </a:solidFill>
-              </a:rPr>
-              <a:t>setterem</a:t>
-            </a:r>
-            <a:endParaRPr lang="pl-PL" sz="1600" b="1" dirty="0">
-              <a:solidFill>
-                <a:schemeClr val="accent4">
-                  <a:lumMod val="50000"/>
-                </a:schemeClr>
-              </a:solidFill>
-            </a:endParaRPr>
-          </a:p>
-        </p:txBody>
-      </p:sp>
-      <p:sp>
-        <p:nvSpPr>
-          <p:cNvPr id="12" name="Prostokąt: zaokrąglone rogi 11">
-            <a:extLst>
-              <a:ext uri="{FF2B5EF4-FFF2-40B4-BE49-F238E27FC236}">
-                <a16:creationId xmlns:a16="http://schemas.microsoft.com/office/drawing/2014/main" id="{1D1827F5-9F5A-9CA8-7382-D19AB3675B96}"/>
-              </a:ext>
-            </a:extLst>
-          </p:cNvPr>
-          <p:cNvSpPr/>
-          <p:nvPr/>
-        </p:nvSpPr>
-        <p:spPr>
-          <a:xfrm>
-            <a:off x="1109039" y="1661676"/>
-            <a:ext cx="2448272" cy="584775"/>
-          </a:xfrm>
-          <a:prstGeom prst="roundRect">
-            <a:avLst/>
-          </a:prstGeom>
-          <a:noFill/>
-          <a:ln w="63500"/>
-        </p:spPr>
-        <p:style>
-          <a:lnRef idx="1">
-            <a:schemeClr val="accent1"/>
-          </a:lnRef>
-          <a:fillRef idx="3">
-            <a:schemeClr val="accent1"/>
-          </a:fillRef>
-          <a:effectRef idx="2">
-            <a:schemeClr val="accent1"/>
-          </a:effectRef>
-          <a:fontRef idx="minor">
-            <a:schemeClr val="lt1"/>
-          </a:fontRef>
-        </p:style>
-        <p:txBody>
-          <a:bodyPr rtlCol="0" anchor="ctr"/>
-          <a:lstStyle/>
-          <a:p>
-            <a:pPr algn="ctr"/>
-            <a:endParaRPr lang="pl-PL"/>
-          </a:p>
-        </p:txBody>
-      </p:sp>
-      <p:sp>
-        <p:nvSpPr>
-          <p:cNvPr id="13" name="pole tekstowe 12">
-            <a:extLst>
-              <a:ext uri="{FF2B5EF4-FFF2-40B4-BE49-F238E27FC236}">
-                <a16:creationId xmlns:a16="http://schemas.microsoft.com/office/drawing/2014/main" id="{BEACD46E-EE91-35ED-6F88-24EBED5683EF}"/>
-              </a:ext>
-            </a:extLst>
-          </p:cNvPr>
-          <p:cNvSpPr txBox="1"/>
-          <p:nvPr/>
-        </p:nvSpPr>
-        <p:spPr>
-          <a:xfrm>
-            <a:off x="1283839" y="2564905"/>
-            <a:ext cx="2442546" cy="338554"/>
-          </a:xfrm>
-          <a:prstGeom prst="rect">
-            <a:avLst/>
-          </a:prstGeom>
-          <a:noFill/>
-        </p:spPr>
-        <p:txBody>
-          <a:bodyPr wrap="square" rtlCol="0">
-            <a:spAutoFit/>
-          </a:bodyPr>
-          <a:lstStyle/>
-          <a:p>
-            <a:pPr algn="just"/>
-            <a:r>
-              <a:rPr lang="pl-PL" sz="1600" b="1" dirty="0">
-                <a:solidFill>
-                  <a:schemeClr val="accent4">
-                    <a:lumMod val="50000"/>
-                  </a:schemeClr>
-                </a:solidFill>
-              </a:rPr>
-              <a:t>Obiekt stowarzyszony</a:t>
-            </a:r>
-          </a:p>
-        </p:txBody>
-      </p:sp>
-      <p:cxnSp>
-        <p:nvCxnSpPr>
-          <p:cNvPr id="15" name="Łącznik prosty ze strzałką 14">
-            <a:extLst>
-              <a:ext uri="{FF2B5EF4-FFF2-40B4-BE49-F238E27FC236}">
-                <a16:creationId xmlns:a16="http://schemas.microsoft.com/office/drawing/2014/main" id="{F175CE13-00D1-0060-E843-F67C5287C1AB}"/>
-              </a:ext>
-            </a:extLst>
-          </p:cNvPr>
-          <p:cNvCxnSpPr>
-            <a:cxnSpLocks/>
-            <a:stCxn id="14" idx="3"/>
-          </p:cNvCxnSpPr>
-          <p:nvPr/>
-        </p:nvCxnSpPr>
-        <p:spPr>
-          <a:xfrm>
-            <a:off x="3548879" y="2734182"/>
-            <a:ext cx="1153415" cy="639016"/>
-          </a:xfrm>
-          <a:prstGeom prst="straightConnector1">
-            <a:avLst/>
-          </a:prstGeom>
-          <a:ln w="63500" cap="rnd">
-            <a:prstDash val="solid"/>
-            <a:tailEnd type="triangle"/>
-          </a:ln>
-        </p:spPr>
-        <p:style>
-          <a:lnRef idx="2">
-            <a:schemeClr val="accent1"/>
-          </a:lnRef>
-          <a:fillRef idx="0">
-            <a:schemeClr val="accent1"/>
-          </a:fillRef>
-          <a:effectRef idx="1">
-            <a:schemeClr val="accent1"/>
-          </a:effectRef>
-          <a:fontRef idx="minor">
-            <a:schemeClr val="tx1"/>
-          </a:fontRef>
-        </p:style>
-      </p:cxnSp>
-      <p:sp>
-        <p:nvSpPr>
-          <p:cNvPr id="14" name="Prostokąt: zaokrąglone rogi 13">
-            <a:extLst>
-              <a:ext uri="{FF2B5EF4-FFF2-40B4-BE49-F238E27FC236}">
-                <a16:creationId xmlns:a16="http://schemas.microsoft.com/office/drawing/2014/main" id="{720AD29B-016D-7A6B-1A49-6FB01AA2320D}"/>
-              </a:ext>
-            </a:extLst>
-          </p:cNvPr>
-          <p:cNvSpPr/>
-          <p:nvPr/>
-        </p:nvSpPr>
-        <p:spPr>
-          <a:xfrm>
-            <a:off x="1316631" y="2564904"/>
-            <a:ext cx="2232248" cy="338555"/>
-          </a:xfrm>
-          <a:prstGeom prst="roundRect">
-            <a:avLst/>
-          </a:prstGeom>
-          <a:noFill/>
-          <a:ln w="63500"/>
-        </p:spPr>
-        <p:style>
-          <a:lnRef idx="1">
-            <a:schemeClr val="accent1"/>
-          </a:lnRef>
-          <a:fillRef idx="3">
-            <a:schemeClr val="accent1"/>
-          </a:fillRef>
-          <a:effectRef idx="2">
-            <a:schemeClr val="accent1"/>
-          </a:effectRef>
-          <a:fontRef idx="minor">
-            <a:schemeClr val="lt1"/>
-          </a:fontRef>
-        </p:style>
-        <p:txBody>
-          <a:bodyPr rtlCol="0" anchor="ctr"/>
-          <a:lstStyle/>
-          <a:p>
-            <a:pPr algn="ctr"/>
-            <a:endParaRPr lang="pl-PL"/>
-          </a:p>
-        </p:txBody>
-      </p:sp>
-      <p:sp>
-        <p:nvSpPr>
-          <p:cNvPr id="19" name="pole tekstowe 18">
-            <a:extLst>
-              <a:ext uri="{FF2B5EF4-FFF2-40B4-BE49-F238E27FC236}">
-                <a16:creationId xmlns:a16="http://schemas.microsoft.com/office/drawing/2014/main" id="{A8CE5F01-387D-2094-87F1-ED7620BD8CDB}"/>
-              </a:ext>
-            </a:extLst>
-          </p:cNvPr>
-          <p:cNvSpPr txBox="1"/>
-          <p:nvPr/>
-        </p:nvSpPr>
-        <p:spPr>
-          <a:xfrm>
-            <a:off x="1109039" y="3302665"/>
-            <a:ext cx="3055392" cy="830997"/>
-          </a:xfrm>
-          <a:prstGeom prst="rect">
-            <a:avLst/>
-          </a:prstGeom>
-          <a:noFill/>
-        </p:spPr>
-        <p:txBody>
-          <a:bodyPr wrap="square" rtlCol="0">
-            <a:spAutoFit/>
-          </a:bodyPr>
-          <a:lstStyle/>
-          <a:p>
-            <a:pPr algn="just"/>
-            <a:r>
-              <a:rPr lang="pl-PL" sz="1600" b="1" dirty="0">
-                <a:solidFill>
-                  <a:schemeClr val="accent4">
-                    <a:lumMod val="50000"/>
-                  </a:schemeClr>
-                </a:solidFill>
-              </a:rPr>
-              <a:t>Mapa</a:t>
-            </a:r>
-            <a:r>
-              <a:rPr lang="pl-PL" sz="1600" dirty="0">
-                <a:solidFill>
-                  <a:schemeClr val="accent4">
-                    <a:lumMod val="50000"/>
-                  </a:schemeClr>
-                </a:solidFill>
-              </a:rPr>
-              <a:t> </a:t>
-            </a:r>
-            <a:r>
-              <a:rPr lang="pl-PL" sz="1600" dirty="0" err="1">
-                <a:solidFill>
-                  <a:schemeClr val="accent4">
-                    <a:lumMod val="50000"/>
-                  </a:schemeClr>
-                </a:solidFill>
-              </a:rPr>
-              <a:t>przechwująca</a:t>
-            </a:r>
-            <a:r>
-              <a:rPr lang="pl-PL" sz="1600" dirty="0">
-                <a:solidFill>
-                  <a:schemeClr val="accent4">
-                    <a:lumMod val="50000"/>
-                  </a:schemeClr>
-                </a:solidFill>
-              </a:rPr>
-              <a:t> referencje do </a:t>
-            </a:r>
-            <a:r>
-              <a:rPr lang="pl-PL" sz="1600" b="1" dirty="0">
-                <a:solidFill>
-                  <a:schemeClr val="accent4">
-                    <a:lumMod val="50000"/>
-                  </a:schemeClr>
-                </a:solidFill>
-              </a:rPr>
-              <a:t>wszystkich obiektów o typie interfejsu</a:t>
-            </a:r>
-          </a:p>
-        </p:txBody>
-      </p:sp>
-      <p:cxnSp>
-        <p:nvCxnSpPr>
-          <p:cNvPr id="21" name="Łącznik prosty ze strzałką 20">
-            <a:extLst>
-              <a:ext uri="{FF2B5EF4-FFF2-40B4-BE49-F238E27FC236}">
-                <a16:creationId xmlns:a16="http://schemas.microsoft.com/office/drawing/2014/main" id="{659182E7-00F8-AD8E-3354-2FAC1B213E82}"/>
-              </a:ext>
-            </a:extLst>
-          </p:cNvPr>
-          <p:cNvCxnSpPr>
-            <a:cxnSpLocks/>
-            <a:stCxn id="20" idx="3"/>
-          </p:cNvCxnSpPr>
-          <p:nvPr/>
-        </p:nvCxnSpPr>
-        <p:spPr>
-          <a:xfrm flipV="1">
-            <a:off x="4205383" y="3698758"/>
-            <a:ext cx="733236" cy="21679"/>
-          </a:xfrm>
-          <a:prstGeom prst="straightConnector1">
-            <a:avLst/>
-          </a:prstGeom>
-          <a:ln w="63500" cap="rnd">
-            <a:prstDash val="solid"/>
-            <a:tailEnd type="triangle"/>
-          </a:ln>
-        </p:spPr>
-        <p:style>
-          <a:lnRef idx="2">
-            <a:schemeClr val="accent1"/>
-          </a:lnRef>
-          <a:fillRef idx="0">
-            <a:schemeClr val="accent1"/>
-          </a:fillRef>
-          <a:effectRef idx="1">
-            <a:schemeClr val="accent1"/>
-          </a:effectRef>
-          <a:fontRef idx="minor">
-            <a:schemeClr val="tx1"/>
-          </a:fontRef>
-        </p:style>
-      </p:cxnSp>
-      <p:sp>
-        <p:nvSpPr>
-          <p:cNvPr id="20" name="Prostokąt: zaokrąglone rogi 19">
-            <a:extLst>
-              <a:ext uri="{FF2B5EF4-FFF2-40B4-BE49-F238E27FC236}">
-                <a16:creationId xmlns:a16="http://schemas.microsoft.com/office/drawing/2014/main" id="{CD7D9F1A-17BF-45A9-C94E-4BD512AE650F}"/>
-              </a:ext>
-            </a:extLst>
-          </p:cNvPr>
-          <p:cNvSpPr/>
-          <p:nvPr/>
-        </p:nvSpPr>
-        <p:spPr>
-          <a:xfrm>
-            <a:off x="1109039" y="3307212"/>
-            <a:ext cx="3096344" cy="826450"/>
-          </a:xfrm>
-          <a:prstGeom prst="roundRect">
-            <a:avLst/>
-          </a:prstGeom>
-          <a:noFill/>
-          <a:ln w="63500"/>
-        </p:spPr>
-        <p:style>
-          <a:lnRef idx="1">
-            <a:schemeClr val="accent1"/>
-          </a:lnRef>
-          <a:fillRef idx="3">
-            <a:schemeClr val="accent1"/>
-          </a:fillRef>
-          <a:effectRef idx="2">
-            <a:schemeClr val="accent1"/>
-          </a:effectRef>
-          <a:fontRef idx="minor">
-            <a:schemeClr val="lt1"/>
-          </a:fontRef>
-        </p:style>
-        <p:txBody>
-          <a:bodyPr rtlCol="0" anchor="ctr"/>
-          <a:lstStyle/>
-          <a:p>
-            <a:pPr algn="ctr"/>
-            <a:endParaRPr lang="pl-PL" dirty="0"/>
-          </a:p>
-        </p:txBody>
-      </p:sp>
-      <p:sp>
-        <p:nvSpPr>
-          <p:cNvPr id="31" name="pole tekstowe 30">
-            <a:extLst>
-              <a:ext uri="{FF2B5EF4-FFF2-40B4-BE49-F238E27FC236}">
-                <a16:creationId xmlns:a16="http://schemas.microsoft.com/office/drawing/2014/main" id="{5F3F42A9-ECEF-FBBE-8E62-A1697846D2B1}"/>
-              </a:ext>
-            </a:extLst>
-          </p:cNvPr>
-          <p:cNvSpPr txBox="1"/>
-          <p:nvPr/>
-        </p:nvSpPr>
-        <p:spPr>
-          <a:xfrm>
-            <a:off x="5407399" y="1421487"/>
-            <a:ext cx="3273152" cy="830997"/>
-          </a:xfrm>
-          <a:prstGeom prst="rect">
-            <a:avLst/>
-          </a:prstGeom>
-          <a:noFill/>
-        </p:spPr>
-        <p:txBody>
-          <a:bodyPr wrap="square" rtlCol="0">
-            <a:spAutoFit/>
-          </a:bodyPr>
-          <a:lstStyle/>
-          <a:p>
-            <a:pPr algn="just"/>
-            <a:r>
-              <a:rPr lang="pl-PL" sz="1600" dirty="0">
-                <a:solidFill>
-                  <a:schemeClr val="accent4">
-                    <a:lumMod val="50000"/>
-                  </a:schemeClr>
-                </a:solidFill>
-              </a:rPr>
-              <a:t>Możemy odwołać się do </a:t>
-            </a:r>
-            <a:r>
-              <a:rPr lang="pl-PL" sz="1600" b="1" dirty="0">
-                <a:solidFill>
-                  <a:schemeClr val="accent4">
-                    <a:lumMod val="50000"/>
-                  </a:schemeClr>
-                </a:solidFill>
-              </a:rPr>
-              <a:t>instancji klasy implementującej </a:t>
-            </a:r>
-            <a:r>
-              <a:rPr lang="pl-PL" sz="1600" dirty="0">
-                <a:solidFill>
-                  <a:schemeClr val="accent4">
-                    <a:lumMod val="50000"/>
-                  </a:schemeClr>
-                </a:solidFill>
-              </a:rPr>
-              <a:t>przez słowo kluczowe </a:t>
-            </a:r>
-            <a:r>
-              <a:rPr lang="pl-PL" sz="1600" b="1" dirty="0" err="1">
-                <a:solidFill>
-                  <a:schemeClr val="accent4">
-                    <a:lumMod val="50000"/>
-                  </a:schemeClr>
-                </a:solidFill>
-              </a:rPr>
-              <a:t>this</a:t>
-            </a:r>
-            <a:endParaRPr lang="pl-PL" sz="1600" b="1" dirty="0">
-              <a:solidFill>
-                <a:schemeClr val="accent4">
-                  <a:lumMod val="50000"/>
-                </a:schemeClr>
-              </a:solidFill>
-            </a:endParaRPr>
-          </a:p>
-        </p:txBody>
-      </p:sp>
-      <p:sp>
-        <p:nvSpPr>
-          <p:cNvPr id="32" name="Prostokąt: zaokrąglone rogi 31">
-            <a:extLst>
-              <a:ext uri="{FF2B5EF4-FFF2-40B4-BE49-F238E27FC236}">
-                <a16:creationId xmlns:a16="http://schemas.microsoft.com/office/drawing/2014/main" id="{8BA4E691-95F5-442B-C265-644671177268}"/>
-              </a:ext>
-            </a:extLst>
-          </p:cNvPr>
-          <p:cNvSpPr/>
-          <p:nvPr/>
-        </p:nvSpPr>
-        <p:spPr>
-          <a:xfrm>
-            <a:off x="5407399" y="1458138"/>
-            <a:ext cx="3264720" cy="788313"/>
-          </a:xfrm>
-          <a:prstGeom prst="roundRect">
-            <a:avLst/>
-          </a:prstGeom>
-          <a:noFill/>
-          <a:ln w="63500"/>
-        </p:spPr>
-        <p:style>
-          <a:lnRef idx="1">
-            <a:schemeClr val="accent1"/>
-          </a:lnRef>
-          <a:fillRef idx="3">
-            <a:schemeClr val="accent1"/>
-          </a:fillRef>
-          <a:effectRef idx="2">
-            <a:schemeClr val="accent1"/>
-          </a:effectRef>
-          <a:fontRef idx="minor">
-            <a:schemeClr val="lt1"/>
-          </a:fontRef>
-        </p:style>
-        <p:txBody>
-          <a:bodyPr rtlCol="0" anchor="ctr"/>
-          <a:lstStyle/>
-          <a:p>
-            <a:pPr algn="ctr"/>
-            <a:endParaRPr lang="pl-PL"/>
-          </a:p>
-        </p:txBody>
-      </p:sp>
-      <p:cxnSp>
-        <p:nvCxnSpPr>
-          <p:cNvPr id="33" name="Łącznik prosty ze strzałką 32">
-            <a:extLst>
-              <a:ext uri="{FF2B5EF4-FFF2-40B4-BE49-F238E27FC236}">
-                <a16:creationId xmlns:a16="http://schemas.microsoft.com/office/drawing/2014/main" id="{6BA2BEB6-FCF8-6921-F50D-B026DBFEA0AB}"/>
-              </a:ext>
-            </a:extLst>
-          </p:cNvPr>
-          <p:cNvCxnSpPr>
-            <a:cxnSpLocks/>
-            <a:stCxn id="32" idx="2"/>
-          </p:cNvCxnSpPr>
-          <p:nvPr/>
-        </p:nvCxnSpPr>
-        <p:spPr>
-          <a:xfrm flipH="1">
-            <a:off x="6304502" y="2246451"/>
-            <a:ext cx="735257" cy="453032"/>
-          </a:xfrm>
-          <a:prstGeom prst="straightConnector1">
-            <a:avLst/>
-          </a:prstGeom>
-          <a:ln w="63500" cap="rnd">
-            <a:prstDash val="solid"/>
-            <a:tailEnd type="triangle"/>
-          </a:ln>
-        </p:spPr>
-        <p:style>
-          <a:lnRef idx="2">
-            <a:schemeClr val="accent1"/>
-          </a:lnRef>
-          <a:fillRef idx="0">
-            <a:schemeClr val="accent1"/>
-          </a:fillRef>
-          <a:effectRef idx="1">
-            <a:schemeClr val="accent1"/>
-          </a:effectRef>
-          <a:fontRef idx="minor">
-            <a:schemeClr val="tx1"/>
-          </a:fontRef>
-        </p:style>
-      </p:cxnSp>
-      <p:cxnSp>
-        <p:nvCxnSpPr>
-          <p:cNvPr id="35" name="Łącznik prosty ze strzałką 34">
-            <a:extLst>
-              <a:ext uri="{FF2B5EF4-FFF2-40B4-BE49-F238E27FC236}">
-                <a16:creationId xmlns:a16="http://schemas.microsoft.com/office/drawing/2014/main" id="{D3F2602F-50D9-EE79-88E3-63541F6D6E2A}"/>
-              </a:ext>
-            </a:extLst>
-          </p:cNvPr>
-          <p:cNvCxnSpPr>
-            <a:cxnSpLocks/>
-            <a:stCxn id="32" idx="2"/>
-          </p:cNvCxnSpPr>
-          <p:nvPr/>
-        </p:nvCxnSpPr>
-        <p:spPr>
-          <a:xfrm flipH="1">
-            <a:off x="6656818" y="2246451"/>
-            <a:ext cx="382941" cy="679548"/>
-          </a:xfrm>
-          <a:prstGeom prst="straightConnector1">
-            <a:avLst/>
-          </a:prstGeom>
-          <a:ln w="63500" cap="rnd">
-            <a:prstDash val="solid"/>
-            <a:tailEnd type="triangle"/>
-          </a:ln>
-        </p:spPr>
-        <p:style>
-          <a:lnRef idx="2">
-            <a:schemeClr val="accent1"/>
-          </a:lnRef>
-          <a:fillRef idx="0">
-            <a:schemeClr val="accent1"/>
-          </a:fillRef>
-          <a:effectRef idx="1">
-            <a:schemeClr val="accent1"/>
-          </a:effectRef>
-          <a:fontRef idx="minor">
-            <a:schemeClr val="tx1"/>
-          </a:fontRef>
-        </p:style>
-      </p:cxnSp>
-      <p:pic>
-        <p:nvPicPr>
-          <p:cNvPr id="41" name="Obraz 40">
-            <a:extLst>
-              <a:ext uri="{FF2B5EF4-FFF2-40B4-BE49-F238E27FC236}">
-                <a16:creationId xmlns:a16="http://schemas.microsoft.com/office/drawing/2014/main" id="{40522CF6-605C-0771-9E00-034CAC805645}"/>
-              </a:ext>
-            </a:extLst>
-          </p:cNvPr>
-          <p:cNvPicPr>
-            <a:picLocks noChangeAspect="1"/>
-          </p:cNvPicPr>
-          <p:nvPr/>
-        </p:nvPicPr>
-        <p:blipFill>
-          <a:blip r:embed="rId5"/>
-          <a:stretch>
-            <a:fillRect/>
-          </a:stretch>
-        </p:blipFill>
-        <p:spPr>
-          <a:xfrm>
-            <a:off x="1278159" y="4508625"/>
-            <a:ext cx="1919742" cy="2116936"/>
-          </a:xfrm>
-          <a:prstGeom prst="rect">
-            <a:avLst/>
-          </a:prstGeom>
-        </p:spPr>
-      </p:pic>
-      <p:sp>
-        <p:nvSpPr>
-          <p:cNvPr id="42" name="Prostokąt: zaokrąglone rogi 41">
-            <a:extLst>
-              <a:ext uri="{FF2B5EF4-FFF2-40B4-BE49-F238E27FC236}">
-                <a16:creationId xmlns:a16="http://schemas.microsoft.com/office/drawing/2014/main" id="{2D3FAD0B-149D-8DC4-EE66-75B7CB568C15}"/>
-              </a:ext>
-            </a:extLst>
-          </p:cNvPr>
-          <p:cNvSpPr/>
-          <p:nvPr/>
-        </p:nvSpPr>
-        <p:spPr>
-          <a:xfrm>
-            <a:off x="1316631" y="4441066"/>
-            <a:ext cx="1919742" cy="2300302"/>
-          </a:xfrm>
-          <a:prstGeom prst="roundRect">
-            <a:avLst/>
-          </a:prstGeom>
-          <a:noFill/>
-          <a:ln w="63500"/>
-        </p:spPr>
-        <p:style>
-          <a:lnRef idx="1">
-            <a:schemeClr val="accent1"/>
-          </a:lnRef>
-          <a:fillRef idx="3">
-            <a:schemeClr val="accent1"/>
-          </a:fillRef>
-          <a:effectRef idx="2">
-            <a:schemeClr val="accent1"/>
-          </a:effectRef>
-          <a:fontRef idx="minor">
-            <a:schemeClr val="lt1"/>
-          </a:fontRef>
-        </p:style>
-        <p:txBody>
-          <a:bodyPr rtlCol="0" anchor="ctr"/>
-          <a:lstStyle/>
-          <a:p>
-            <a:pPr algn="ctr"/>
-            <a:endParaRPr lang="pl-PL" dirty="0"/>
-          </a:p>
-        </p:txBody>
-      </p:sp>
-      <p:pic>
-        <p:nvPicPr>
-          <p:cNvPr id="46" name="Obraz 45">
-            <a:extLst>
-              <a:ext uri="{FF2B5EF4-FFF2-40B4-BE49-F238E27FC236}">
-                <a16:creationId xmlns:a16="http://schemas.microsoft.com/office/drawing/2014/main" id="{C46BEC62-0495-D4FA-EB3A-38B32AA80F35}"/>
-              </a:ext>
-            </a:extLst>
-          </p:cNvPr>
-          <p:cNvPicPr>
-            <a:picLocks noChangeAspect="1"/>
-          </p:cNvPicPr>
-          <p:nvPr/>
-        </p:nvPicPr>
-        <p:blipFill>
-          <a:blip r:embed="rId6"/>
-          <a:stretch>
-            <a:fillRect/>
-          </a:stretch>
-        </p:blipFill>
-        <p:spPr>
-          <a:xfrm>
-            <a:off x="3419872" y="5410691"/>
-            <a:ext cx="5659959" cy="312803"/>
-          </a:xfrm>
-          <a:prstGeom prst="rect">
-            <a:avLst/>
-          </a:prstGeom>
-        </p:spPr>
-      </p:pic>
-      <p:cxnSp>
-        <p:nvCxnSpPr>
-          <p:cNvPr id="43" name="Łącznik prosty ze strzałką 42">
-            <a:extLst>
-              <a:ext uri="{FF2B5EF4-FFF2-40B4-BE49-F238E27FC236}">
-                <a16:creationId xmlns:a16="http://schemas.microsoft.com/office/drawing/2014/main" id="{24AE02EB-F493-507B-26BB-D353B307CADB}"/>
-              </a:ext>
-            </a:extLst>
-          </p:cNvPr>
-          <p:cNvCxnSpPr>
-            <a:cxnSpLocks/>
-          </p:cNvCxnSpPr>
-          <p:nvPr/>
-        </p:nvCxnSpPr>
-        <p:spPr>
-          <a:xfrm flipV="1">
-            <a:off x="2530652" y="5589240"/>
-            <a:ext cx="1105244" cy="885775"/>
-          </a:xfrm>
-          <a:prstGeom prst="straightConnector1">
-            <a:avLst/>
-          </a:prstGeom>
-          <a:ln w="63500" cap="rnd">
-            <a:prstDash val="solid"/>
-            <a:tailEnd type="triangle"/>
-          </a:ln>
-        </p:spPr>
-        <p:style>
-          <a:lnRef idx="2">
-            <a:schemeClr val="accent1"/>
-          </a:lnRef>
-          <a:fillRef idx="0">
-            <a:schemeClr val="accent1"/>
-          </a:fillRef>
-          <a:effectRef idx="1">
-            <a:schemeClr val="accent1"/>
-          </a:effectRef>
-          <a:fontRef idx="minor">
-            <a:schemeClr val="tx1"/>
-          </a:fontRef>
-        </p:style>
-      </p:cxnSp>
-    </p:spTree>
-    <p:extLst>
-      <p:ext uri="{BB962C8B-B14F-4D97-AF65-F5344CB8AC3E}">
-        <p14:creationId xmlns:p14="http://schemas.microsoft.com/office/powerpoint/2010/main" val="4175355490"/>
       </p:ext>
     </p:extLst>
   </p:cSld>
@@ -35933,6 +35283,1019 @@
         <p:cNvPr id="1" name="">
           <a:extLst>
             <a:ext uri="{FF2B5EF4-FFF2-40B4-BE49-F238E27FC236}">
+              <a16:creationId xmlns:a16="http://schemas.microsoft.com/office/drawing/2014/main" id="{6A16B106-E302-3230-B6D8-66FE34A36039}"/>
+            </a:ext>
+          </a:extLst>
+        </p:cNvPr>
+        <p:cNvGrpSpPr/>
+        <p:nvPr/>
+      </p:nvGrpSpPr>
+      <p:grpSpPr>
+        <a:xfrm>
+          <a:off x="0" y="0"/>
+          <a:ext cx="0" cy="0"/>
+          <a:chOff x="0" y="0"/>
+          <a:chExt cx="0" cy="0"/>
+        </a:xfrm>
+      </p:grpSpPr>
+      <p:sp>
+        <p:nvSpPr>
+          <p:cNvPr id="2" name="Rectangle 1">
+            <a:extLst>
+              <a:ext uri="{FF2B5EF4-FFF2-40B4-BE49-F238E27FC236}">
+                <a16:creationId xmlns:a16="http://schemas.microsoft.com/office/drawing/2014/main" id="{9C9A4AE5-D428-878B-B340-1035542714B7}"/>
+              </a:ext>
+            </a:extLst>
+          </p:cNvPr>
+          <p:cNvSpPr/>
+          <p:nvPr/>
+        </p:nvSpPr>
+        <p:spPr>
+          <a:xfrm>
+            <a:off x="1979712" y="188640"/>
+            <a:ext cx="6696744" cy="492443"/>
+          </a:xfrm>
+          <a:prstGeom prst="rect">
+            <a:avLst/>
+          </a:prstGeom>
+        </p:spPr>
+        <p:txBody>
+          <a:bodyPr wrap="square">
+            <a:spAutoFit/>
+          </a:bodyPr>
+          <a:lstStyle/>
+          <a:p>
+            <a:pPr algn="ctr"/>
+            <a:r>
+              <a:rPr lang="pl-PL" sz="2600" dirty="0">
+                <a:solidFill>
+                  <a:schemeClr val="bg1"/>
+                </a:solidFill>
+                <a:latin typeface="Verdana" panose="020B0604030504040204" pitchFamily="34" charset="0"/>
+                <a:ea typeface="Verdana" panose="020B0604030504040204" pitchFamily="34" charset="0"/>
+                <a:cs typeface="Verdana" panose="020B0604030504040204" pitchFamily="34" charset="0"/>
+              </a:rPr>
+              <a:t>Klasy abstrakcyjne vs interfejsy</a:t>
+            </a:r>
+          </a:p>
+        </p:txBody>
+      </p:sp>
+      <p:sp>
+        <p:nvSpPr>
+          <p:cNvPr id="3" name="pole tekstowe 2">
+            <a:extLst>
+              <a:ext uri="{FF2B5EF4-FFF2-40B4-BE49-F238E27FC236}">
+                <a16:creationId xmlns:a16="http://schemas.microsoft.com/office/drawing/2014/main" id="{F50B9DB7-D087-4A66-2308-B67B5BA9C33E}"/>
+              </a:ext>
+            </a:extLst>
+          </p:cNvPr>
+          <p:cNvSpPr txBox="1"/>
+          <p:nvPr/>
+        </p:nvSpPr>
+        <p:spPr>
+          <a:xfrm>
+            <a:off x="1043608" y="836712"/>
+            <a:ext cx="8100392" cy="584775"/>
+          </a:xfrm>
+          <a:prstGeom prst="rect">
+            <a:avLst/>
+          </a:prstGeom>
+          <a:noFill/>
+        </p:spPr>
+        <p:txBody>
+          <a:bodyPr wrap="square" rtlCol="0">
+            <a:spAutoFit/>
+          </a:bodyPr>
+          <a:lstStyle/>
+          <a:p>
+            <a:r>
+              <a:rPr lang="pl-PL" sz="1600" dirty="0"/>
+              <a:t>interfejs </a:t>
+            </a:r>
+            <a:r>
+              <a:rPr lang="pl-PL" sz="1600" b="1" dirty="0"/>
+              <a:t>nie może przechowywać stanu </a:t>
+            </a:r>
+            <a:r>
+              <a:rPr lang="pl-PL" sz="1600" dirty="0"/>
+              <a:t>- za wyjątkiem przypadku kiedy może to zrobić (</a:t>
+            </a:r>
+            <a:r>
+              <a:rPr lang="pl-PL" sz="1600" b="1" dirty="0"/>
+              <a:t>zła praktyka</a:t>
+            </a:r>
+            <a:r>
+              <a:rPr lang="pl-PL" sz="1600" dirty="0"/>
+              <a:t>) - przykładowo w </a:t>
+            </a:r>
+            <a:r>
+              <a:rPr lang="pl-PL" sz="1600" b="1" dirty="0" err="1"/>
+              <a:t>companion</a:t>
+            </a:r>
+            <a:r>
+              <a:rPr lang="pl-PL" sz="1600" b="1" dirty="0"/>
+              <a:t> </a:t>
+            </a:r>
+            <a:r>
+              <a:rPr lang="pl-PL" sz="1600" b="1" dirty="0" err="1"/>
+              <a:t>object</a:t>
+            </a:r>
+            <a:endParaRPr lang="pl-PL" sz="1400" b="1" dirty="0"/>
+          </a:p>
+        </p:txBody>
+      </p:sp>
+      <p:pic>
+        <p:nvPicPr>
+          <p:cNvPr id="6" name="Obraz 5">
+            <a:extLst>
+              <a:ext uri="{FF2B5EF4-FFF2-40B4-BE49-F238E27FC236}">
+                <a16:creationId xmlns:a16="http://schemas.microsoft.com/office/drawing/2014/main" id="{E27FAF2F-A285-82CA-1C5F-CC8C732CC496}"/>
+              </a:ext>
+            </a:extLst>
+          </p:cNvPr>
+          <p:cNvPicPr>
+            <a:picLocks noChangeAspect="1"/>
+          </p:cNvPicPr>
+          <p:nvPr/>
+        </p:nvPicPr>
+        <p:blipFill>
+          <a:blip r:embed="rId4"/>
+          <a:stretch>
+            <a:fillRect/>
+          </a:stretch>
+        </p:blipFill>
+        <p:spPr>
+          <a:xfrm>
+            <a:off x="3997672" y="2132856"/>
+            <a:ext cx="4234086" cy="2110942"/>
+          </a:xfrm>
+          <a:prstGeom prst="rect">
+            <a:avLst/>
+          </a:prstGeom>
+        </p:spPr>
+      </p:pic>
+      <p:cxnSp>
+        <p:nvCxnSpPr>
+          <p:cNvPr id="8" name="Łącznik prosty ze strzałką 7">
+            <a:extLst>
+              <a:ext uri="{FF2B5EF4-FFF2-40B4-BE49-F238E27FC236}">
+                <a16:creationId xmlns:a16="http://schemas.microsoft.com/office/drawing/2014/main" id="{7B8B3592-1434-A652-4016-114F67C8DBCE}"/>
+              </a:ext>
+            </a:extLst>
+          </p:cNvPr>
+          <p:cNvCxnSpPr>
+            <a:cxnSpLocks/>
+            <a:stCxn id="12" idx="3"/>
+          </p:cNvCxnSpPr>
+          <p:nvPr/>
+        </p:nvCxnSpPr>
+        <p:spPr>
+          <a:xfrm>
+            <a:off x="3557311" y="1954064"/>
+            <a:ext cx="1144983" cy="610840"/>
+          </a:xfrm>
+          <a:prstGeom prst="straightConnector1">
+            <a:avLst/>
+          </a:prstGeom>
+          <a:ln w="63500" cap="rnd">
+            <a:prstDash val="solid"/>
+            <a:tailEnd type="triangle"/>
+          </a:ln>
+        </p:spPr>
+        <p:style>
+          <a:lnRef idx="2">
+            <a:schemeClr val="accent1"/>
+          </a:lnRef>
+          <a:fillRef idx="0">
+            <a:schemeClr val="accent1"/>
+          </a:fillRef>
+          <a:effectRef idx="1">
+            <a:schemeClr val="accent1"/>
+          </a:effectRef>
+          <a:fontRef idx="minor">
+            <a:schemeClr val="tx1"/>
+          </a:fontRef>
+        </p:style>
+      </p:cxnSp>
+      <p:sp>
+        <p:nvSpPr>
+          <p:cNvPr id="11" name="pole tekstowe 10">
+            <a:extLst>
+              <a:ext uri="{FF2B5EF4-FFF2-40B4-BE49-F238E27FC236}">
+                <a16:creationId xmlns:a16="http://schemas.microsoft.com/office/drawing/2014/main" id="{FC48D29D-9221-0064-0A5A-4B800762BF49}"/>
+              </a:ext>
+            </a:extLst>
+          </p:cNvPr>
+          <p:cNvSpPr txBox="1"/>
+          <p:nvPr/>
+        </p:nvSpPr>
+        <p:spPr>
+          <a:xfrm>
+            <a:off x="1114765" y="1661676"/>
+            <a:ext cx="2442546" cy="584775"/>
+          </a:xfrm>
+          <a:prstGeom prst="rect">
+            <a:avLst/>
+          </a:prstGeom>
+          <a:noFill/>
+        </p:spPr>
+        <p:txBody>
+          <a:bodyPr wrap="square" rtlCol="0">
+            <a:spAutoFit/>
+          </a:bodyPr>
+          <a:lstStyle/>
+          <a:p>
+            <a:pPr algn="just"/>
+            <a:r>
+              <a:rPr lang="pl-PL" sz="1600" dirty="0">
+                <a:solidFill>
+                  <a:schemeClr val="accent4">
+                    <a:lumMod val="50000"/>
+                  </a:schemeClr>
+                </a:solidFill>
+              </a:rPr>
+              <a:t>Właściwość z </a:t>
+            </a:r>
+            <a:r>
+              <a:rPr lang="pl-PL" sz="1600" b="1" dirty="0">
+                <a:solidFill>
+                  <a:schemeClr val="accent4">
+                    <a:lumMod val="50000"/>
+                  </a:schemeClr>
+                </a:solidFill>
+              </a:rPr>
+              <a:t>getterem</a:t>
+            </a:r>
+            <a:r>
+              <a:rPr lang="pl-PL" sz="1600" dirty="0">
+                <a:solidFill>
+                  <a:schemeClr val="accent4">
+                    <a:lumMod val="50000"/>
+                  </a:schemeClr>
+                </a:solidFill>
+              </a:rPr>
+              <a:t> i </a:t>
+            </a:r>
+            <a:r>
+              <a:rPr lang="pl-PL" sz="1600" b="1" dirty="0" err="1">
+                <a:solidFill>
+                  <a:schemeClr val="accent4">
+                    <a:lumMod val="50000"/>
+                  </a:schemeClr>
+                </a:solidFill>
+              </a:rPr>
+              <a:t>setterem</a:t>
+            </a:r>
+            <a:endParaRPr lang="pl-PL" sz="1600" b="1" dirty="0">
+              <a:solidFill>
+                <a:schemeClr val="accent4">
+                  <a:lumMod val="50000"/>
+                </a:schemeClr>
+              </a:solidFill>
+            </a:endParaRPr>
+          </a:p>
+        </p:txBody>
+      </p:sp>
+      <p:sp>
+        <p:nvSpPr>
+          <p:cNvPr id="12" name="Prostokąt: zaokrąglone rogi 11">
+            <a:extLst>
+              <a:ext uri="{FF2B5EF4-FFF2-40B4-BE49-F238E27FC236}">
+                <a16:creationId xmlns:a16="http://schemas.microsoft.com/office/drawing/2014/main" id="{1D1827F5-9F5A-9CA8-7382-D19AB3675B96}"/>
+              </a:ext>
+            </a:extLst>
+          </p:cNvPr>
+          <p:cNvSpPr/>
+          <p:nvPr/>
+        </p:nvSpPr>
+        <p:spPr>
+          <a:xfrm>
+            <a:off x="1109039" y="1661676"/>
+            <a:ext cx="2448272" cy="584775"/>
+          </a:xfrm>
+          <a:prstGeom prst="roundRect">
+            <a:avLst/>
+          </a:prstGeom>
+          <a:noFill/>
+          <a:ln w="63500"/>
+        </p:spPr>
+        <p:style>
+          <a:lnRef idx="1">
+            <a:schemeClr val="accent1"/>
+          </a:lnRef>
+          <a:fillRef idx="3">
+            <a:schemeClr val="accent1"/>
+          </a:fillRef>
+          <a:effectRef idx="2">
+            <a:schemeClr val="accent1"/>
+          </a:effectRef>
+          <a:fontRef idx="minor">
+            <a:schemeClr val="lt1"/>
+          </a:fontRef>
+        </p:style>
+        <p:txBody>
+          <a:bodyPr rtlCol="0" anchor="ctr"/>
+          <a:lstStyle/>
+          <a:p>
+            <a:pPr algn="ctr"/>
+            <a:endParaRPr lang="pl-PL"/>
+          </a:p>
+        </p:txBody>
+      </p:sp>
+      <p:sp>
+        <p:nvSpPr>
+          <p:cNvPr id="13" name="pole tekstowe 12">
+            <a:extLst>
+              <a:ext uri="{FF2B5EF4-FFF2-40B4-BE49-F238E27FC236}">
+                <a16:creationId xmlns:a16="http://schemas.microsoft.com/office/drawing/2014/main" id="{BEACD46E-EE91-35ED-6F88-24EBED5683EF}"/>
+              </a:ext>
+            </a:extLst>
+          </p:cNvPr>
+          <p:cNvSpPr txBox="1"/>
+          <p:nvPr/>
+        </p:nvSpPr>
+        <p:spPr>
+          <a:xfrm>
+            <a:off x="1283839" y="2564905"/>
+            <a:ext cx="2442546" cy="338554"/>
+          </a:xfrm>
+          <a:prstGeom prst="rect">
+            <a:avLst/>
+          </a:prstGeom>
+          <a:noFill/>
+        </p:spPr>
+        <p:txBody>
+          <a:bodyPr wrap="square" rtlCol="0">
+            <a:spAutoFit/>
+          </a:bodyPr>
+          <a:lstStyle/>
+          <a:p>
+            <a:pPr algn="just"/>
+            <a:r>
+              <a:rPr lang="pl-PL" sz="1600" b="1" dirty="0">
+                <a:solidFill>
+                  <a:schemeClr val="accent4">
+                    <a:lumMod val="50000"/>
+                  </a:schemeClr>
+                </a:solidFill>
+              </a:rPr>
+              <a:t>Obiekt stowarzyszony</a:t>
+            </a:r>
+          </a:p>
+        </p:txBody>
+      </p:sp>
+      <p:cxnSp>
+        <p:nvCxnSpPr>
+          <p:cNvPr id="15" name="Łącznik prosty ze strzałką 14">
+            <a:extLst>
+              <a:ext uri="{FF2B5EF4-FFF2-40B4-BE49-F238E27FC236}">
+                <a16:creationId xmlns:a16="http://schemas.microsoft.com/office/drawing/2014/main" id="{F175CE13-00D1-0060-E843-F67C5287C1AB}"/>
+              </a:ext>
+            </a:extLst>
+          </p:cNvPr>
+          <p:cNvCxnSpPr>
+            <a:cxnSpLocks/>
+            <a:stCxn id="14" idx="3"/>
+          </p:cNvCxnSpPr>
+          <p:nvPr/>
+        </p:nvCxnSpPr>
+        <p:spPr>
+          <a:xfrm>
+            <a:off x="3548879" y="2734182"/>
+            <a:ext cx="1153415" cy="639016"/>
+          </a:xfrm>
+          <a:prstGeom prst="straightConnector1">
+            <a:avLst/>
+          </a:prstGeom>
+          <a:ln w="63500" cap="rnd">
+            <a:prstDash val="solid"/>
+            <a:tailEnd type="triangle"/>
+          </a:ln>
+        </p:spPr>
+        <p:style>
+          <a:lnRef idx="2">
+            <a:schemeClr val="accent1"/>
+          </a:lnRef>
+          <a:fillRef idx="0">
+            <a:schemeClr val="accent1"/>
+          </a:fillRef>
+          <a:effectRef idx="1">
+            <a:schemeClr val="accent1"/>
+          </a:effectRef>
+          <a:fontRef idx="minor">
+            <a:schemeClr val="tx1"/>
+          </a:fontRef>
+        </p:style>
+      </p:cxnSp>
+      <p:sp>
+        <p:nvSpPr>
+          <p:cNvPr id="14" name="Prostokąt: zaokrąglone rogi 13">
+            <a:extLst>
+              <a:ext uri="{FF2B5EF4-FFF2-40B4-BE49-F238E27FC236}">
+                <a16:creationId xmlns:a16="http://schemas.microsoft.com/office/drawing/2014/main" id="{720AD29B-016D-7A6B-1A49-6FB01AA2320D}"/>
+              </a:ext>
+            </a:extLst>
+          </p:cNvPr>
+          <p:cNvSpPr/>
+          <p:nvPr/>
+        </p:nvSpPr>
+        <p:spPr>
+          <a:xfrm>
+            <a:off x="1316631" y="2564904"/>
+            <a:ext cx="2232248" cy="338555"/>
+          </a:xfrm>
+          <a:prstGeom prst="roundRect">
+            <a:avLst/>
+          </a:prstGeom>
+          <a:noFill/>
+          <a:ln w="63500"/>
+        </p:spPr>
+        <p:style>
+          <a:lnRef idx="1">
+            <a:schemeClr val="accent1"/>
+          </a:lnRef>
+          <a:fillRef idx="3">
+            <a:schemeClr val="accent1"/>
+          </a:fillRef>
+          <a:effectRef idx="2">
+            <a:schemeClr val="accent1"/>
+          </a:effectRef>
+          <a:fontRef idx="minor">
+            <a:schemeClr val="lt1"/>
+          </a:fontRef>
+        </p:style>
+        <p:txBody>
+          <a:bodyPr rtlCol="0" anchor="ctr"/>
+          <a:lstStyle/>
+          <a:p>
+            <a:pPr algn="ctr"/>
+            <a:endParaRPr lang="pl-PL"/>
+          </a:p>
+        </p:txBody>
+      </p:sp>
+      <p:sp>
+        <p:nvSpPr>
+          <p:cNvPr id="19" name="pole tekstowe 18">
+            <a:extLst>
+              <a:ext uri="{FF2B5EF4-FFF2-40B4-BE49-F238E27FC236}">
+                <a16:creationId xmlns:a16="http://schemas.microsoft.com/office/drawing/2014/main" id="{A8CE5F01-387D-2094-87F1-ED7620BD8CDB}"/>
+              </a:ext>
+            </a:extLst>
+          </p:cNvPr>
+          <p:cNvSpPr txBox="1"/>
+          <p:nvPr/>
+        </p:nvSpPr>
+        <p:spPr>
+          <a:xfrm>
+            <a:off x="1109039" y="3302665"/>
+            <a:ext cx="3055392" cy="830997"/>
+          </a:xfrm>
+          <a:prstGeom prst="rect">
+            <a:avLst/>
+          </a:prstGeom>
+          <a:noFill/>
+        </p:spPr>
+        <p:txBody>
+          <a:bodyPr wrap="square" rtlCol="0">
+            <a:spAutoFit/>
+          </a:bodyPr>
+          <a:lstStyle/>
+          <a:p>
+            <a:pPr algn="just"/>
+            <a:r>
+              <a:rPr lang="pl-PL" sz="1600" b="1" dirty="0">
+                <a:solidFill>
+                  <a:schemeClr val="accent4">
+                    <a:lumMod val="50000"/>
+                  </a:schemeClr>
+                </a:solidFill>
+              </a:rPr>
+              <a:t>Mapa</a:t>
+            </a:r>
+            <a:r>
+              <a:rPr lang="pl-PL" sz="1600" dirty="0">
+                <a:solidFill>
+                  <a:schemeClr val="accent4">
+                    <a:lumMod val="50000"/>
+                  </a:schemeClr>
+                </a:solidFill>
+              </a:rPr>
+              <a:t> </a:t>
+            </a:r>
+            <a:r>
+              <a:rPr lang="pl-PL" sz="1600" dirty="0" err="1">
+                <a:solidFill>
+                  <a:schemeClr val="accent4">
+                    <a:lumMod val="50000"/>
+                  </a:schemeClr>
+                </a:solidFill>
+              </a:rPr>
+              <a:t>przechwująca</a:t>
+            </a:r>
+            <a:r>
+              <a:rPr lang="pl-PL" sz="1600" dirty="0">
+                <a:solidFill>
+                  <a:schemeClr val="accent4">
+                    <a:lumMod val="50000"/>
+                  </a:schemeClr>
+                </a:solidFill>
+              </a:rPr>
+              <a:t> referencje do </a:t>
+            </a:r>
+            <a:r>
+              <a:rPr lang="pl-PL" sz="1600" b="1" dirty="0">
+                <a:solidFill>
+                  <a:schemeClr val="accent4">
+                    <a:lumMod val="50000"/>
+                  </a:schemeClr>
+                </a:solidFill>
+              </a:rPr>
+              <a:t>wszystkich obiektów o typie interfejsu</a:t>
+            </a:r>
+          </a:p>
+        </p:txBody>
+      </p:sp>
+      <p:cxnSp>
+        <p:nvCxnSpPr>
+          <p:cNvPr id="21" name="Łącznik prosty ze strzałką 20">
+            <a:extLst>
+              <a:ext uri="{FF2B5EF4-FFF2-40B4-BE49-F238E27FC236}">
+                <a16:creationId xmlns:a16="http://schemas.microsoft.com/office/drawing/2014/main" id="{659182E7-00F8-AD8E-3354-2FAC1B213E82}"/>
+              </a:ext>
+            </a:extLst>
+          </p:cNvPr>
+          <p:cNvCxnSpPr>
+            <a:cxnSpLocks/>
+            <a:stCxn id="20" idx="3"/>
+          </p:cNvCxnSpPr>
+          <p:nvPr/>
+        </p:nvCxnSpPr>
+        <p:spPr>
+          <a:xfrm flipV="1">
+            <a:off x="4205383" y="3698758"/>
+            <a:ext cx="733236" cy="21679"/>
+          </a:xfrm>
+          <a:prstGeom prst="straightConnector1">
+            <a:avLst/>
+          </a:prstGeom>
+          <a:ln w="63500" cap="rnd">
+            <a:prstDash val="solid"/>
+            <a:tailEnd type="triangle"/>
+          </a:ln>
+        </p:spPr>
+        <p:style>
+          <a:lnRef idx="2">
+            <a:schemeClr val="accent1"/>
+          </a:lnRef>
+          <a:fillRef idx="0">
+            <a:schemeClr val="accent1"/>
+          </a:fillRef>
+          <a:effectRef idx="1">
+            <a:schemeClr val="accent1"/>
+          </a:effectRef>
+          <a:fontRef idx="minor">
+            <a:schemeClr val="tx1"/>
+          </a:fontRef>
+        </p:style>
+      </p:cxnSp>
+      <p:sp>
+        <p:nvSpPr>
+          <p:cNvPr id="20" name="Prostokąt: zaokrąglone rogi 19">
+            <a:extLst>
+              <a:ext uri="{FF2B5EF4-FFF2-40B4-BE49-F238E27FC236}">
+                <a16:creationId xmlns:a16="http://schemas.microsoft.com/office/drawing/2014/main" id="{CD7D9F1A-17BF-45A9-C94E-4BD512AE650F}"/>
+              </a:ext>
+            </a:extLst>
+          </p:cNvPr>
+          <p:cNvSpPr/>
+          <p:nvPr/>
+        </p:nvSpPr>
+        <p:spPr>
+          <a:xfrm>
+            <a:off x="1109039" y="3307212"/>
+            <a:ext cx="3096344" cy="826450"/>
+          </a:xfrm>
+          <a:prstGeom prst="roundRect">
+            <a:avLst/>
+          </a:prstGeom>
+          <a:noFill/>
+          <a:ln w="63500"/>
+        </p:spPr>
+        <p:style>
+          <a:lnRef idx="1">
+            <a:schemeClr val="accent1"/>
+          </a:lnRef>
+          <a:fillRef idx="3">
+            <a:schemeClr val="accent1"/>
+          </a:fillRef>
+          <a:effectRef idx="2">
+            <a:schemeClr val="accent1"/>
+          </a:effectRef>
+          <a:fontRef idx="minor">
+            <a:schemeClr val="lt1"/>
+          </a:fontRef>
+        </p:style>
+        <p:txBody>
+          <a:bodyPr rtlCol="0" anchor="ctr"/>
+          <a:lstStyle/>
+          <a:p>
+            <a:pPr algn="ctr"/>
+            <a:endParaRPr lang="pl-PL" dirty="0"/>
+          </a:p>
+        </p:txBody>
+      </p:sp>
+      <p:sp>
+        <p:nvSpPr>
+          <p:cNvPr id="31" name="pole tekstowe 30">
+            <a:extLst>
+              <a:ext uri="{FF2B5EF4-FFF2-40B4-BE49-F238E27FC236}">
+                <a16:creationId xmlns:a16="http://schemas.microsoft.com/office/drawing/2014/main" id="{5F3F42A9-ECEF-FBBE-8E62-A1697846D2B1}"/>
+              </a:ext>
+            </a:extLst>
+          </p:cNvPr>
+          <p:cNvSpPr txBox="1"/>
+          <p:nvPr/>
+        </p:nvSpPr>
+        <p:spPr>
+          <a:xfrm>
+            <a:off x="5407399" y="1421487"/>
+            <a:ext cx="3273152" cy="830997"/>
+          </a:xfrm>
+          <a:prstGeom prst="rect">
+            <a:avLst/>
+          </a:prstGeom>
+          <a:noFill/>
+        </p:spPr>
+        <p:txBody>
+          <a:bodyPr wrap="square" rtlCol="0">
+            <a:spAutoFit/>
+          </a:bodyPr>
+          <a:lstStyle/>
+          <a:p>
+            <a:pPr algn="just"/>
+            <a:r>
+              <a:rPr lang="pl-PL" sz="1600" dirty="0">
+                <a:solidFill>
+                  <a:schemeClr val="accent4">
+                    <a:lumMod val="50000"/>
+                  </a:schemeClr>
+                </a:solidFill>
+              </a:rPr>
+              <a:t>Możemy odwołać się do </a:t>
+            </a:r>
+            <a:r>
+              <a:rPr lang="pl-PL" sz="1600" b="1" dirty="0">
+                <a:solidFill>
+                  <a:schemeClr val="accent4">
+                    <a:lumMod val="50000"/>
+                  </a:schemeClr>
+                </a:solidFill>
+              </a:rPr>
+              <a:t>instancji klasy implementującej </a:t>
+            </a:r>
+            <a:r>
+              <a:rPr lang="pl-PL" sz="1600" dirty="0">
+                <a:solidFill>
+                  <a:schemeClr val="accent4">
+                    <a:lumMod val="50000"/>
+                  </a:schemeClr>
+                </a:solidFill>
+              </a:rPr>
+              <a:t>przez słowo kluczowe </a:t>
+            </a:r>
+            <a:r>
+              <a:rPr lang="pl-PL" sz="1600" b="1" dirty="0" err="1">
+                <a:solidFill>
+                  <a:schemeClr val="accent4">
+                    <a:lumMod val="50000"/>
+                  </a:schemeClr>
+                </a:solidFill>
+              </a:rPr>
+              <a:t>this</a:t>
+            </a:r>
+            <a:endParaRPr lang="pl-PL" sz="1600" b="1" dirty="0">
+              <a:solidFill>
+                <a:schemeClr val="accent4">
+                  <a:lumMod val="50000"/>
+                </a:schemeClr>
+              </a:solidFill>
+            </a:endParaRPr>
+          </a:p>
+        </p:txBody>
+      </p:sp>
+      <p:sp>
+        <p:nvSpPr>
+          <p:cNvPr id="32" name="Prostokąt: zaokrąglone rogi 31">
+            <a:extLst>
+              <a:ext uri="{FF2B5EF4-FFF2-40B4-BE49-F238E27FC236}">
+                <a16:creationId xmlns:a16="http://schemas.microsoft.com/office/drawing/2014/main" id="{8BA4E691-95F5-442B-C265-644671177268}"/>
+              </a:ext>
+            </a:extLst>
+          </p:cNvPr>
+          <p:cNvSpPr/>
+          <p:nvPr/>
+        </p:nvSpPr>
+        <p:spPr>
+          <a:xfrm>
+            <a:off x="5407399" y="1458138"/>
+            <a:ext cx="3264720" cy="788313"/>
+          </a:xfrm>
+          <a:prstGeom prst="roundRect">
+            <a:avLst/>
+          </a:prstGeom>
+          <a:noFill/>
+          <a:ln w="63500"/>
+        </p:spPr>
+        <p:style>
+          <a:lnRef idx="1">
+            <a:schemeClr val="accent1"/>
+          </a:lnRef>
+          <a:fillRef idx="3">
+            <a:schemeClr val="accent1"/>
+          </a:fillRef>
+          <a:effectRef idx="2">
+            <a:schemeClr val="accent1"/>
+          </a:effectRef>
+          <a:fontRef idx="minor">
+            <a:schemeClr val="lt1"/>
+          </a:fontRef>
+        </p:style>
+        <p:txBody>
+          <a:bodyPr rtlCol="0" anchor="ctr"/>
+          <a:lstStyle/>
+          <a:p>
+            <a:pPr algn="ctr"/>
+            <a:endParaRPr lang="pl-PL"/>
+          </a:p>
+        </p:txBody>
+      </p:sp>
+      <p:cxnSp>
+        <p:nvCxnSpPr>
+          <p:cNvPr id="33" name="Łącznik prosty ze strzałką 32">
+            <a:extLst>
+              <a:ext uri="{FF2B5EF4-FFF2-40B4-BE49-F238E27FC236}">
+                <a16:creationId xmlns:a16="http://schemas.microsoft.com/office/drawing/2014/main" id="{6BA2BEB6-FCF8-6921-F50D-B026DBFEA0AB}"/>
+              </a:ext>
+            </a:extLst>
+          </p:cNvPr>
+          <p:cNvCxnSpPr>
+            <a:cxnSpLocks/>
+            <a:stCxn id="32" idx="2"/>
+          </p:cNvCxnSpPr>
+          <p:nvPr/>
+        </p:nvCxnSpPr>
+        <p:spPr>
+          <a:xfrm flipH="1">
+            <a:off x="6304502" y="2246451"/>
+            <a:ext cx="735257" cy="453032"/>
+          </a:xfrm>
+          <a:prstGeom prst="straightConnector1">
+            <a:avLst/>
+          </a:prstGeom>
+          <a:ln w="63500" cap="rnd">
+            <a:prstDash val="solid"/>
+            <a:tailEnd type="triangle"/>
+          </a:ln>
+        </p:spPr>
+        <p:style>
+          <a:lnRef idx="2">
+            <a:schemeClr val="accent1"/>
+          </a:lnRef>
+          <a:fillRef idx="0">
+            <a:schemeClr val="accent1"/>
+          </a:fillRef>
+          <a:effectRef idx="1">
+            <a:schemeClr val="accent1"/>
+          </a:effectRef>
+          <a:fontRef idx="minor">
+            <a:schemeClr val="tx1"/>
+          </a:fontRef>
+        </p:style>
+      </p:cxnSp>
+      <p:cxnSp>
+        <p:nvCxnSpPr>
+          <p:cNvPr id="35" name="Łącznik prosty ze strzałką 34">
+            <a:extLst>
+              <a:ext uri="{FF2B5EF4-FFF2-40B4-BE49-F238E27FC236}">
+                <a16:creationId xmlns:a16="http://schemas.microsoft.com/office/drawing/2014/main" id="{D3F2602F-50D9-EE79-88E3-63541F6D6E2A}"/>
+              </a:ext>
+            </a:extLst>
+          </p:cNvPr>
+          <p:cNvCxnSpPr>
+            <a:cxnSpLocks/>
+            <a:stCxn id="32" idx="2"/>
+          </p:cNvCxnSpPr>
+          <p:nvPr/>
+        </p:nvCxnSpPr>
+        <p:spPr>
+          <a:xfrm flipH="1">
+            <a:off x="6656818" y="2246451"/>
+            <a:ext cx="382941" cy="679548"/>
+          </a:xfrm>
+          <a:prstGeom prst="straightConnector1">
+            <a:avLst/>
+          </a:prstGeom>
+          <a:ln w="63500" cap="rnd">
+            <a:prstDash val="solid"/>
+            <a:tailEnd type="triangle"/>
+          </a:ln>
+        </p:spPr>
+        <p:style>
+          <a:lnRef idx="2">
+            <a:schemeClr val="accent1"/>
+          </a:lnRef>
+          <a:fillRef idx="0">
+            <a:schemeClr val="accent1"/>
+          </a:fillRef>
+          <a:effectRef idx="1">
+            <a:schemeClr val="accent1"/>
+          </a:effectRef>
+          <a:fontRef idx="minor">
+            <a:schemeClr val="tx1"/>
+          </a:fontRef>
+        </p:style>
+      </p:cxnSp>
+      <p:pic>
+        <p:nvPicPr>
+          <p:cNvPr id="41" name="Obraz 40">
+            <a:extLst>
+              <a:ext uri="{FF2B5EF4-FFF2-40B4-BE49-F238E27FC236}">
+                <a16:creationId xmlns:a16="http://schemas.microsoft.com/office/drawing/2014/main" id="{40522CF6-605C-0771-9E00-034CAC805645}"/>
+              </a:ext>
+            </a:extLst>
+          </p:cNvPr>
+          <p:cNvPicPr>
+            <a:picLocks noChangeAspect="1"/>
+          </p:cNvPicPr>
+          <p:nvPr/>
+        </p:nvPicPr>
+        <p:blipFill>
+          <a:blip r:embed="rId5"/>
+          <a:stretch>
+            <a:fillRect/>
+          </a:stretch>
+        </p:blipFill>
+        <p:spPr>
+          <a:xfrm>
+            <a:off x="1278159" y="4508625"/>
+            <a:ext cx="1919742" cy="2116936"/>
+          </a:xfrm>
+          <a:prstGeom prst="rect">
+            <a:avLst/>
+          </a:prstGeom>
+        </p:spPr>
+      </p:pic>
+      <p:sp>
+        <p:nvSpPr>
+          <p:cNvPr id="42" name="Prostokąt: zaokrąglone rogi 41">
+            <a:extLst>
+              <a:ext uri="{FF2B5EF4-FFF2-40B4-BE49-F238E27FC236}">
+                <a16:creationId xmlns:a16="http://schemas.microsoft.com/office/drawing/2014/main" id="{2D3FAD0B-149D-8DC4-EE66-75B7CB568C15}"/>
+              </a:ext>
+            </a:extLst>
+          </p:cNvPr>
+          <p:cNvSpPr/>
+          <p:nvPr/>
+        </p:nvSpPr>
+        <p:spPr>
+          <a:xfrm>
+            <a:off x="1316631" y="4441066"/>
+            <a:ext cx="1919742" cy="2300302"/>
+          </a:xfrm>
+          <a:prstGeom prst="roundRect">
+            <a:avLst/>
+          </a:prstGeom>
+          <a:noFill/>
+          <a:ln w="63500"/>
+        </p:spPr>
+        <p:style>
+          <a:lnRef idx="1">
+            <a:schemeClr val="accent1"/>
+          </a:lnRef>
+          <a:fillRef idx="3">
+            <a:schemeClr val="accent1"/>
+          </a:fillRef>
+          <a:effectRef idx="2">
+            <a:schemeClr val="accent1"/>
+          </a:effectRef>
+          <a:fontRef idx="minor">
+            <a:schemeClr val="lt1"/>
+          </a:fontRef>
+        </p:style>
+        <p:txBody>
+          <a:bodyPr rtlCol="0" anchor="ctr"/>
+          <a:lstStyle/>
+          <a:p>
+            <a:pPr algn="ctr"/>
+            <a:endParaRPr lang="pl-PL" dirty="0"/>
+          </a:p>
+        </p:txBody>
+      </p:sp>
+      <p:pic>
+        <p:nvPicPr>
+          <p:cNvPr id="46" name="Obraz 45">
+            <a:extLst>
+              <a:ext uri="{FF2B5EF4-FFF2-40B4-BE49-F238E27FC236}">
+                <a16:creationId xmlns:a16="http://schemas.microsoft.com/office/drawing/2014/main" id="{C46BEC62-0495-D4FA-EB3A-38B32AA80F35}"/>
+              </a:ext>
+            </a:extLst>
+          </p:cNvPr>
+          <p:cNvPicPr>
+            <a:picLocks noChangeAspect="1"/>
+          </p:cNvPicPr>
+          <p:nvPr/>
+        </p:nvPicPr>
+        <p:blipFill>
+          <a:blip r:embed="rId6"/>
+          <a:stretch>
+            <a:fillRect/>
+          </a:stretch>
+        </p:blipFill>
+        <p:spPr>
+          <a:xfrm>
+            <a:off x="3419872" y="5410691"/>
+            <a:ext cx="5659959" cy="312803"/>
+          </a:xfrm>
+          <a:prstGeom prst="rect">
+            <a:avLst/>
+          </a:prstGeom>
+        </p:spPr>
+      </p:pic>
+      <p:cxnSp>
+        <p:nvCxnSpPr>
+          <p:cNvPr id="43" name="Łącznik prosty ze strzałką 42">
+            <a:extLst>
+              <a:ext uri="{FF2B5EF4-FFF2-40B4-BE49-F238E27FC236}">
+                <a16:creationId xmlns:a16="http://schemas.microsoft.com/office/drawing/2014/main" id="{24AE02EB-F493-507B-26BB-D353B307CADB}"/>
+              </a:ext>
+            </a:extLst>
+          </p:cNvPr>
+          <p:cNvCxnSpPr>
+            <a:cxnSpLocks/>
+          </p:cNvCxnSpPr>
+          <p:nvPr/>
+        </p:nvCxnSpPr>
+        <p:spPr>
+          <a:xfrm flipV="1">
+            <a:off x="2530652" y="5589240"/>
+            <a:ext cx="1105244" cy="885775"/>
+          </a:xfrm>
+          <a:prstGeom prst="straightConnector1">
+            <a:avLst/>
+          </a:prstGeom>
+          <a:ln w="63500" cap="rnd">
+            <a:prstDash val="solid"/>
+            <a:tailEnd type="triangle"/>
+          </a:ln>
+        </p:spPr>
+        <p:style>
+          <a:lnRef idx="2">
+            <a:schemeClr val="accent1"/>
+          </a:lnRef>
+          <a:fillRef idx="0">
+            <a:schemeClr val="accent1"/>
+          </a:fillRef>
+          <a:effectRef idx="1">
+            <a:schemeClr val="accent1"/>
+          </a:effectRef>
+          <a:fontRef idx="minor">
+            <a:schemeClr val="tx1"/>
+          </a:fontRef>
+        </p:style>
+      </p:cxnSp>
+    </p:spTree>
+    <p:extLst>
+      <p:ext uri="{BB962C8B-B14F-4D97-AF65-F5344CB8AC3E}">
+        <p14:creationId xmlns:p14="http://schemas.microsoft.com/office/powerpoint/2010/main" val="4175355490"/>
+      </p:ext>
+    </p:extLst>
+  </p:cSld>
+  <p:clrMapOvr>
+    <a:masterClrMapping/>
+  </p:clrMapOvr>
+</p:sld>
+</file>
+
+<file path=ppt/slides/slide51.xml><?xml version="1.0" encoding="utf-8"?>
+<p:sld xmlns:a="http://schemas.openxmlformats.org/drawingml/2006/main" xmlns:r="http://schemas.openxmlformats.org/officeDocument/2006/relationships" xmlns:p="http://schemas.openxmlformats.org/presentationml/2006/main">
+  <p:cSld>
+    <p:bg>
+      <p:bgPr>
+        <a:blipFill dpi="0" rotWithShape="0">
+          <a:blip r:embed="rId3" cstate="print"/>
+          <a:srcRect/>
+          <a:stretch>
+            <a:fillRect/>
+          </a:stretch>
+        </a:blipFill>
+        <a:effectLst/>
+      </p:bgPr>
+    </p:bg>
+    <p:spTree>
+      <p:nvGrpSpPr>
+        <p:cNvPr id="1" name="">
+          <a:extLst>
+            <a:ext uri="{FF2B5EF4-FFF2-40B4-BE49-F238E27FC236}">
               <a16:creationId xmlns:a16="http://schemas.microsoft.com/office/drawing/2014/main" id="{0C4AE674-ED29-004A-8C4D-F0A6BEDBFBC7}"/>
             </a:ext>
           </a:extLst>
@@ -36159,7 +36522,7 @@
 </p:sld>
 </file>
 
-<file path=ppt/slides/slide51.xml><?xml version="1.0" encoding="utf-8"?>
+<file path=ppt/slides/slide52.xml><?xml version="1.0" encoding="utf-8"?>
 <p:sld xmlns:a="http://schemas.openxmlformats.org/drawingml/2006/main" xmlns:r="http://schemas.openxmlformats.org/officeDocument/2006/relationships" xmlns:p="http://schemas.openxmlformats.org/presentationml/2006/main">
   <p:cSld>
     <p:bg>
@@ -36843,7 +37206,7 @@
 </p:sld>
 </file>
 
-<file path=ppt/slides/slide52.xml><?xml version="1.0" encoding="utf-8"?>
+<file path=ppt/slides/slide53.xml><?xml version="1.0" encoding="utf-8"?>
 <p:sld xmlns:a="http://schemas.openxmlformats.org/drawingml/2006/main" xmlns:r="http://schemas.openxmlformats.org/officeDocument/2006/relationships" xmlns:p="http://schemas.openxmlformats.org/presentationml/2006/main">
   <p:cSld>
     <p:bg>
